--- a/课件/C2/C2-A-07/C2-A-07.pptx
+++ b/课件/C2/C2-A-07/C2-A-07.pptx
@@ -1,33 +1,33 @@
 
 <file path=ppt/presentation.xml><?xml version="1.0" encoding="utf-8"?>
-<p:presentation xmlns:a="http://schemas.openxmlformats.org/drawingml/2006/main" xmlns:r="http://schemas.openxmlformats.org/officeDocument/2006/relationships" xmlns:p="http://schemas.openxmlformats.org/presentationml/2006/main" saveSubsetFonts="1" autoCompressPictures="0">
+<p:presentation xmlns:a="http://schemas.openxmlformats.org/drawingml/2006/main" xmlns:r="http://schemas.openxmlformats.org/officeDocument/2006/relationships" xmlns:p="http://schemas.openxmlformats.org/presentationml/2006/main" autoCompressPictures="0">
   <p:sldMasterIdLst>
     <p:sldMasterId id="2147483648" r:id="rId1"/>
   </p:sldMasterIdLst>
+  <p:notesMasterIdLst>
+    <p:notesMasterId r:id="rId4"/>
+  </p:notesMasterIdLst>
   <p:sldIdLst>
-    <p:sldId id="256" r:id="rId2"/>
-    <p:sldId id="257" r:id="rId3"/>
-    <p:sldId id="258" r:id="rId4"/>
-    <p:sldId id="259" r:id="rId5"/>
-    <p:sldId id="260" r:id="rId6"/>
-    <p:sldId id="261" r:id="rId7"/>
-    <p:sldId id="262" r:id="rId8"/>
-    <p:sldId id="263" r:id="rId9"/>
-    <p:sldId id="264" r:id="rId10"/>
-    <p:sldId id="265" r:id="rId11"/>
-    <p:sldId id="266" r:id="rId12"/>
-    <p:sldId id="267" r:id="rId13"/>
-    <p:sldId id="268" r:id="rId14"/>
-    <p:sldId id="269" r:id="rId15"/>
-    <p:sldId id="270" r:id="rId16"/>
-    <p:sldId id="271" r:id="rId17"/>
-    <p:sldId id="272" r:id="rId18"/>
+    <p:sldId id="256" r:id="rId3"/>
+    <p:sldId id="257" r:id="rId5"/>
+    <p:sldId id="258" r:id="rId6"/>
+    <p:sldId id="259" r:id="rId7"/>
+    <p:sldId id="260" r:id="rId8"/>
+    <p:sldId id="261" r:id="rId9"/>
+    <p:sldId id="262" r:id="rId10"/>
+    <p:sldId id="263" r:id="rId11"/>
+    <p:sldId id="264" r:id="rId12"/>
+    <p:sldId id="265" r:id="rId13"/>
+    <p:sldId id="266" r:id="rId14"/>
+    <p:sldId id="267" r:id="rId15"/>
+    <p:sldId id="268" r:id="rId16"/>
+    <p:sldId id="269" r:id="rId17"/>
+    <p:sldId id="270" r:id="rId18"/>
+    <p:sldId id="271" r:id="rId19"/>
+    <p:sldId id="272" r:id="rId20"/>
   </p:sldIdLst>
-  <p:notesMasterIdLst>
-    <p:notesMasterId r:id="rId19"/>
-  </p:notesMasterIdLst>
-  <p:sldSz cx="12191695" cy="6858000"/>
-  <p:notesSz cx="6858000" cy="12191695"/>
+  <p:sldSz cx="12191365" cy="6858000"/>
+  <p:notesSz cx="6858000" cy="12191365"/>
   <p:defaultTextStyle>
     <a:lvl1pPr marL="0" algn="l" defTabSz="914400" rtl="0" eaLnBrk="1" latinLnBrk="0" hangingPunct="1">
       <a:defRPr sz="1800" kern="1200">
@@ -205,7 +205,6 @@
           <a:p>
             <a:fld id="{5282F153-3F37-0F45-9E97-73ACFA13230C}" type="datetimeFigureOut">
               <a:rPr lang="en-US"/>
-              <a:t>7/23/19</a:t>
             </a:fld>
             <a:endParaRPr lang="en-US"/>
           </a:p>
@@ -272,6 +271,7 @@
               <a:rPr lang="en-US"/>
               <a:t>Click to edit Master text styles</a:t>
             </a:r>
+            <a:endParaRPr lang="en-US"/>
           </a:p>
           <a:p>
             <a:pPr lvl="1"/>
@@ -279,6 +279,7 @@
               <a:rPr lang="en-US"/>
               <a:t>Second level</a:t>
             </a:r>
+            <a:endParaRPr lang="en-US"/>
           </a:p>
           <a:p>
             <a:pPr lvl="2"/>
@@ -286,6 +287,7 @@
               <a:rPr lang="en-US"/>
               <a:t>Third level</a:t>
             </a:r>
+            <a:endParaRPr lang="en-US"/>
           </a:p>
           <a:p>
             <a:pPr lvl="3"/>
@@ -293,6 +295,7 @@
               <a:rPr lang="en-US"/>
               <a:t>Fourth level</a:t>
             </a:r>
+            <a:endParaRPr lang="en-US"/>
           </a:p>
           <a:p>
             <a:pPr lvl="4"/>
@@ -300,6 +303,7 @@
               <a:rPr lang="en-US"/>
               <a:t>Fifth level</a:t>
             </a:r>
+            <a:endParaRPr lang="en-US"/>
           </a:p>
         </p:txBody>
       </p:sp>
@@ -363,18 +367,12 @@
           <a:p>
             <a:fld id="{CE5E9CC1-C706-0F49-92D6-E571CC5EEA8F}" type="slidenum">
               <a:rPr lang="en-US"/>
-              <a:t>‹#›</a:t>
             </a:fld>
             <a:endParaRPr lang="en-US"/>
           </a:p>
         </p:txBody>
       </p:sp>
     </p:spTree>
-    <p:extLst>
-      <p:ext uri="{BB962C8B-B14F-4D97-AF65-F5344CB8AC3E}">
-        <p14:creationId xmlns:p14="http://schemas.microsoft.com/office/powerpoint/2010/main" val="1024086991"/>
-      </p:ext>
-    </p:extLst>
   </p:cSld>
   <p:clrMap bg1="lt1" tx1="dk1" bg2="lt2" tx2="dk2" accent1="accent1" accent2="accent2" accent3="accent3" accent4="accent4" accent5="accent5" accent6="accent6" hlink="hlink" folHlink="folHlink"/>
   <p:notesStyle>
@@ -516,10 +514,6 @@
           <a:bodyPr/>
           <a:lstStyle/>
           <a:p>
-            <a:r>
-              <a:rPr lang="en-US" dirty="0"/>
-              <a:t/>
-            </a:r>
             <a:endParaRPr lang="en-US" dirty="0"/>
           </a:p>
         </p:txBody>
@@ -541,18 +535,12 @@
           <a:p>
             <a:fld id="{F7021451-1387-4CA6-816F-3879F97B5CBC}" type="slidenum">
               <a:rPr lang="en-US"/>
-              <a:t>1</a:t>
             </a:fld>
             <a:endParaRPr lang="en-US"/>
           </a:p>
         </p:txBody>
       </p:sp>
     </p:spTree>
-    <p:extLst>
-      <p:ext uri="{BB962C8B-B14F-4D97-AF65-F5344CB8AC3E}">
-        <p14:creationId xmlns:p14="http://schemas.microsoft.com/office/powerpoint/2010/main" val="1024086991"/>
-      </p:ext>
-    </p:extLst>
   </p:cSld>
   <p:clrMapOvr>
     <a:masterClrMapping/>
@@ -604,10 +592,6 @@
           <a:bodyPr/>
           <a:lstStyle/>
           <a:p>
-            <a:r>
-              <a:rPr lang="en-US" dirty="0"/>
-              <a:t/>
-            </a:r>
             <a:endParaRPr lang="en-US" dirty="0"/>
           </a:p>
         </p:txBody>
@@ -629,18 +613,12 @@
           <a:p>
             <a:fld id="{F7021451-1387-4CA6-816F-3879F97B5CBC}" type="slidenum">
               <a:rPr lang="en-US"/>
-              <a:t>10</a:t>
             </a:fld>
             <a:endParaRPr lang="en-US"/>
           </a:p>
         </p:txBody>
       </p:sp>
     </p:spTree>
-    <p:extLst>
-      <p:ext uri="{BB962C8B-B14F-4D97-AF65-F5344CB8AC3E}">
-        <p14:creationId xmlns:p14="http://schemas.microsoft.com/office/powerpoint/2010/main" val="1024086991"/>
-      </p:ext>
-    </p:extLst>
   </p:cSld>
   <p:clrMapOvr>
     <a:masterClrMapping/>
@@ -692,10 +670,6 @@
           <a:bodyPr/>
           <a:lstStyle/>
           <a:p>
-            <a:r>
-              <a:rPr lang="en-US" dirty="0"/>
-              <a:t/>
-            </a:r>
             <a:endParaRPr lang="en-US" dirty="0"/>
           </a:p>
         </p:txBody>
@@ -717,18 +691,12 @@
           <a:p>
             <a:fld id="{F7021451-1387-4CA6-816F-3879F97B5CBC}" type="slidenum">
               <a:rPr lang="en-US"/>
-              <a:t>11</a:t>
             </a:fld>
             <a:endParaRPr lang="en-US"/>
           </a:p>
         </p:txBody>
       </p:sp>
     </p:spTree>
-    <p:extLst>
-      <p:ext uri="{BB962C8B-B14F-4D97-AF65-F5344CB8AC3E}">
-        <p14:creationId xmlns:p14="http://schemas.microsoft.com/office/powerpoint/2010/main" val="1024086991"/>
-      </p:ext>
-    </p:extLst>
   </p:cSld>
   <p:clrMapOvr>
     <a:masterClrMapping/>
@@ -780,10 +748,6 @@
           <a:bodyPr/>
           <a:lstStyle/>
           <a:p>
-            <a:r>
-              <a:rPr lang="en-US" dirty="0"/>
-              <a:t/>
-            </a:r>
             <a:endParaRPr lang="en-US" dirty="0"/>
           </a:p>
         </p:txBody>
@@ -805,18 +769,12 @@
           <a:p>
             <a:fld id="{F7021451-1387-4CA6-816F-3879F97B5CBC}" type="slidenum">
               <a:rPr lang="en-US"/>
-              <a:t>12</a:t>
             </a:fld>
             <a:endParaRPr lang="en-US"/>
           </a:p>
         </p:txBody>
       </p:sp>
     </p:spTree>
-    <p:extLst>
-      <p:ext uri="{BB962C8B-B14F-4D97-AF65-F5344CB8AC3E}">
-        <p14:creationId xmlns:p14="http://schemas.microsoft.com/office/powerpoint/2010/main" val="1024086991"/>
-      </p:ext>
-    </p:extLst>
   </p:cSld>
   <p:clrMapOvr>
     <a:masterClrMapping/>
@@ -868,10 +826,6 @@
           <a:bodyPr/>
           <a:lstStyle/>
           <a:p>
-            <a:r>
-              <a:rPr lang="en-US" dirty="0"/>
-              <a:t/>
-            </a:r>
             <a:endParaRPr lang="en-US" dirty="0"/>
           </a:p>
         </p:txBody>
@@ -893,18 +847,12 @@
           <a:p>
             <a:fld id="{F7021451-1387-4CA6-816F-3879F97B5CBC}" type="slidenum">
               <a:rPr lang="en-US"/>
-              <a:t>13</a:t>
             </a:fld>
             <a:endParaRPr lang="en-US"/>
           </a:p>
         </p:txBody>
       </p:sp>
     </p:spTree>
-    <p:extLst>
-      <p:ext uri="{BB962C8B-B14F-4D97-AF65-F5344CB8AC3E}">
-        <p14:creationId xmlns:p14="http://schemas.microsoft.com/office/powerpoint/2010/main" val="1024086991"/>
-      </p:ext>
-    </p:extLst>
   </p:cSld>
   <p:clrMapOvr>
     <a:masterClrMapping/>
@@ -956,10 +904,6 @@
           <a:bodyPr/>
           <a:lstStyle/>
           <a:p>
-            <a:r>
-              <a:rPr lang="en-US" dirty="0"/>
-              <a:t/>
-            </a:r>
             <a:endParaRPr lang="en-US" dirty="0"/>
           </a:p>
         </p:txBody>
@@ -981,18 +925,12 @@
           <a:p>
             <a:fld id="{F7021451-1387-4CA6-816F-3879F97B5CBC}" type="slidenum">
               <a:rPr lang="en-US"/>
-              <a:t>14</a:t>
             </a:fld>
             <a:endParaRPr lang="en-US"/>
           </a:p>
         </p:txBody>
       </p:sp>
     </p:spTree>
-    <p:extLst>
-      <p:ext uri="{BB962C8B-B14F-4D97-AF65-F5344CB8AC3E}">
-        <p14:creationId xmlns:p14="http://schemas.microsoft.com/office/powerpoint/2010/main" val="1024086991"/>
-      </p:ext>
-    </p:extLst>
   </p:cSld>
   <p:clrMapOvr>
     <a:masterClrMapping/>
@@ -1044,10 +982,6 @@
           <a:bodyPr/>
           <a:lstStyle/>
           <a:p>
-            <a:r>
-              <a:rPr lang="en-US" dirty="0"/>
-              <a:t/>
-            </a:r>
             <a:endParaRPr lang="en-US" dirty="0"/>
           </a:p>
         </p:txBody>
@@ -1069,18 +1003,12 @@
           <a:p>
             <a:fld id="{F7021451-1387-4CA6-816F-3879F97B5CBC}" type="slidenum">
               <a:rPr lang="en-US"/>
-              <a:t>15</a:t>
             </a:fld>
             <a:endParaRPr lang="en-US"/>
           </a:p>
         </p:txBody>
       </p:sp>
     </p:spTree>
-    <p:extLst>
-      <p:ext uri="{BB962C8B-B14F-4D97-AF65-F5344CB8AC3E}">
-        <p14:creationId xmlns:p14="http://schemas.microsoft.com/office/powerpoint/2010/main" val="1024086991"/>
-      </p:ext>
-    </p:extLst>
   </p:cSld>
   <p:clrMapOvr>
     <a:masterClrMapping/>
@@ -1132,10 +1060,6 @@
           <a:bodyPr/>
           <a:lstStyle/>
           <a:p>
-            <a:r>
-              <a:rPr lang="en-US" dirty="0"/>
-              <a:t/>
-            </a:r>
             <a:endParaRPr lang="en-US" dirty="0"/>
           </a:p>
         </p:txBody>
@@ -1157,18 +1081,12 @@
           <a:p>
             <a:fld id="{F7021451-1387-4CA6-816F-3879F97B5CBC}" type="slidenum">
               <a:rPr lang="en-US"/>
-              <a:t>16</a:t>
             </a:fld>
             <a:endParaRPr lang="en-US"/>
           </a:p>
         </p:txBody>
       </p:sp>
     </p:spTree>
-    <p:extLst>
-      <p:ext uri="{BB962C8B-B14F-4D97-AF65-F5344CB8AC3E}">
-        <p14:creationId xmlns:p14="http://schemas.microsoft.com/office/powerpoint/2010/main" val="1024086991"/>
-      </p:ext>
-    </p:extLst>
   </p:cSld>
   <p:clrMapOvr>
     <a:masterClrMapping/>
@@ -1220,10 +1138,6 @@
           <a:bodyPr/>
           <a:lstStyle/>
           <a:p>
-            <a:r>
-              <a:rPr lang="en-US" dirty="0"/>
-              <a:t/>
-            </a:r>
             <a:endParaRPr lang="en-US" dirty="0"/>
           </a:p>
         </p:txBody>
@@ -1245,18 +1159,12 @@
           <a:p>
             <a:fld id="{F7021451-1387-4CA6-816F-3879F97B5CBC}" type="slidenum">
               <a:rPr lang="en-US"/>
-              <a:t>17</a:t>
             </a:fld>
             <a:endParaRPr lang="en-US"/>
           </a:p>
         </p:txBody>
       </p:sp>
     </p:spTree>
-    <p:extLst>
-      <p:ext uri="{BB962C8B-B14F-4D97-AF65-F5344CB8AC3E}">
-        <p14:creationId xmlns:p14="http://schemas.microsoft.com/office/powerpoint/2010/main" val="1024086991"/>
-      </p:ext>
-    </p:extLst>
   </p:cSld>
   <p:clrMapOvr>
     <a:masterClrMapping/>
@@ -1308,10 +1216,6 @@
           <a:bodyPr/>
           <a:lstStyle/>
           <a:p>
-            <a:r>
-              <a:rPr lang="en-US" dirty="0"/>
-              <a:t/>
-            </a:r>
             <a:endParaRPr lang="en-US" dirty="0"/>
           </a:p>
         </p:txBody>
@@ -1333,18 +1237,12 @@
           <a:p>
             <a:fld id="{F7021451-1387-4CA6-816F-3879F97B5CBC}" type="slidenum">
               <a:rPr lang="en-US"/>
-              <a:t>2</a:t>
             </a:fld>
             <a:endParaRPr lang="en-US"/>
           </a:p>
         </p:txBody>
       </p:sp>
     </p:spTree>
-    <p:extLst>
-      <p:ext uri="{BB962C8B-B14F-4D97-AF65-F5344CB8AC3E}">
-        <p14:creationId xmlns:p14="http://schemas.microsoft.com/office/powerpoint/2010/main" val="1024086991"/>
-      </p:ext>
-    </p:extLst>
   </p:cSld>
   <p:clrMapOvr>
     <a:masterClrMapping/>
@@ -1396,10 +1294,6 @@
           <a:bodyPr/>
           <a:lstStyle/>
           <a:p>
-            <a:r>
-              <a:rPr lang="en-US" dirty="0"/>
-              <a:t/>
-            </a:r>
             <a:endParaRPr lang="en-US" dirty="0"/>
           </a:p>
         </p:txBody>
@@ -1421,18 +1315,12 @@
           <a:p>
             <a:fld id="{F7021451-1387-4CA6-816F-3879F97B5CBC}" type="slidenum">
               <a:rPr lang="en-US"/>
-              <a:t>3</a:t>
             </a:fld>
             <a:endParaRPr lang="en-US"/>
           </a:p>
         </p:txBody>
       </p:sp>
     </p:spTree>
-    <p:extLst>
-      <p:ext uri="{BB962C8B-B14F-4D97-AF65-F5344CB8AC3E}">
-        <p14:creationId xmlns:p14="http://schemas.microsoft.com/office/powerpoint/2010/main" val="1024086991"/>
-      </p:ext>
-    </p:extLst>
   </p:cSld>
   <p:clrMapOvr>
     <a:masterClrMapping/>
@@ -1484,10 +1372,6 @@
           <a:bodyPr/>
           <a:lstStyle/>
           <a:p>
-            <a:r>
-              <a:rPr lang="en-US" dirty="0"/>
-              <a:t/>
-            </a:r>
             <a:endParaRPr lang="en-US" dirty="0"/>
           </a:p>
         </p:txBody>
@@ -1509,18 +1393,12 @@
           <a:p>
             <a:fld id="{F7021451-1387-4CA6-816F-3879F97B5CBC}" type="slidenum">
               <a:rPr lang="en-US"/>
-              <a:t>4</a:t>
             </a:fld>
             <a:endParaRPr lang="en-US"/>
           </a:p>
         </p:txBody>
       </p:sp>
     </p:spTree>
-    <p:extLst>
-      <p:ext uri="{BB962C8B-B14F-4D97-AF65-F5344CB8AC3E}">
-        <p14:creationId xmlns:p14="http://schemas.microsoft.com/office/powerpoint/2010/main" val="1024086991"/>
-      </p:ext>
-    </p:extLst>
   </p:cSld>
   <p:clrMapOvr>
     <a:masterClrMapping/>
@@ -1572,10 +1450,6 @@
           <a:bodyPr/>
           <a:lstStyle/>
           <a:p>
-            <a:r>
-              <a:rPr lang="en-US" dirty="0"/>
-              <a:t/>
-            </a:r>
             <a:endParaRPr lang="en-US" dirty="0"/>
           </a:p>
         </p:txBody>
@@ -1597,18 +1471,12 @@
           <a:p>
             <a:fld id="{F7021451-1387-4CA6-816F-3879F97B5CBC}" type="slidenum">
               <a:rPr lang="en-US"/>
-              <a:t>5</a:t>
             </a:fld>
             <a:endParaRPr lang="en-US"/>
           </a:p>
         </p:txBody>
       </p:sp>
     </p:spTree>
-    <p:extLst>
-      <p:ext uri="{BB962C8B-B14F-4D97-AF65-F5344CB8AC3E}">
-        <p14:creationId xmlns:p14="http://schemas.microsoft.com/office/powerpoint/2010/main" val="1024086991"/>
-      </p:ext>
-    </p:extLst>
   </p:cSld>
   <p:clrMapOvr>
     <a:masterClrMapping/>
@@ -1660,10 +1528,6 @@
           <a:bodyPr/>
           <a:lstStyle/>
           <a:p>
-            <a:r>
-              <a:rPr lang="en-US" dirty="0"/>
-              <a:t/>
-            </a:r>
             <a:endParaRPr lang="en-US" dirty="0"/>
           </a:p>
         </p:txBody>
@@ -1685,18 +1549,12 @@
           <a:p>
             <a:fld id="{F7021451-1387-4CA6-816F-3879F97B5CBC}" type="slidenum">
               <a:rPr lang="en-US"/>
-              <a:t>6</a:t>
             </a:fld>
             <a:endParaRPr lang="en-US"/>
           </a:p>
         </p:txBody>
       </p:sp>
     </p:spTree>
-    <p:extLst>
-      <p:ext uri="{BB962C8B-B14F-4D97-AF65-F5344CB8AC3E}">
-        <p14:creationId xmlns:p14="http://schemas.microsoft.com/office/powerpoint/2010/main" val="1024086991"/>
-      </p:ext>
-    </p:extLst>
   </p:cSld>
   <p:clrMapOvr>
     <a:masterClrMapping/>
@@ -1748,10 +1606,6 @@
           <a:bodyPr/>
           <a:lstStyle/>
           <a:p>
-            <a:r>
-              <a:rPr lang="en-US" dirty="0"/>
-              <a:t/>
-            </a:r>
             <a:endParaRPr lang="en-US" dirty="0"/>
           </a:p>
         </p:txBody>
@@ -1773,18 +1627,12 @@
           <a:p>
             <a:fld id="{F7021451-1387-4CA6-816F-3879F97B5CBC}" type="slidenum">
               <a:rPr lang="en-US"/>
-              <a:t>7</a:t>
             </a:fld>
             <a:endParaRPr lang="en-US"/>
           </a:p>
         </p:txBody>
       </p:sp>
     </p:spTree>
-    <p:extLst>
-      <p:ext uri="{BB962C8B-B14F-4D97-AF65-F5344CB8AC3E}">
-        <p14:creationId xmlns:p14="http://schemas.microsoft.com/office/powerpoint/2010/main" val="1024086991"/>
-      </p:ext>
-    </p:extLst>
   </p:cSld>
   <p:clrMapOvr>
     <a:masterClrMapping/>
@@ -1836,10 +1684,6 @@
           <a:bodyPr/>
           <a:lstStyle/>
           <a:p>
-            <a:r>
-              <a:rPr lang="en-US" dirty="0"/>
-              <a:t/>
-            </a:r>
             <a:endParaRPr lang="en-US" dirty="0"/>
           </a:p>
         </p:txBody>
@@ -1861,18 +1705,12 @@
           <a:p>
             <a:fld id="{F7021451-1387-4CA6-816F-3879F97B5CBC}" type="slidenum">
               <a:rPr lang="en-US"/>
-              <a:t>8</a:t>
             </a:fld>
             <a:endParaRPr lang="en-US"/>
           </a:p>
         </p:txBody>
       </p:sp>
     </p:spTree>
-    <p:extLst>
-      <p:ext uri="{BB962C8B-B14F-4D97-AF65-F5344CB8AC3E}">
-        <p14:creationId xmlns:p14="http://schemas.microsoft.com/office/powerpoint/2010/main" val="1024086991"/>
-      </p:ext>
-    </p:extLst>
   </p:cSld>
   <p:clrMapOvr>
     <a:masterClrMapping/>
@@ -1924,10 +1762,6 @@
           <a:bodyPr/>
           <a:lstStyle/>
           <a:p>
-            <a:r>
-              <a:rPr lang="en-US" dirty="0"/>
-              <a:t/>
-            </a:r>
             <a:endParaRPr lang="en-US" dirty="0"/>
           </a:p>
         </p:txBody>
@@ -1949,18 +1783,12 @@
           <a:p>
             <a:fld id="{F7021451-1387-4CA6-816F-3879F97B5CBC}" type="slidenum">
               <a:rPr lang="en-US"/>
-              <a:t>9</a:t>
             </a:fld>
             <a:endParaRPr lang="en-US"/>
           </a:p>
         </p:txBody>
       </p:sp>
     </p:spTree>
-    <p:extLst>
-      <p:ext uri="{BB962C8B-B14F-4D97-AF65-F5344CB8AC3E}">
-        <p14:creationId xmlns:p14="http://schemas.microsoft.com/office/powerpoint/2010/main" val="1024086991"/>
-      </p:ext>
-    </p:extLst>
   </p:cSld>
   <p:clrMapOvr>
     <a:masterClrMapping/>
@@ -2001,6 +1829,11 @@
 <file path=ppt/slideMasters/slideMaster1.xml><?xml version="1.0" encoding="utf-8"?>
 <p:sldMaster xmlns:a="http://schemas.openxmlformats.org/drawingml/2006/main" xmlns:r="http://schemas.openxmlformats.org/officeDocument/2006/relationships" xmlns:p="http://schemas.openxmlformats.org/presentationml/2006/main">
   <p:cSld>
+    <p:bg>
+      <p:bgRef idx="1001">
+        <a:schemeClr val="bg1"/>
+      </p:bgRef>
+    </p:bg>
     <p:spTree>
       <p:nvGrpSpPr>
         <p:cNvPr id="1" name=""/>
@@ -2044,7 +1877,7 @@
         <a:spcBef>
           <a:spcPct val="20000"/>
         </a:spcBef>
-        <a:buFont typeface="Arial" pitchFamily="34" charset="0"/>
+        <a:buFont typeface="Arial" panose="020B0604020202020204" pitchFamily="34" charset="0"/>
         <a:buChar char="•"/>
         <a:defRPr sz="3200" kern="1200">
           <a:solidFill>
@@ -2059,7 +1892,7 @@
         <a:spcBef>
           <a:spcPct val="20000"/>
         </a:spcBef>
-        <a:buFont typeface="Arial" pitchFamily="34" charset="0"/>
+        <a:buFont typeface="Arial" panose="020B0604020202020204" pitchFamily="34" charset="0"/>
         <a:buChar char="–"/>
         <a:defRPr sz="2800" kern="1200">
           <a:solidFill>
@@ -2074,7 +1907,7 @@
         <a:spcBef>
           <a:spcPct val="20000"/>
         </a:spcBef>
-        <a:buFont typeface="Arial" pitchFamily="34" charset="0"/>
+        <a:buFont typeface="Arial" panose="020B0604020202020204" pitchFamily="34" charset="0"/>
         <a:buChar char="•"/>
         <a:defRPr sz="2400" kern="1200">
           <a:solidFill>
@@ -2089,7 +1922,7 @@
         <a:spcBef>
           <a:spcPct val="20000"/>
         </a:spcBef>
-        <a:buFont typeface="Arial" pitchFamily="34" charset="0"/>
+        <a:buFont typeface="Arial" panose="020B0604020202020204" pitchFamily="34" charset="0"/>
         <a:buChar char="–"/>
         <a:defRPr sz="2000" kern="1200">
           <a:solidFill>
@@ -2104,7 +1937,7 @@
         <a:spcBef>
           <a:spcPct val="20000"/>
         </a:spcBef>
-        <a:buFont typeface="Arial" pitchFamily="34" charset="0"/>
+        <a:buFont typeface="Arial" panose="020B0604020202020204" pitchFamily="34" charset="0"/>
         <a:buChar char="»"/>
         <a:defRPr sz="2000" kern="1200">
           <a:solidFill>
@@ -2119,7 +1952,7 @@
         <a:spcBef>
           <a:spcPct val="20000"/>
         </a:spcBef>
-        <a:buFont typeface="Arial" pitchFamily="34" charset="0"/>
+        <a:buFont typeface="Arial" panose="020B0604020202020204" pitchFamily="34" charset="0"/>
         <a:buChar char="•"/>
         <a:defRPr sz="2000" kern="1200">
           <a:solidFill>
@@ -2134,7 +1967,7 @@
         <a:spcBef>
           <a:spcPct val="20000"/>
         </a:spcBef>
-        <a:buFont typeface="Arial" pitchFamily="34" charset="0"/>
+        <a:buFont typeface="Arial" panose="020B0604020202020204" pitchFamily="34" charset="0"/>
         <a:buChar char="•"/>
         <a:defRPr sz="2000" kern="1200">
           <a:solidFill>
@@ -2149,7 +1982,7 @@
         <a:spcBef>
           <a:spcPct val="20000"/>
         </a:spcBef>
-        <a:buFont typeface="Arial" pitchFamily="34" charset="0"/>
+        <a:buFont typeface="Arial" panose="020B0604020202020204" pitchFamily="34" charset="0"/>
         <a:buChar char="•"/>
         <a:defRPr sz="2000" kern="1200">
           <a:solidFill>
@@ -2164,7 +1997,7 @@
         <a:spcBef>
           <a:spcPct val="20000"/>
         </a:spcBef>
-        <a:buFont typeface="Arial" pitchFamily="34" charset="0"/>
+        <a:buFont typeface="Arial" panose="020B0604020202020204" pitchFamily="34" charset="0"/>
         <a:buChar char="•"/>
         <a:defRPr sz="2000" kern="1200">
           <a:solidFill>
@@ -2277,7 +2110,7 @@
 
 <file path=ppt/slides/slide1.xml><?xml version="1.0" encoding="utf-8"?>
 <p:sld xmlns:a="http://schemas.openxmlformats.org/drawingml/2006/main" xmlns:r="http://schemas.openxmlformats.org/officeDocument/2006/relationships" xmlns:p="http://schemas.openxmlformats.org/presentationml/2006/main">
-  <p:cSld name="Slide 1">
+  <p:cSld>
     <p:bg>
       <p:bgPr>
         <a:blipFill dpi="0" rotWithShape="1">
@@ -2321,13 +2154,12 @@
             <a:avLst/>
           </a:prstGeom>
           <a:noFill/>
-          <a:ln/>
         </p:spPr>
         <p:txBody>
           <a:bodyPr wrap="square" rtlCol="0" anchor="ctr"/>
           <a:lstStyle/>
           <a:p>
-            <a:pPr algn="r" indent="0" marL="0">
+            <a:pPr marL="0" indent="0" algn="r">
               <a:buNone/>
             </a:pPr>
             <a:r>
@@ -2335,9 +2167,9 @@
                 <a:solidFill>
                   <a:srgbClr val="8A9099"/>
                 </a:solidFill>
-                <a:latin typeface="微软雅黑" pitchFamily="34" charset="0"/>
-                <a:ea typeface="微软雅黑" pitchFamily="34" charset="-122"/>
-                <a:cs typeface="微软雅黑" pitchFamily="34" charset="-120"/>
+                <a:latin typeface="微软雅黑" panose="020B0503020204020204" pitchFamily="34" charset="-122"/>
+                <a:ea typeface="微软雅黑" panose="020B0503020204020204" pitchFamily="34" charset="-122"/>
+                <a:cs typeface="微软雅黑" panose="020B0503020204020204" pitchFamily="34" charset="-120"/>
               </a:rPr>
               <a:t>1 / 17</a:t>
             </a:r>
@@ -2360,13 +2192,12 @@
             <a:avLst/>
           </a:prstGeom>
           <a:noFill/>
-          <a:ln/>
         </p:spPr>
         <p:txBody>
           <a:bodyPr wrap="square" rtlCol="0" anchor="ctr"/>
           <a:lstStyle/>
           <a:p>
-            <a:pPr algn="ctr" indent="0" marL="0">
+            <a:pPr marL="0" indent="0" algn="ctr">
               <a:buNone/>
             </a:pPr>
             <a:r>
@@ -2374,9 +2205,9 @@
                 <a:solidFill>
                   <a:srgbClr val="1F4E9C"/>
                 </a:solidFill>
-                <a:latin typeface="微软雅黑" pitchFamily="34" charset="0"/>
-                <a:ea typeface="微软雅黑" pitchFamily="34" charset="-122"/>
-                <a:cs typeface="微软雅黑" pitchFamily="34" charset="-120"/>
+                <a:latin typeface="微软雅黑" panose="020B0503020204020204" pitchFamily="34" charset="-122"/>
+                <a:ea typeface="微软雅黑" panose="020B0503020204020204" pitchFamily="34" charset="-122"/>
+                <a:cs typeface="微软雅黑" panose="020B0503020204020204" pitchFamily="34" charset="-120"/>
               </a:rPr>
               <a:t>重邮802 数据结构代码课程</a:t>
             </a:r>
@@ -2399,13 +2230,12 @@
             <a:avLst/>
           </a:prstGeom>
           <a:noFill/>
-          <a:ln/>
         </p:spPr>
         <p:txBody>
           <a:bodyPr wrap="square" rtlCol="0" anchor="ctr"/>
           <a:lstStyle/>
           <a:p>
-            <a:pPr algn="ctr" indent="0" marL="0">
+            <a:pPr marL="0" indent="0" algn="ctr">
               <a:buNone/>
             </a:pPr>
             <a:r>
@@ -2413,9 +2243,9 @@
                 <a:solidFill>
                   <a:srgbClr val="1F2329"/>
                 </a:solidFill>
-                <a:latin typeface="微软雅黑" pitchFamily="34" charset="0"/>
-                <a:ea typeface="微软雅黑" pitchFamily="34" charset="-122"/>
-                <a:cs typeface="微软雅黑" pitchFamily="34" charset="-120"/>
+                <a:latin typeface="微软雅黑" panose="020B0503020204020204" pitchFamily="34" charset="-122"/>
+                <a:ea typeface="微软雅黑" panose="020B0503020204020204" pitchFamily="34" charset="-122"/>
+                <a:cs typeface="微软雅黑" panose="020B0503020204020204" pitchFamily="34" charset="-120"/>
               </a:rPr>
               <a:t>数据结构基础阶段</a:t>
             </a:r>
@@ -2438,13 +2268,12 @@
             <a:avLst/>
           </a:prstGeom>
           <a:noFill/>
-          <a:ln/>
         </p:spPr>
         <p:txBody>
           <a:bodyPr wrap="square" rtlCol="0" anchor="ctr"/>
           <a:lstStyle/>
           <a:p>
-            <a:pPr algn="ctr" indent="0" marL="0">
+            <a:pPr marL="0" indent="0" algn="ctr">
               <a:buNone/>
             </a:pPr>
             <a:r>
@@ -2452,9 +2281,9 @@
                 <a:solidFill>
                   <a:srgbClr val="1F2329"/>
                 </a:solidFill>
-                <a:latin typeface="微软雅黑" pitchFamily="34" charset="0"/>
-                <a:ea typeface="微软雅黑" pitchFamily="34" charset="-122"/>
-                <a:cs typeface="微软雅黑" pitchFamily="34" charset="-120"/>
+                <a:latin typeface="微软雅黑" panose="020B0503020204020204" pitchFamily="34" charset="-122"/>
+                <a:ea typeface="微软雅黑" panose="020B0503020204020204" pitchFamily="34" charset="-122"/>
+                <a:cs typeface="微软雅黑" panose="020B0503020204020204" pitchFamily="34" charset="-120"/>
               </a:rPr>
               <a:t>第7节 二叉树：存储与遍历</a:t>
             </a:r>
@@ -2477,13 +2306,12 @@
             <a:avLst/>
           </a:prstGeom>
           <a:noFill/>
-          <a:ln/>
         </p:spPr>
         <p:txBody>
           <a:bodyPr wrap="square" rtlCol="0" anchor="ctr"/>
           <a:lstStyle/>
           <a:p>
-            <a:pPr algn="ctr" indent="0" marL="0">
+            <a:pPr marL="0" indent="0" algn="ctr">
               <a:buNone/>
             </a:pPr>
             <a:r>
@@ -2491,9 +2319,9 @@
                 <a:solidFill>
                   <a:srgbClr val="8A9099"/>
                 </a:solidFill>
-                <a:latin typeface="微软雅黑" pitchFamily="34" charset="0"/>
-                <a:ea typeface="微软雅黑" pitchFamily="34" charset="-122"/>
-                <a:cs typeface="微软雅黑" pitchFamily="34" charset="-120"/>
+                <a:latin typeface="微软雅黑" panose="020B0503020204020204" pitchFamily="34" charset="-122"/>
+                <a:ea typeface="微软雅黑" panose="020B0503020204020204" pitchFamily="34" charset="-122"/>
+                <a:cs typeface="微软雅黑" panose="020B0503020204020204" pitchFamily="34" charset="-120"/>
               </a:rPr>
               <a:t>阶段：基础 ｜ 主讲：牙膏学长 ｜ 预计45分钟 ｜ 资料答疑：伴梦研途QQ群</a:t>
             </a:r>
@@ -2511,7 +2339,7 @@
 
 <file path=ppt/slides/slide10.xml><?xml version="1.0" encoding="utf-8"?>
 <p:sld xmlns:a="http://schemas.openxmlformats.org/drawingml/2006/main" xmlns:r="http://schemas.openxmlformats.org/officeDocument/2006/relationships" xmlns:p="http://schemas.openxmlformats.org/presentationml/2006/main">
-  <p:cSld name="Slide 10">
+  <p:cSld>
     <p:bg>
       <p:bgPr>
         <a:blipFill dpi="0" rotWithShape="1">
@@ -2555,13 +2383,12 @@
             <a:avLst/>
           </a:prstGeom>
           <a:noFill/>
-          <a:ln/>
         </p:spPr>
         <p:txBody>
           <a:bodyPr wrap="square" rtlCol="0" anchor="ctr"/>
           <a:lstStyle/>
           <a:p>
-            <a:pPr algn="r" indent="0" marL="0">
+            <a:pPr marL="0" indent="0" algn="r">
               <a:buNone/>
             </a:pPr>
             <a:r>
@@ -2569,9 +2396,9 @@
                 <a:solidFill>
                   <a:srgbClr val="8A9099"/>
                 </a:solidFill>
-                <a:latin typeface="微软雅黑" pitchFamily="34" charset="0"/>
-                <a:ea typeface="微软雅黑" pitchFamily="34" charset="-122"/>
-                <a:cs typeface="微软雅黑" pitchFamily="34" charset="-120"/>
+                <a:latin typeface="微软雅黑" panose="020B0503020204020204" pitchFamily="34" charset="-122"/>
+                <a:ea typeface="微软雅黑" panose="020B0503020204020204" pitchFamily="34" charset="-122"/>
+                <a:cs typeface="微软雅黑" panose="020B0503020204020204" pitchFamily="34" charset="-120"/>
               </a:rPr>
               <a:t>10 / 17</a:t>
             </a:r>
@@ -2594,13 +2421,12 @@
             <a:avLst/>
           </a:prstGeom>
           <a:noFill/>
-          <a:ln/>
         </p:spPr>
         <p:txBody>
           <a:bodyPr wrap="square" rtlCol="0" anchor="ctr"/>
           <a:lstStyle/>
           <a:p>
-            <a:pPr algn="l" indent="0" marL="0">
+            <a:pPr marL="0" indent="0" algn="l">
               <a:buNone/>
             </a:pPr>
             <a:r>
@@ -2608,9 +2434,9 @@
                 <a:solidFill>
                   <a:srgbClr val="1F4E9C"/>
                 </a:solidFill>
-                <a:latin typeface="微软雅黑" pitchFamily="34" charset="0"/>
-                <a:ea typeface="微软雅黑" pitchFamily="34" charset="-122"/>
-                <a:cs typeface="微软雅黑" pitchFamily="34" charset="-120"/>
+                <a:latin typeface="微软雅黑" panose="020B0503020204020204" pitchFamily="34" charset="-122"/>
+                <a:ea typeface="微软雅黑" panose="020B0503020204020204" pitchFamily="34" charset="-122"/>
+                <a:cs typeface="微软雅黑" panose="020B0503020204020204" pitchFamily="34" charset="-120"/>
               </a:rPr>
               <a:t>非递归后序</a:t>
             </a:r>
@@ -2633,13 +2459,12 @@
             <a:avLst/>
           </a:prstGeom>
           <a:noFill/>
-          <a:ln/>
         </p:spPr>
         <p:txBody>
           <a:bodyPr wrap="square" rtlCol="0" anchor="ctr"/>
           <a:lstStyle/>
           <a:p>
-            <a:pPr algn="l" indent="0" marL="0">
+            <a:pPr marL="0" indent="0" algn="l">
               <a:buNone/>
             </a:pPr>
             <a:r>
@@ -2647,9 +2472,9 @@
                 <a:solidFill>
                   <a:srgbClr val="1F2329"/>
                 </a:solidFill>
-                <a:latin typeface="微软雅黑" pitchFamily="34" charset="0"/>
-                <a:ea typeface="微软雅黑" pitchFamily="34" charset="-122"/>
-                <a:cs typeface="微软雅黑" pitchFamily="34" charset="-120"/>
+                <a:latin typeface="微软雅黑" panose="020B0503020204020204" pitchFamily="34" charset="-122"/>
+                <a:ea typeface="微软雅黑" panose="020B0503020204020204" pitchFamily="34" charset="-122"/>
+                <a:cs typeface="微软雅黑" panose="020B0503020204020204" pitchFamily="34" charset="-120"/>
               </a:rPr>
               <a:t>非递归后序：双栈逆序法</a:t>
             </a:r>
@@ -2674,7 +2499,6 @@
           <a:solidFill>
             <a:srgbClr val="F7F9FC"/>
           </a:solidFill>
-          <a:ln/>
         </p:spPr>
       </p:sp>
       <p:sp>
@@ -2694,7 +2518,6 @@
           <a:solidFill>
             <a:srgbClr val="1F4E9C"/>
           </a:solidFill>
-          <a:ln/>
         </p:spPr>
       </p:sp>
       <p:sp>
@@ -2712,13 +2535,12 @@
             <a:avLst/>
           </a:prstGeom>
           <a:noFill/>
-          <a:ln/>
         </p:spPr>
         <p:txBody>
           <a:bodyPr wrap="square" rtlCol="0" anchor="t"/>
           <a:lstStyle/>
           <a:p>
-            <a:pPr algn="l" indent="0" marL="0">
+            <a:pPr marL="0" indent="0" algn="l">
               <a:lnSpc>
                 <a:spcPct val="125000"/>
               </a:lnSpc>
@@ -2729,9 +2551,9 @@
                 <a:solidFill>
                   <a:srgbClr val="1F2329"/>
                 </a:solidFill>
-                <a:latin typeface="Consolas" pitchFamily="34" charset="0"/>
-                <a:ea typeface="Consolas" pitchFamily="34" charset="-122"/>
-                <a:cs typeface="Consolas" pitchFamily="34" charset="-120"/>
+                <a:latin typeface="Consolas" panose="020B0609020204030204" pitchFamily="34" charset="0"/>
+                <a:ea typeface="Consolas" panose="020B0609020204030204" pitchFamily="34" charset="-122"/>
+                <a:cs typeface="Consolas" panose="020B0609020204030204" pitchFamily="34" charset="-120"/>
               </a:rPr>
               <a:t>void PostOrder2(BiTree T){
     if(T == NULL) return;                     // 判空不能少
@@ -2764,13 +2586,12 @@
             <a:avLst/>
           </a:prstGeom>
           <a:noFill/>
-          <a:ln/>
         </p:spPr>
         <p:txBody>
           <a:bodyPr wrap="square" rtlCol="0" anchor="t"/>
           <a:lstStyle/>
           <a:p>
-            <a:pPr algn="l" indent="0" marL="0">
+            <a:pPr marL="0" indent="0" algn="l">
               <a:buNone/>
             </a:pPr>
             <a:r>
@@ -2778,9 +2599,9 @@
                 <a:solidFill>
                   <a:srgbClr val="8A9099"/>
                 </a:solidFill>
-                <a:latin typeface="微软雅黑" pitchFamily="34" charset="0"/>
-                <a:ea typeface="微软雅黑" pitchFamily="34" charset="-122"/>
-                <a:cs typeface="微软雅黑" pitchFamily="34" charset="-120"/>
+                <a:latin typeface="微软雅黑" panose="020B0503020204020204" pitchFamily="34" charset="-122"/>
+                <a:ea typeface="微软雅黑" panose="020B0503020204020204" pitchFamily="34" charset="-122"/>
+                <a:cs typeface="微软雅黑" panose="020B0503020204020204" pitchFamily="34" charset="-120"/>
               </a:rPr>
               <a:t>s1 先压左再压右，弹出序就成了根、右、左；把它全压进 s2，再从 s2 弹出正好反过来，是左、右、根，即后序</a:t>
             </a:r>
@@ -2798,7 +2619,7 @@
 
 <file path=ppt/slides/slide11.xml><?xml version="1.0" encoding="utf-8"?>
 <p:sld xmlns:a="http://schemas.openxmlformats.org/drawingml/2006/main" xmlns:r="http://schemas.openxmlformats.org/officeDocument/2006/relationships" xmlns:p="http://schemas.openxmlformats.org/presentationml/2006/main">
-  <p:cSld name="Slide 11">
+  <p:cSld>
     <p:bg>
       <p:bgPr>
         <a:blipFill dpi="0" rotWithShape="1">
@@ -2842,13 +2663,12 @@
             <a:avLst/>
           </a:prstGeom>
           <a:noFill/>
-          <a:ln/>
         </p:spPr>
         <p:txBody>
           <a:bodyPr wrap="square" rtlCol="0" anchor="ctr"/>
           <a:lstStyle/>
           <a:p>
-            <a:pPr algn="r" indent="0" marL="0">
+            <a:pPr marL="0" indent="0" algn="r">
               <a:buNone/>
             </a:pPr>
             <a:r>
@@ -2856,9 +2676,9 @@
                 <a:solidFill>
                   <a:srgbClr val="8A9099"/>
                 </a:solidFill>
-                <a:latin typeface="微软雅黑" pitchFamily="34" charset="0"/>
-                <a:ea typeface="微软雅黑" pitchFamily="34" charset="-122"/>
-                <a:cs typeface="微软雅黑" pitchFamily="34" charset="-120"/>
+                <a:latin typeface="微软雅黑" panose="020B0503020204020204" pitchFamily="34" charset="-122"/>
+                <a:ea typeface="微软雅黑" panose="020B0503020204020204" pitchFamily="34" charset="-122"/>
+                <a:cs typeface="微软雅黑" panose="020B0503020204020204" pitchFamily="34" charset="-120"/>
               </a:rPr>
               <a:t>11 / 17</a:t>
             </a:r>
@@ -2881,13 +2701,12 @@
             <a:avLst/>
           </a:prstGeom>
           <a:noFill/>
-          <a:ln/>
         </p:spPr>
         <p:txBody>
           <a:bodyPr wrap="square" rtlCol="0" anchor="ctr"/>
           <a:lstStyle/>
           <a:p>
-            <a:pPr algn="l" indent="0" marL="0">
+            <a:pPr marL="0" indent="0" algn="l">
               <a:buNone/>
             </a:pPr>
             <a:r>
@@ -2895,9 +2714,9 @@
                 <a:solidFill>
                   <a:srgbClr val="1F4E9C"/>
                 </a:solidFill>
-                <a:latin typeface="微软雅黑" pitchFamily="34" charset="0"/>
-                <a:ea typeface="微软雅黑" pitchFamily="34" charset="-122"/>
-                <a:cs typeface="微软雅黑" pitchFamily="34" charset="-120"/>
+                <a:latin typeface="微软雅黑" panose="020B0503020204020204" pitchFamily="34" charset="-122"/>
+                <a:ea typeface="微软雅黑" panose="020B0503020204020204" pitchFamily="34" charset="-122"/>
+                <a:cs typeface="微软雅黑" panose="020B0503020204020204" pitchFamily="34" charset="-120"/>
               </a:rPr>
               <a:t>层序遍历</a:t>
             </a:r>
@@ -2920,13 +2739,12 @@
             <a:avLst/>
           </a:prstGeom>
           <a:noFill/>
-          <a:ln/>
         </p:spPr>
         <p:txBody>
           <a:bodyPr wrap="square" rtlCol="0" anchor="ctr"/>
           <a:lstStyle/>
           <a:p>
-            <a:pPr algn="l" indent="0" marL="0">
+            <a:pPr marL="0" indent="0" algn="l">
               <a:buNone/>
             </a:pPr>
             <a:r>
@@ -2934,9 +2752,9 @@
                 <a:solidFill>
                   <a:srgbClr val="1F2329"/>
                 </a:solidFill>
-                <a:latin typeface="微软雅黑" pitchFamily="34" charset="0"/>
-                <a:ea typeface="微软雅黑" pitchFamily="34" charset="-122"/>
-                <a:cs typeface="微软雅黑" pitchFamily="34" charset="-120"/>
+                <a:latin typeface="微软雅黑" panose="020B0503020204020204" pitchFamily="34" charset="-122"/>
+                <a:ea typeface="微软雅黑" panose="020B0503020204020204" pitchFamily="34" charset="-122"/>
+                <a:cs typeface="微软雅黑" panose="020B0503020204020204" pitchFamily="34" charset="-120"/>
               </a:rPr>
               <a:t>层序遍历：为什么必须用队列</a:t>
             </a:r>
@@ -2961,7 +2779,6 @@
           <a:solidFill>
             <a:srgbClr val="F7F9FC"/>
           </a:solidFill>
-          <a:ln/>
         </p:spPr>
       </p:sp>
       <p:sp>
@@ -2981,7 +2798,6 @@
           <a:solidFill>
             <a:srgbClr val="1F4E9C"/>
           </a:solidFill>
-          <a:ln/>
         </p:spPr>
       </p:sp>
       <p:sp>
@@ -2999,13 +2815,12 @@
             <a:avLst/>
           </a:prstGeom>
           <a:noFill/>
-          <a:ln/>
         </p:spPr>
         <p:txBody>
           <a:bodyPr wrap="square" rtlCol="0" anchor="t"/>
           <a:lstStyle/>
           <a:p>
-            <a:pPr algn="l" indent="0" marL="0">
+            <a:pPr marL="0" indent="0" algn="l">
               <a:lnSpc>
                 <a:spcPct val="125000"/>
               </a:lnSpc>
@@ -3016,9 +2831,9 @@
                 <a:solidFill>
                   <a:srgbClr val="1F2329"/>
                 </a:solidFill>
-                <a:latin typeface="Consolas" pitchFamily="34" charset="0"/>
-                <a:ea typeface="Consolas" pitchFamily="34" charset="-122"/>
-                <a:cs typeface="Consolas" pitchFamily="34" charset="-120"/>
+                <a:latin typeface="Consolas" panose="020B0609020204030204" pitchFamily="34" charset="0"/>
+                <a:ea typeface="Consolas" panose="020B0609020204030204" pitchFamily="34" charset="-122"/>
+                <a:cs typeface="Consolas" panose="020B0609020204030204" pitchFamily="34" charset="-120"/>
               </a:rPr>
               <a:t>void LevelOrder(BiTree T){
     if(T == NULL) return;
@@ -3051,13 +2866,12 @@
             <a:avLst/>
           </a:prstGeom>
           <a:noFill/>
-          <a:ln/>
         </p:spPr>
         <p:txBody>
           <a:bodyPr wrap="square" rtlCol="0" anchor="t"/>
           <a:lstStyle/>
           <a:p>
-            <a:pPr algn="l" indent="0" marL="0">
+            <a:pPr marL="0" indent="0" algn="l">
               <a:buNone/>
             </a:pPr>
             <a:r>
@@ -3065,9 +2879,9 @@
                 <a:solidFill>
                   <a:srgbClr val="8A9099"/>
                 </a:solidFill>
-                <a:latin typeface="微软雅黑" pitchFamily="34" charset="0"/>
-                <a:ea typeface="微软雅黑" pitchFamily="34" charset="-122"/>
-                <a:cs typeface="微软雅黑" pitchFamily="34" charset="-120"/>
+                <a:latin typeface="微软雅黑" panose="020B0503020204020204" pitchFamily="34" charset="-122"/>
+                <a:ea typeface="微软雅黑" panose="020B0503020204020204" pitchFamily="34" charset="-122"/>
+                <a:cs typeface="微软雅黑" panose="020B0503020204020204" pitchFamily="34" charset="-120"/>
               </a:rPr>
               <a:t>层序要先进先出，同层结点先入队先访问；用栈就变成深度优先了。入队前要判孩子非空，否则把 NULL 入队、出队 visit(NULL) 会崩</a:t>
             </a:r>
@@ -3085,7 +2899,7 @@
 
 <file path=ppt/slides/slide12.xml><?xml version="1.0" encoding="utf-8"?>
 <p:sld xmlns:a="http://schemas.openxmlformats.org/drawingml/2006/main" xmlns:r="http://schemas.openxmlformats.org/officeDocument/2006/relationships" xmlns:p="http://schemas.openxmlformats.org/presentationml/2006/main">
-  <p:cSld name="Slide 12">
+  <p:cSld>
     <p:bg>
       <p:bgPr>
         <a:blipFill dpi="0" rotWithShape="1">
@@ -3129,13 +2943,12 @@
             <a:avLst/>
           </a:prstGeom>
           <a:noFill/>
-          <a:ln/>
         </p:spPr>
         <p:txBody>
           <a:bodyPr wrap="square" rtlCol="0" anchor="ctr"/>
           <a:lstStyle/>
           <a:p>
-            <a:pPr algn="r" indent="0" marL="0">
+            <a:pPr marL="0" indent="0" algn="r">
               <a:buNone/>
             </a:pPr>
             <a:r>
@@ -3143,9 +2956,9 @@
                 <a:solidFill>
                   <a:srgbClr val="8A9099"/>
                 </a:solidFill>
-                <a:latin typeface="微软雅黑" pitchFamily="34" charset="0"/>
-                <a:ea typeface="微软雅黑" pitchFamily="34" charset="-122"/>
-                <a:cs typeface="微软雅黑" pitchFamily="34" charset="-120"/>
+                <a:latin typeface="微软雅黑" panose="020B0503020204020204" pitchFamily="34" charset="-122"/>
+                <a:ea typeface="微软雅黑" panose="020B0503020204020204" pitchFamily="34" charset="-122"/>
+                <a:cs typeface="微软雅黑" panose="020B0503020204020204" pitchFamily="34" charset="-120"/>
               </a:rPr>
               <a:t>12 / 17</a:t>
             </a:r>
@@ -3168,13 +2981,12 @@
             <a:avLst/>
           </a:prstGeom>
           <a:noFill/>
-          <a:ln/>
         </p:spPr>
         <p:txBody>
           <a:bodyPr wrap="square" rtlCol="0" anchor="ctr"/>
           <a:lstStyle/>
           <a:p>
-            <a:pPr algn="l" indent="0" marL="0">
+            <a:pPr marL="0" indent="0" algn="l">
               <a:buNone/>
             </a:pPr>
             <a:r>
@@ -3182,9 +2994,9 @@
                 <a:solidFill>
                   <a:srgbClr val="1F4E9C"/>
                 </a:solidFill>
-                <a:latin typeface="微软雅黑" pitchFamily="34" charset="0"/>
-                <a:ea typeface="微软雅黑" pitchFamily="34" charset="-122"/>
-                <a:cs typeface="微软雅黑" pitchFamily="34" charset="-120"/>
+                <a:latin typeface="微软雅黑" panose="020B0503020204020204" pitchFamily="34" charset="-122"/>
+                <a:ea typeface="微软雅黑" panose="020B0503020204020204" pitchFamily="34" charset="-122"/>
+                <a:cs typeface="微软雅黑" panose="020B0503020204020204" pitchFamily="34" charset="-120"/>
               </a:rPr>
               <a:t>由遍历序列建树</a:t>
             </a:r>
@@ -3207,13 +3019,12 @@
             <a:avLst/>
           </a:prstGeom>
           <a:noFill/>
-          <a:ln/>
         </p:spPr>
         <p:txBody>
           <a:bodyPr wrap="square" rtlCol="0" anchor="ctr"/>
           <a:lstStyle/>
           <a:p>
-            <a:pPr algn="l" indent="0" marL="0">
+            <a:pPr marL="0" indent="0" algn="l">
               <a:buNone/>
             </a:pPr>
             <a:r>
@@ -3221,9 +3032,9 @@
                 <a:solidFill>
                   <a:srgbClr val="1F2329"/>
                 </a:solidFill>
-                <a:latin typeface="微软雅黑" pitchFamily="34" charset="0"/>
-                <a:ea typeface="微软雅黑" pitchFamily="34" charset="-122"/>
-                <a:cs typeface="微软雅黑" pitchFamily="34" charset="-120"/>
+                <a:latin typeface="微软雅黑" panose="020B0503020204020204" pitchFamily="34" charset="-122"/>
+                <a:ea typeface="微软雅黑" panose="020B0503020204020204" pitchFamily="34" charset="-122"/>
+                <a:cs typeface="微软雅黑" panose="020B0503020204020204" pitchFamily="34" charset="-120"/>
               </a:rPr>
               <a:t>由先序与中序建树：区间划分四步（2026真题）</a:t>
             </a:r>
@@ -3248,7 +3059,6 @@
           <a:solidFill>
             <a:srgbClr val="F7F9FC"/>
           </a:solidFill>
-          <a:ln/>
         </p:spPr>
       </p:sp>
       <p:sp>
@@ -3268,7 +3078,6 @@
           <a:solidFill>
             <a:srgbClr val="1F4E9C"/>
           </a:solidFill>
-          <a:ln/>
         </p:spPr>
       </p:sp>
       <p:sp>
@@ -3286,13 +3095,12 @@
             <a:avLst/>
           </a:prstGeom>
           <a:noFill/>
-          <a:ln/>
         </p:spPr>
         <p:txBody>
           <a:bodyPr wrap="square" rtlCol="0" anchor="t"/>
           <a:lstStyle/>
           <a:p>
-            <a:pPr algn="l" indent="0" marL="0">
+            <a:pPr marL="0" indent="0" algn="l">
               <a:lnSpc>
                 <a:spcPct val="125000"/>
               </a:lnSpc>
@@ -3303,9 +3111,9 @@
                 <a:solidFill>
                   <a:srgbClr val="1F2329"/>
                 </a:solidFill>
-                <a:latin typeface="Consolas" pitchFamily="34" charset="0"/>
-                <a:ea typeface="Consolas" pitchFamily="34" charset="-122"/>
-                <a:cs typeface="Consolas" pitchFamily="34" charset="-120"/>
+                <a:latin typeface="Consolas" panose="020B0609020204030204" pitchFamily="34" charset="0"/>
+                <a:ea typeface="Consolas" panose="020B0609020204030204" pitchFamily="34" charset="-122"/>
+                <a:cs typeface="Consolas" panose="020B0609020204030204" pitchFamily="34" charset="-120"/>
               </a:rPr>
               <a:t>BiTree Build(BiTree &amp;T, int A[], int B[], int preL, int preR, int inL, int inR){
     if(preL &gt; preR) return NULL;                       // 区间为空
@@ -3337,13 +3145,12 @@
             <a:avLst/>
           </a:prstGeom>
           <a:noFill/>
-          <a:ln/>
         </p:spPr>
         <p:txBody>
           <a:bodyPr wrap="square" rtlCol="0" anchor="t"/>
           <a:lstStyle/>
           <a:p>
-            <a:pPr algn="l" indent="0" marL="0">
+            <a:pPr marL="0" indent="0" algn="l">
               <a:buNone/>
             </a:pPr>
             <a:r>
@@ -3351,9 +3158,9 @@
                 <a:solidFill>
                   <a:srgbClr val="8A9099"/>
                 </a:solidFill>
-                <a:latin typeface="微软雅黑" pitchFamily="34" charset="0"/>
-                <a:ea typeface="微软雅黑" pitchFamily="34" charset="-122"/>
-                <a:cs typeface="微软雅黑" pitchFamily="34" charset="-120"/>
+                <a:latin typeface="微软雅黑" panose="020B0503020204020204" pitchFamily="34" charset="-122"/>
+                <a:ea typeface="微软雅黑" panose="020B0503020204020204" pitchFamily="34" charset="-122"/>
+                <a:cs typeface="微软雅黑" panose="020B0503020204020204" pitchFamily="34" charset="-120"/>
               </a:rPr>
               <a:t>四步：先序第一个是根；在中序里找到根 k，左边是左子树、右边是右子树；用 leftLen 把先序也切成两段；递归建左右。A 是先序、B 是中序</a:t>
             </a:r>
@@ -3371,7 +3178,7 @@
 
 <file path=ppt/slides/slide13.xml><?xml version="1.0" encoding="utf-8"?>
 <p:sld xmlns:a="http://schemas.openxmlformats.org/drawingml/2006/main" xmlns:r="http://schemas.openxmlformats.org/officeDocument/2006/relationships" xmlns:p="http://schemas.openxmlformats.org/presentationml/2006/main">
-  <p:cSld name="Slide 13">
+  <p:cSld>
     <p:bg>
       <p:bgPr>
         <a:blipFill dpi="0" rotWithShape="1">
@@ -3415,13 +3222,12 @@
             <a:avLst/>
           </a:prstGeom>
           <a:noFill/>
-          <a:ln/>
         </p:spPr>
         <p:txBody>
           <a:bodyPr wrap="square" rtlCol="0" anchor="ctr"/>
           <a:lstStyle/>
           <a:p>
-            <a:pPr algn="r" indent="0" marL="0">
+            <a:pPr marL="0" indent="0" algn="r">
               <a:buNone/>
             </a:pPr>
             <a:r>
@@ -3429,9 +3235,9 @@
                 <a:solidFill>
                   <a:srgbClr val="8A9099"/>
                 </a:solidFill>
-                <a:latin typeface="微软雅黑" pitchFamily="34" charset="0"/>
-                <a:ea typeface="微软雅黑" pitchFamily="34" charset="-122"/>
-                <a:cs typeface="微软雅黑" pitchFamily="34" charset="-120"/>
+                <a:latin typeface="微软雅黑" panose="020B0503020204020204" pitchFamily="34" charset="-122"/>
+                <a:ea typeface="微软雅黑" panose="020B0503020204020204" pitchFamily="34" charset="-122"/>
+                <a:cs typeface="微软雅黑" panose="020B0503020204020204" pitchFamily="34" charset="-120"/>
               </a:rPr>
               <a:t>13 / 17</a:t>
             </a:r>
@@ -3454,13 +3260,12 @@
             <a:avLst/>
           </a:prstGeom>
           <a:noFill/>
-          <a:ln/>
         </p:spPr>
         <p:txBody>
           <a:bodyPr wrap="square" rtlCol="0" anchor="ctr"/>
           <a:lstStyle/>
           <a:p>
-            <a:pPr algn="l" indent="0" marL="0">
+            <a:pPr marL="0" indent="0" algn="l">
               <a:buNone/>
             </a:pPr>
             <a:r>
@@ -3468,9 +3273,9 @@
                 <a:solidFill>
                   <a:srgbClr val="1F4E9C"/>
                 </a:solidFill>
-                <a:latin typeface="微软雅黑" pitchFamily="34" charset="0"/>
-                <a:ea typeface="微软雅黑" pitchFamily="34" charset="-122"/>
-                <a:cs typeface="微软雅黑" pitchFamily="34" charset="-120"/>
+                <a:latin typeface="微软雅黑" panose="020B0503020204020204" pitchFamily="34" charset="-122"/>
+                <a:ea typeface="微软雅黑" panose="020B0503020204020204" pitchFamily="34" charset="-122"/>
+                <a:cs typeface="微软雅黑" panose="020B0503020204020204" pitchFamily="34" charset="-120"/>
               </a:rPr>
               <a:t>建树 · 过程页</a:t>
             </a:r>
@@ -3493,13 +3298,12 @@
             <a:avLst/>
           </a:prstGeom>
           <a:noFill/>
-          <a:ln/>
         </p:spPr>
         <p:txBody>
           <a:bodyPr wrap="square" rtlCol="0" anchor="ctr"/>
           <a:lstStyle/>
           <a:p>
-            <a:pPr algn="l" indent="0" marL="0">
+            <a:pPr marL="0" indent="0" algn="l">
               <a:buNone/>
             </a:pPr>
             <a:r>
@@ -3507,9 +3311,9 @@
                 <a:solidFill>
                   <a:srgbClr val="1F2329"/>
                 </a:solidFill>
-                <a:latin typeface="微软雅黑" pitchFamily="34" charset="0"/>
-                <a:ea typeface="微软雅黑" pitchFamily="34" charset="-122"/>
-                <a:cs typeface="微软雅黑" pitchFamily="34" charset="-120"/>
+                <a:latin typeface="微软雅黑" panose="020B0503020204020204" pitchFamily="34" charset="-122"/>
+                <a:ea typeface="微软雅黑" panose="020B0503020204020204" pitchFamily="34" charset="-122"/>
+                <a:cs typeface="微软雅黑" panose="020B0503020204020204" pitchFamily="34" charset="-120"/>
               </a:rPr>
               <a:t>先序 1 2 4 5 3、中序 4 2 5 1 3，怎么建（拿纸跟画）</a:t>
             </a:r>
@@ -3532,13 +3336,12 @@
             <a:avLst/>
           </a:prstGeom>
           <a:noFill/>
-          <a:ln/>
         </p:spPr>
         <p:txBody>
           <a:bodyPr wrap="square" rtlCol="0" anchor="t"/>
           <a:lstStyle/>
           <a:p>
-            <a:pPr algn="l" indent="0" marL="0">
+            <a:pPr marL="0" indent="0" algn="l">
               <a:lnSpc>
                 <a:spcPct val="115000"/>
               </a:lnSpc>
@@ -3549,25 +3352,68 @@
                 <a:solidFill>
                   <a:srgbClr val="1F4E9C"/>
                 </a:solidFill>
-                <a:latin typeface="微软雅黑" pitchFamily="34" charset="0"/>
-                <a:ea typeface="微软雅黑" pitchFamily="34" charset="-122"/>
-                <a:cs typeface="微软雅黑" pitchFamily="34" charset="-120"/>
+                <a:latin typeface="微软雅黑" panose="020B0503020204020204" pitchFamily="34" charset="-122"/>
+                <a:ea typeface="微软雅黑" panose="020B0503020204020204" pitchFamily="34" charset="-122"/>
+                <a:cs typeface="微软雅黑" panose="020B0503020204020204" pitchFamily="34" charset="-120"/>
               </a:rPr>
               <a:t>•  </a:t>
             </a:r>
-            <a:pPr algn="l" indent="0" marL="0">
+            <a:r>
+              <a:rPr lang="en-US" sz="1800" dirty="0">
+                <a:solidFill>
+                  <a:srgbClr val="000000"/>
+                </a:solidFill>
+              </a:rPr>
+              <a:t>① 先序首元素 1 是根；在中序 4 2 5 [1] 3 里定位 1，左边 4 2 5 是左子树（3个），右边 3 是右子树（1个）</a:t>
+            </a:r>
+            <a:endParaRPr lang="en-US" sz="1800" dirty="0"/>
+          </a:p>
+        </p:txBody>
+      </p:sp>
+      <p:sp>
+        <p:nvSpPr>
+          <p:cNvPr id="6" name="Text 4"/>
+          <p:cNvSpPr/>
+          <p:nvPr/>
+        </p:nvSpPr>
+        <p:spPr>
+          <a:xfrm>
+            <a:off x="896112" y="3209544"/>
+            <a:ext cx="10454335" cy="397764"/>
+          </a:xfrm>
+          <a:prstGeom prst="rect">
+            <a:avLst/>
+          </a:prstGeom>
+          <a:noFill/>
+        </p:spPr>
+        <p:txBody>
+          <a:bodyPr wrap="square" rtlCol="0" anchor="t"/>
+          <a:lstStyle/>
+          <a:p>
+            <a:pPr marL="0" indent="0" algn="l">
               <a:lnSpc>
                 <a:spcPct val="115000"/>
               </a:lnSpc>
               <a:buNone/>
             </a:pPr>
             <a:r>
+              <a:rPr lang="en-US" sz="1800" b="1" dirty="0">
+                <a:solidFill>
+                  <a:srgbClr val="1F4E9C"/>
+                </a:solidFill>
+                <a:latin typeface="微软雅黑" panose="020B0503020204020204" pitchFamily="34" charset="-122"/>
+                <a:ea typeface="微软雅黑" panose="020B0503020204020204" pitchFamily="34" charset="-122"/>
+                <a:cs typeface="微软雅黑" panose="020B0503020204020204" pitchFamily="34" charset="-120"/>
+              </a:rPr>
+              <a:t>•  </a:t>
+            </a:r>
+            <a:r>
               <a:rPr lang="en-US" sz="1800" dirty="0">
                 <a:solidFill>
                   <a:srgbClr val="000000"/>
                 </a:solidFill>
               </a:rPr>
-              <a:t>① 先序首元素 1 是根；在中序 4 2 5 [1] 3 里定位 1，左边 4 2 5 是左子树（3个），右边 3 是右子树（1个）</a:t>
+              <a:t>② leftLen=3，把先序切成：根 1，左子树先序 2 4 5，右子树先序 3</a:t>
             </a:r>
             <a:endParaRPr lang="en-US" sz="1800" dirty="0"/>
           </a:p>
@@ -3575,26 +3421,25 @@
       </p:sp>
       <p:sp>
         <p:nvSpPr>
-          <p:cNvPr id="6" name="Text 4"/>
-          <p:cNvSpPr/>
-          <p:nvPr/>
-        </p:nvSpPr>
-        <p:spPr>
-          <a:xfrm>
-            <a:off x="896112" y="3209544"/>
-            <a:ext cx="10454335" cy="397764"/>
-          </a:xfrm>
-          <a:prstGeom prst="rect">
-            <a:avLst/>
-          </a:prstGeom>
-          <a:noFill/>
-          <a:ln/>
+          <p:cNvPr id="7" name="Text 5"/>
+          <p:cNvSpPr/>
+          <p:nvPr/>
+        </p:nvSpPr>
+        <p:spPr>
+          <a:xfrm>
+            <a:off x="896112" y="3680460"/>
+            <a:ext cx="10454335" cy="740664"/>
+          </a:xfrm>
+          <a:prstGeom prst="rect">
+            <a:avLst/>
+          </a:prstGeom>
+          <a:noFill/>
         </p:spPr>
         <p:txBody>
           <a:bodyPr wrap="square" rtlCol="0" anchor="t"/>
           <a:lstStyle/>
           <a:p>
-            <a:pPr algn="l" indent="0" marL="0">
+            <a:pPr marL="0" indent="0" algn="l">
               <a:lnSpc>
                 <a:spcPct val="115000"/>
               </a:lnSpc>
@@ -3605,130 +3450,61 @@
                 <a:solidFill>
                   <a:srgbClr val="1F4E9C"/>
                 </a:solidFill>
-                <a:latin typeface="微软雅黑" pitchFamily="34" charset="0"/>
-                <a:ea typeface="微软雅黑" pitchFamily="34" charset="-122"/>
-                <a:cs typeface="微软雅黑" pitchFamily="34" charset="-120"/>
+                <a:latin typeface="微软雅黑" panose="020B0503020204020204" pitchFamily="34" charset="-122"/>
+                <a:ea typeface="微软雅黑" panose="020B0503020204020204" pitchFamily="34" charset="-122"/>
+                <a:cs typeface="微软雅黑" panose="020B0503020204020204" pitchFamily="34" charset="-120"/>
               </a:rPr>
               <a:t>•  </a:t>
             </a:r>
-            <a:pPr algn="l" indent="0" marL="0">
+            <a:r>
+              <a:rPr lang="en-US" sz="1800" dirty="0">
+                <a:solidFill>
+                  <a:srgbClr val="000000"/>
+                </a:solidFill>
+              </a:rPr>
+              <a:t>③ 递归左子树：先序 2 4 5、中序 4 2 5，根是 2，中序里 2 左边 4、右边 5，所以 2 的左是 4、右是 5</a:t>
+            </a:r>
+            <a:endParaRPr lang="en-US" sz="1800" dirty="0"/>
+          </a:p>
+        </p:txBody>
+      </p:sp>
+      <p:sp>
+        <p:nvSpPr>
+          <p:cNvPr id="8" name="Text 6"/>
+          <p:cNvSpPr/>
+          <p:nvPr/>
+        </p:nvSpPr>
+        <p:spPr>
+          <a:xfrm>
+            <a:off x="896112" y="4494276"/>
+            <a:ext cx="10454335" cy="397764"/>
+          </a:xfrm>
+          <a:prstGeom prst="rect">
+            <a:avLst/>
+          </a:prstGeom>
+          <a:noFill/>
+        </p:spPr>
+        <p:txBody>
+          <a:bodyPr wrap="square" rtlCol="0" anchor="t"/>
+          <a:lstStyle/>
+          <a:p>
+            <a:pPr marL="0" indent="0" algn="l">
               <a:lnSpc>
                 <a:spcPct val="115000"/>
               </a:lnSpc>
               <a:buNone/>
             </a:pPr>
             <a:r>
-              <a:rPr lang="en-US" sz="1800" dirty="0">
-                <a:solidFill>
-                  <a:srgbClr val="000000"/>
-                </a:solidFill>
-              </a:rPr>
-              <a:t>② leftLen=3，把先序切成：根 1，左子树先序 2 4 5，右子树先序 3</a:t>
-            </a:r>
-            <a:endParaRPr lang="en-US" sz="1800" dirty="0"/>
-          </a:p>
-        </p:txBody>
-      </p:sp>
-      <p:sp>
-        <p:nvSpPr>
-          <p:cNvPr id="7" name="Text 5"/>
-          <p:cNvSpPr/>
-          <p:nvPr/>
-        </p:nvSpPr>
-        <p:spPr>
-          <a:xfrm>
-            <a:off x="896112" y="3680460"/>
-            <a:ext cx="10454335" cy="740664"/>
-          </a:xfrm>
-          <a:prstGeom prst="rect">
-            <a:avLst/>
-          </a:prstGeom>
-          <a:noFill/>
-          <a:ln/>
-        </p:spPr>
-        <p:txBody>
-          <a:bodyPr wrap="square" rtlCol="0" anchor="t"/>
-          <a:lstStyle/>
-          <a:p>
-            <a:pPr algn="l" indent="0" marL="0">
-              <a:lnSpc>
-                <a:spcPct val="115000"/>
-              </a:lnSpc>
-              <a:buNone/>
-            </a:pPr>
-            <a:r>
               <a:rPr lang="en-US" sz="1800" b="1" dirty="0">
                 <a:solidFill>
                   <a:srgbClr val="1F4E9C"/>
                 </a:solidFill>
-                <a:latin typeface="微软雅黑" pitchFamily="34" charset="0"/>
-                <a:ea typeface="微软雅黑" pitchFamily="34" charset="-122"/>
-                <a:cs typeface="微软雅黑" pitchFamily="34" charset="-120"/>
+                <a:latin typeface="微软雅黑" panose="020B0503020204020204" pitchFamily="34" charset="-122"/>
+                <a:ea typeface="微软雅黑" panose="020B0503020204020204" pitchFamily="34" charset="-122"/>
+                <a:cs typeface="微软雅黑" panose="020B0503020204020204" pitchFamily="34" charset="-120"/>
               </a:rPr>
               <a:t>•  </a:t>
             </a:r>
-            <a:pPr algn="l" indent="0" marL="0">
-              <a:lnSpc>
-                <a:spcPct val="115000"/>
-              </a:lnSpc>
-              <a:buNone/>
-            </a:pPr>
-            <a:r>
-              <a:rPr lang="en-US" sz="1800" dirty="0">
-                <a:solidFill>
-                  <a:srgbClr val="000000"/>
-                </a:solidFill>
-              </a:rPr>
-              <a:t>③ 递归左子树：先序 2 4 5、中序 4 2 5，根是 2，中序里 2 左边 4、右边 5，所以 2 的左是 4、右是 5</a:t>
-            </a:r>
-            <a:endParaRPr lang="en-US" sz="1800" dirty="0"/>
-          </a:p>
-        </p:txBody>
-      </p:sp>
-      <p:sp>
-        <p:nvSpPr>
-          <p:cNvPr id="8" name="Text 6"/>
-          <p:cNvSpPr/>
-          <p:nvPr/>
-        </p:nvSpPr>
-        <p:spPr>
-          <a:xfrm>
-            <a:off x="896112" y="4494276"/>
-            <a:ext cx="10454335" cy="397764"/>
-          </a:xfrm>
-          <a:prstGeom prst="rect">
-            <a:avLst/>
-          </a:prstGeom>
-          <a:noFill/>
-          <a:ln/>
-        </p:spPr>
-        <p:txBody>
-          <a:bodyPr wrap="square" rtlCol="0" anchor="t"/>
-          <a:lstStyle/>
-          <a:p>
-            <a:pPr algn="l" indent="0" marL="0">
-              <a:lnSpc>
-                <a:spcPct val="115000"/>
-              </a:lnSpc>
-              <a:buNone/>
-            </a:pPr>
-            <a:r>
-              <a:rPr lang="en-US" sz="1800" b="1" dirty="0">
-                <a:solidFill>
-                  <a:srgbClr val="1F4E9C"/>
-                </a:solidFill>
-                <a:latin typeface="微软雅黑" pitchFamily="34" charset="0"/>
-                <a:ea typeface="微软雅黑" pitchFamily="34" charset="-122"/>
-                <a:cs typeface="微软雅黑" pitchFamily="34" charset="-120"/>
-              </a:rPr>
-              <a:t>•  </a:t>
-            </a:r>
-            <a:pPr algn="l" indent="0" marL="0">
-              <a:lnSpc>
-                <a:spcPct val="115000"/>
-              </a:lnSpc>
-              <a:buNone/>
-            </a:pPr>
             <a:r>
               <a:rPr lang="en-US" sz="1800" dirty="0">
                 <a:solidFill>
@@ -3756,13 +3532,12 @@
             <a:avLst/>
           </a:prstGeom>
           <a:noFill/>
-          <a:ln/>
         </p:spPr>
         <p:txBody>
           <a:bodyPr wrap="square" rtlCol="0" anchor="t"/>
           <a:lstStyle/>
           <a:p>
-            <a:pPr algn="l" indent="0" marL="0">
+            <a:pPr marL="0" indent="0" algn="l">
               <a:buNone/>
             </a:pPr>
             <a:r>
@@ -3770,9 +3545,9 @@
                 <a:solidFill>
                   <a:srgbClr val="8A9099"/>
                 </a:solidFill>
-                <a:latin typeface="微软雅黑" pitchFamily="34" charset="0"/>
-                <a:ea typeface="微软雅黑" pitchFamily="34" charset="-122"/>
-                <a:cs typeface="微软雅黑" pitchFamily="34" charset="-120"/>
+                <a:latin typeface="微软雅黑" panose="020B0503020204020204" pitchFamily="34" charset="-122"/>
+                <a:ea typeface="微软雅黑" panose="020B0503020204020204" pitchFamily="34" charset="-122"/>
+                <a:cs typeface="微软雅黑" panose="020B0503020204020204" pitchFamily="34" charset="-120"/>
               </a:rPr>
               <a:t>建出来正是 P5 那棵树：1 的左 2 右 3，2 的左 4 右 5；四个下标边界随递归不断缩小</a:t>
             </a:r>
@@ -3790,7 +3565,7 @@
 
 <file path=ppt/slides/slide14.xml><?xml version="1.0" encoding="utf-8"?>
 <p:sld xmlns:a="http://schemas.openxmlformats.org/drawingml/2006/main" xmlns:r="http://schemas.openxmlformats.org/officeDocument/2006/relationships" xmlns:p="http://schemas.openxmlformats.org/presentationml/2006/main">
-  <p:cSld name="Slide 14">
+  <p:cSld>
     <p:bg>
       <p:bgPr>
         <a:blipFill dpi="0" rotWithShape="1">
@@ -3834,13 +3609,12 @@
             <a:avLst/>
           </a:prstGeom>
           <a:noFill/>
-          <a:ln/>
         </p:spPr>
         <p:txBody>
           <a:bodyPr wrap="square" rtlCol="0" anchor="ctr"/>
           <a:lstStyle/>
           <a:p>
-            <a:pPr algn="r" indent="0" marL="0">
+            <a:pPr marL="0" indent="0" algn="r">
               <a:buNone/>
             </a:pPr>
             <a:r>
@@ -3848,9 +3622,9 @@
                 <a:solidFill>
                   <a:srgbClr val="8A9099"/>
                 </a:solidFill>
-                <a:latin typeface="微软雅黑" pitchFamily="34" charset="0"/>
-                <a:ea typeface="微软雅黑" pitchFamily="34" charset="-122"/>
-                <a:cs typeface="微软雅黑" pitchFamily="34" charset="-120"/>
+                <a:latin typeface="微软雅黑" panose="020B0503020204020204" pitchFamily="34" charset="-122"/>
+                <a:ea typeface="微软雅黑" panose="020B0503020204020204" pitchFamily="34" charset="-122"/>
+                <a:cs typeface="微软雅黑" panose="020B0503020204020204" pitchFamily="34" charset="-120"/>
               </a:rPr>
               <a:t>14 / 17</a:t>
             </a:r>
@@ -3873,13 +3647,12 @@
             <a:avLst/>
           </a:prstGeom>
           <a:noFill/>
-          <a:ln/>
         </p:spPr>
         <p:txBody>
           <a:bodyPr wrap="square" rtlCol="0" anchor="ctr"/>
           <a:lstStyle/>
           <a:p>
-            <a:pPr algn="l" indent="0" marL="0">
+            <a:pPr marL="0" indent="0" algn="l">
               <a:buNone/>
             </a:pPr>
             <a:r>
@@ -3887,9 +3660,9 @@
                 <a:solidFill>
                   <a:srgbClr val="1F4E9C"/>
                 </a:solidFill>
-                <a:latin typeface="微软雅黑" pitchFamily="34" charset="0"/>
-                <a:ea typeface="微软雅黑" pitchFamily="34" charset="-122"/>
-                <a:cs typeface="微软雅黑" pitchFamily="34" charset="-120"/>
+                <a:latin typeface="微软雅黑" panose="020B0503020204020204" pitchFamily="34" charset="-122"/>
+                <a:ea typeface="微软雅黑" panose="020B0503020204020204" pitchFamily="34" charset="-122"/>
+                <a:cs typeface="微软雅黑" panose="020B0503020204020204" pitchFamily="34" charset="-120"/>
               </a:rPr>
               <a:t>本节小结</a:t>
             </a:r>
@@ -3912,13 +3685,12 @@
             <a:avLst/>
           </a:prstGeom>
           <a:noFill/>
-          <a:ln/>
         </p:spPr>
         <p:txBody>
           <a:bodyPr wrap="square" rtlCol="0" anchor="ctr"/>
           <a:lstStyle/>
           <a:p>
-            <a:pPr algn="l" indent="0" marL="0">
+            <a:pPr marL="0" indent="0" algn="l">
               <a:buNone/>
             </a:pPr>
             <a:r>
@@ -3926,9 +3698,9 @@
                 <a:solidFill>
                   <a:srgbClr val="1F2329"/>
                 </a:solidFill>
-                <a:latin typeface="微软雅黑" pitchFamily="34" charset="0"/>
-                <a:ea typeface="微软雅黑" pitchFamily="34" charset="-122"/>
-                <a:cs typeface="微软雅黑" pitchFamily="34" charset="-120"/>
+                <a:latin typeface="微软雅黑" panose="020B0503020204020204" pitchFamily="34" charset="-122"/>
+                <a:ea typeface="微软雅黑" panose="020B0503020204020204" pitchFamily="34" charset="-122"/>
+                <a:cs typeface="微软雅黑" panose="020B0503020204020204" pitchFamily="34" charset="-120"/>
               </a:rPr>
               <a:t>四种遍历一张表</a:t>
             </a:r>
@@ -3942,17 +3714,11 @@
           <p:cNvGraphicFramePr>
             <a:graphicFrameLocks noGrp="1"/>
           </p:cNvGraphicFramePr>
-          <p:nvPr>
-            <p:extLst>
-              <p:ext uri="{D42A27DB-BD31-4B8C-83A1-F6EECF244321}">
-                <p14:modId xmlns:p14="http://schemas.microsoft.com/office/powerpoint/2010/main" val="1579011935"/>
-              </p:ext>
-            </p:extLst>
-          </p:nvPr>
+          <p:nvPr/>
         </p:nvGraphicFramePr>
         <p:xfrm>
           <a:off x="822960" y="2395728"/>
-          <a:ext cx="10545775" cy="914400"/>
+          <a:ext cx="10545775" cy="2103120"/>
         </p:xfrm>
         <a:graphic>
           <a:graphicData uri="http://schemas.openxmlformats.org/drawingml/2006/table">
@@ -3970,7 +3736,7 @@
                     <a:bodyPr/>
                     <a:lstStyle/>
                     <a:p>
-                      <a:pPr algn="ctr" indent="0" marL="0">
+                      <a:pPr marL="0" indent="0" algn="ctr">
                         <a:buNone/>
                       </a:pPr>
                       <a:r>
@@ -3978,20 +3744,20 @@
                           <a:solidFill>
                             <a:srgbClr val="1F4E9C"/>
                           </a:solidFill>
-                          <a:latin typeface="微软雅黑" pitchFamily="34" charset="0"/>
-                          <a:ea typeface="微软雅黑" pitchFamily="34" charset="-122"/>
-                          <a:cs typeface="微软雅黑" pitchFamily="34" charset="-120"/>
+                          <a:latin typeface="微软雅黑" panose="020B0503020204020204" pitchFamily="34" charset="-122"/>
+                          <a:ea typeface="微软雅黑" panose="020B0503020204020204" pitchFamily="34" charset="-122"/>
+                          <a:cs typeface="微软雅黑" panose="020B0503020204020204" pitchFamily="34" charset="-120"/>
                         </a:rPr>
                         <a:t>遍历</a:t>
                       </a:r>
                       <a:endParaRPr lang="en-US" sz="1500" dirty="0">
-                        <a:latin typeface="微软雅黑" charset="0"/>
-                        <a:ea typeface="微软雅黑" charset="0"/>
-                        <a:cs typeface="微软雅黑" charset="0"/>
+                        <a:latin typeface="微软雅黑" panose="020B0503020204020204" pitchFamily="34" charset="-122"/>
+                        <a:ea typeface="微软雅黑" panose="020B0503020204020204" pitchFamily="34" charset="-122"/>
+                        <a:cs typeface="微软雅黑" panose="020B0503020204020204" pitchFamily="34" charset="-122"/>
                       </a:endParaRPr>
                     </a:p>
                   </a:txBody>
-                  <a:tcPr marL="91440" marR="91440" marT="45720" marB="45720" anchor="ctr">
+                  <a:tcPr anchor="ctr">
                     <a:lnL w="9525" cap="flat" cmpd="sng" algn="ctr">
                       <a:solidFill>
                         <a:srgbClr val="D8DBE0"/>
@@ -4038,7 +3804,7 @@
                     <a:bodyPr/>
                     <a:lstStyle/>
                     <a:p>
-                      <a:pPr algn="ctr" indent="0" marL="0">
+                      <a:pPr marL="0" indent="0" algn="ctr">
                         <a:buNone/>
                       </a:pPr>
                       <a:r>
@@ -4046,20 +3812,20 @@
                           <a:solidFill>
                             <a:srgbClr val="1F4E9C"/>
                           </a:solidFill>
-                          <a:latin typeface="微软雅黑" pitchFamily="34" charset="0"/>
-                          <a:ea typeface="微软雅黑" pitchFamily="34" charset="-122"/>
-                          <a:cs typeface="微软雅黑" pitchFamily="34" charset="-120"/>
+                          <a:latin typeface="微软雅黑" panose="020B0503020204020204" pitchFamily="34" charset="-122"/>
+                          <a:ea typeface="微软雅黑" panose="020B0503020204020204" pitchFamily="34" charset="-122"/>
+                          <a:cs typeface="微软雅黑" panose="020B0503020204020204" pitchFamily="34" charset="-120"/>
                         </a:rPr>
                         <a:t>访问次序</a:t>
                       </a:r>
                       <a:endParaRPr lang="en-US" sz="1500" dirty="0">
-                        <a:latin typeface="微软雅黑" charset="0"/>
-                        <a:ea typeface="微软雅黑" charset="0"/>
-                        <a:cs typeface="微软雅黑" charset="0"/>
+                        <a:latin typeface="微软雅黑" panose="020B0503020204020204" pitchFamily="34" charset="-122"/>
+                        <a:ea typeface="微软雅黑" panose="020B0503020204020204" pitchFamily="34" charset="-122"/>
+                        <a:cs typeface="微软雅黑" panose="020B0503020204020204" pitchFamily="34" charset="-122"/>
                       </a:endParaRPr>
                     </a:p>
                   </a:txBody>
-                  <a:tcPr marL="91440" marR="91440" marT="45720" marB="45720" anchor="ctr">
+                  <a:tcPr anchor="ctr">
                     <a:lnL w="9525" cap="flat" cmpd="sng" algn="ctr">
                       <a:solidFill>
                         <a:srgbClr val="D8DBE0"/>
@@ -4106,7 +3872,7 @@
                     <a:bodyPr/>
                     <a:lstStyle/>
                     <a:p>
-                      <a:pPr algn="ctr" indent="0" marL="0">
+                      <a:pPr marL="0" indent="0" algn="ctr">
                         <a:buNone/>
                       </a:pPr>
                       <a:r>
@@ -4114,20 +3880,20 @@
                           <a:solidFill>
                             <a:srgbClr val="1F4E9C"/>
                           </a:solidFill>
-                          <a:latin typeface="微软雅黑" pitchFamily="34" charset="0"/>
-                          <a:ea typeface="微软雅黑" pitchFamily="34" charset="-122"/>
-                          <a:cs typeface="微软雅黑" pitchFamily="34" charset="-120"/>
+                          <a:latin typeface="微软雅黑" panose="020B0503020204020204" pitchFamily="34" charset="-122"/>
+                          <a:ea typeface="微软雅黑" panose="020B0503020204020204" pitchFamily="34" charset="-122"/>
+                          <a:cs typeface="微软雅黑" panose="020B0503020204020204" pitchFamily="34" charset="-120"/>
                         </a:rPr>
                         <a:t>时间</a:t>
                       </a:r>
                       <a:endParaRPr lang="en-US" sz="1500" dirty="0">
-                        <a:latin typeface="微软雅黑" charset="0"/>
-                        <a:ea typeface="微软雅黑" charset="0"/>
-                        <a:cs typeface="微软雅黑" charset="0"/>
+                        <a:latin typeface="微软雅黑" panose="020B0503020204020204" pitchFamily="34" charset="-122"/>
+                        <a:ea typeface="微软雅黑" panose="020B0503020204020204" pitchFamily="34" charset="-122"/>
+                        <a:cs typeface="微软雅黑" panose="020B0503020204020204" pitchFamily="34" charset="-122"/>
                       </a:endParaRPr>
                     </a:p>
                   </a:txBody>
-                  <a:tcPr marL="91440" marR="91440" marT="45720" marB="45720" anchor="ctr">
+                  <a:tcPr anchor="ctr">
                     <a:lnL w="9525" cap="flat" cmpd="sng" algn="ctr">
                       <a:solidFill>
                         <a:srgbClr val="D8DBE0"/>
@@ -4174,7 +3940,7 @@
                     <a:bodyPr/>
                     <a:lstStyle/>
                     <a:p>
-                      <a:pPr algn="ctr" indent="0" marL="0">
+                      <a:pPr marL="0" indent="0" algn="ctr">
                         <a:buNone/>
                       </a:pPr>
                       <a:r>
@@ -4182,20 +3948,20 @@
                           <a:solidFill>
                             <a:srgbClr val="1F4E9C"/>
                           </a:solidFill>
-                          <a:latin typeface="微软雅黑" pitchFamily="34" charset="0"/>
-                          <a:ea typeface="微软雅黑" pitchFamily="34" charset="-122"/>
-                          <a:cs typeface="微软雅黑" pitchFamily="34" charset="-120"/>
+                          <a:latin typeface="微软雅黑" panose="020B0503020204020204" pitchFamily="34" charset="-122"/>
+                          <a:ea typeface="微软雅黑" panose="020B0503020204020204" pitchFamily="34" charset="-122"/>
+                          <a:cs typeface="微软雅黑" panose="020B0503020204020204" pitchFamily="34" charset="-120"/>
                         </a:rPr>
                         <a:t>空间</a:t>
                       </a:r>
                       <a:endParaRPr lang="en-US" sz="1500" dirty="0">
-                        <a:latin typeface="微软雅黑" charset="0"/>
-                        <a:ea typeface="微软雅黑" charset="0"/>
-                        <a:cs typeface="微软雅黑" charset="0"/>
+                        <a:latin typeface="微软雅黑" panose="020B0503020204020204" pitchFamily="34" charset="-122"/>
+                        <a:ea typeface="微软雅黑" panose="020B0503020204020204" pitchFamily="34" charset="-122"/>
+                        <a:cs typeface="微软雅黑" panose="020B0503020204020204" pitchFamily="34" charset="-122"/>
                       </a:endParaRPr>
                     </a:p>
                   </a:txBody>
-                  <a:tcPr marL="91440" marR="91440" marT="45720" marB="45720" anchor="ctr">
+                  <a:tcPr anchor="ctr">
                     <a:lnL w="9525" cap="flat" cmpd="sng" algn="ctr">
                       <a:solidFill>
                         <a:srgbClr val="D8DBE0"/>
@@ -4244,7 +4010,7 @@
                     <a:bodyPr/>
                     <a:lstStyle/>
                     <a:p>
-                      <a:pPr algn="ctr" indent="0" marL="0">
+                      <a:pPr marL="0" indent="0" algn="ctr">
                         <a:buNone/>
                       </a:pPr>
                       <a:r>
@@ -4252,20 +4018,20 @@
                           <a:solidFill>
                             <a:srgbClr val="1F2329"/>
                           </a:solidFill>
-                          <a:latin typeface="微软雅黑" pitchFamily="34" charset="0"/>
-                          <a:ea typeface="微软雅黑" pitchFamily="34" charset="-122"/>
-                          <a:cs typeface="微软雅黑" pitchFamily="34" charset="-120"/>
+                          <a:latin typeface="微软雅黑" panose="020B0503020204020204" pitchFamily="34" charset="-122"/>
+                          <a:ea typeface="微软雅黑" panose="020B0503020204020204" pitchFamily="34" charset="-122"/>
+                          <a:cs typeface="微软雅黑" panose="020B0503020204020204" pitchFamily="34" charset="-120"/>
                         </a:rPr>
                         <a:t>先序</a:t>
                       </a:r>
                       <a:endParaRPr lang="en-US" sz="1500" dirty="0">
-                        <a:latin typeface="微软雅黑" charset="0"/>
-                        <a:ea typeface="微软雅黑" charset="0"/>
-                        <a:cs typeface="微软雅黑" charset="0"/>
+                        <a:latin typeface="微软雅黑" panose="020B0503020204020204" pitchFamily="34" charset="-122"/>
+                        <a:ea typeface="微软雅黑" panose="020B0503020204020204" pitchFamily="34" charset="-122"/>
+                        <a:cs typeface="微软雅黑" panose="020B0503020204020204" pitchFamily="34" charset="-122"/>
                       </a:endParaRPr>
                     </a:p>
                   </a:txBody>
-                  <a:tcPr marL="91440" marR="91440" marT="45720" marB="45720" anchor="ctr">
+                  <a:tcPr anchor="ctr">
                     <a:lnL w="9525" cap="flat" cmpd="sng" algn="ctr">
                       <a:solidFill>
                         <a:srgbClr val="D8DBE0"/>
@@ -4312,7 +4078,7 @@
                     <a:bodyPr/>
                     <a:lstStyle/>
                     <a:p>
-                      <a:pPr algn="ctr" indent="0" marL="0">
+                      <a:pPr marL="0" indent="0" algn="ctr">
                         <a:buNone/>
                       </a:pPr>
                       <a:r>
@@ -4320,20 +4086,20 @@
                           <a:solidFill>
                             <a:srgbClr val="1F2329"/>
                           </a:solidFill>
-                          <a:latin typeface="微软雅黑" pitchFamily="34" charset="0"/>
-                          <a:ea typeface="微软雅黑" pitchFamily="34" charset="-122"/>
-                          <a:cs typeface="微软雅黑" pitchFamily="34" charset="-120"/>
+                          <a:latin typeface="微软雅黑" panose="020B0503020204020204" pitchFamily="34" charset="-122"/>
+                          <a:ea typeface="微软雅黑" panose="020B0503020204020204" pitchFamily="34" charset="-122"/>
+                          <a:cs typeface="微软雅黑" panose="020B0503020204020204" pitchFamily="34" charset="-120"/>
                         </a:rPr>
                         <a:t>根 左 右</a:t>
                       </a:r>
                       <a:endParaRPr lang="en-US" sz="1500" dirty="0">
-                        <a:latin typeface="微软雅黑" charset="0"/>
-                        <a:ea typeface="微软雅黑" charset="0"/>
-                        <a:cs typeface="微软雅黑" charset="0"/>
+                        <a:latin typeface="微软雅黑" panose="020B0503020204020204" pitchFamily="34" charset="-122"/>
+                        <a:ea typeface="微软雅黑" panose="020B0503020204020204" pitchFamily="34" charset="-122"/>
+                        <a:cs typeface="微软雅黑" panose="020B0503020204020204" pitchFamily="34" charset="-122"/>
                       </a:endParaRPr>
                     </a:p>
                   </a:txBody>
-                  <a:tcPr marL="91440" marR="91440" marT="45720" marB="45720" anchor="ctr">
+                  <a:tcPr anchor="ctr">
                     <a:lnL w="9525" cap="flat" cmpd="sng" algn="ctr">
                       <a:solidFill>
                         <a:srgbClr val="D8DBE0"/>
@@ -4380,7 +4146,7 @@
                     <a:bodyPr/>
                     <a:lstStyle/>
                     <a:p>
-                      <a:pPr algn="ctr" indent="0" marL="0">
+                      <a:pPr marL="0" indent="0" algn="ctr">
                         <a:buNone/>
                       </a:pPr>
                       <a:r>
@@ -4388,20 +4154,20 @@
                           <a:solidFill>
                             <a:srgbClr val="1F2329"/>
                           </a:solidFill>
-                          <a:latin typeface="微软雅黑" pitchFamily="34" charset="0"/>
-                          <a:ea typeface="微软雅黑" pitchFamily="34" charset="-122"/>
-                          <a:cs typeface="微软雅黑" pitchFamily="34" charset="-120"/>
+                          <a:latin typeface="微软雅黑" panose="020B0503020204020204" pitchFamily="34" charset="-122"/>
+                          <a:ea typeface="微软雅黑" panose="020B0503020204020204" pitchFamily="34" charset="-122"/>
+                          <a:cs typeface="微软雅黑" panose="020B0503020204020204" pitchFamily="34" charset="-120"/>
                         </a:rPr>
                         <a:t>O(n)</a:t>
                       </a:r>
                       <a:endParaRPr lang="en-US" sz="1500" dirty="0">
-                        <a:latin typeface="微软雅黑" charset="0"/>
-                        <a:ea typeface="微软雅黑" charset="0"/>
-                        <a:cs typeface="微软雅黑" charset="0"/>
+                        <a:latin typeface="微软雅黑" panose="020B0503020204020204" pitchFamily="34" charset="-122"/>
+                        <a:ea typeface="微软雅黑" panose="020B0503020204020204" pitchFamily="34" charset="-122"/>
+                        <a:cs typeface="微软雅黑" panose="020B0503020204020204" pitchFamily="34" charset="-122"/>
                       </a:endParaRPr>
                     </a:p>
                   </a:txBody>
-                  <a:tcPr marL="91440" marR="91440" marT="45720" marB="45720" anchor="ctr">
+                  <a:tcPr anchor="ctr">
                     <a:lnL w="9525" cap="flat" cmpd="sng" algn="ctr">
                       <a:solidFill>
                         <a:srgbClr val="D8DBE0"/>
@@ -4448,7 +4214,7 @@
                     <a:bodyPr/>
                     <a:lstStyle/>
                     <a:p>
-                      <a:pPr algn="ctr" indent="0" marL="0">
+                      <a:pPr marL="0" indent="0" algn="ctr">
                         <a:buNone/>
                       </a:pPr>
                       <a:r>
@@ -4456,20 +4222,20 @@
                           <a:solidFill>
                             <a:srgbClr val="1F2329"/>
                           </a:solidFill>
-                          <a:latin typeface="微软雅黑" pitchFamily="34" charset="0"/>
-                          <a:ea typeface="微软雅黑" pitchFamily="34" charset="-122"/>
-                          <a:cs typeface="微软雅黑" pitchFamily="34" charset="-120"/>
+                          <a:latin typeface="微软雅黑" panose="020B0503020204020204" pitchFamily="34" charset="-122"/>
+                          <a:ea typeface="微软雅黑" panose="020B0503020204020204" pitchFamily="34" charset="-122"/>
+                          <a:cs typeface="微软雅黑" panose="020B0503020204020204" pitchFamily="34" charset="-120"/>
                         </a:rPr>
                         <a:t>O(树高)，最坏 O(n)</a:t>
                       </a:r>
                       <a:endParaRPr lang="en-US" sz="1500" dirty="0">
-                        <a:latin typeface="微软雅黑" charset="0"/>
-                        <a:ea typeface="微软雅黑" charset="0"/>
-                        <a:cs typeface="微软雅黑" charset="0"/>
+                        <a:latin typeface="微软雅黑" panose="020B0503020204020204" pitchFamily="34" charset="-122"/>
+                        <a:ea typeface="微软雅黑" panose="020B0503020204020204" pitchFamily="34" charset="-122"/>
+                        <a:cs typeface="微软雅黑" panose="020B0503020204020204" pitchFamily="34" charset="-122"/>
                       </a:endParaRPr>
                     </a:p>
                   </a:txBody>
-                  <a:tcPr marL="91440" marR="91440" marT="45720" marB="45720" anchor="ctr">
+                  <a:tcPr anchor="ctr">
                     <a:lnL w="9525" cap="flat" cmpd="sng" algn="ctr">
                       <a:solidFill>
                         <a:srgbClr val="D8DBE0"/>
@@ -4518,7 +4284,7 @@
                     <a:bodyPr/>
                     <a:lstStyle/>
                     <a:p>
-                      <a:pPr algn="ctr" indent="0" marL="0">
+                      <a:pPr marL="0" indent="0" algn="ctr">
                         <a:buNone/>
                       </a:pPr>
                       <a:r>
@@ -4526,20 +4292,20 @@
                           <a:solidFill>
                             <a:srgbClr val="1F2329"/>
                           </a:solidFill>
-                          <a:latin typeface="微软雅黑" pitchFamily="34" charset="0"/>
-                          <a:ea typeface="微软雅黑" pitchFamily="34" charset="-122"/>
-                          <a:cs typeface="微软雅黑" pitchFamily="34" charset="-120"/>
+                          <a:latin typeface="微软雅黑" panose="020B0503020204020204" pitchFamily="34" charset="-122"/>
+                          <a:ea typeface="微软雅黑" panose="020B0503020204020204" pitchFamily="34" charset="-122"/>
+                          <a:cs typeface="微软雅黑" panose="020B0503020204020204" pitchFamily="34" charset="-120"/>
                         </a:rPr>
                         <a:t>中序</a:t>
                       </a:r>
                       <a:endParaRPr lang="en-US" sz="1500" dirty="0">
-                        <a:latin typeface="微软雅黑" charset="0"/>
-                        <a:ea typeface="微软雅黑" charset="0"/>
-                        <a:cs typeface="微软雅黑" charset="0"/>
+                        <a:latin typeface="微软雅黑" panose="020B0503020204020204" pitchFamily="34" charset="-122"/>
+                        <a:ea typeface="微软雅黑" panose="020B0503020204020204" pitchFamily="34" charset="-122"/>
+                        <a:cs typeface="微软雅黑" panose="020B0503020204020204" pitchFamily="34" charset="-122"/>
                       </a:endParaRPr>
                     </a:p>
                   </a:txBody>
-                  <a:tcPr marL="91440" marR="91440" marT="45720" marB="45720" anchor="ctr">
+                  <a:tcPr anchor="ctr">
                     <a:lnL w="9525" cap="flat" cmpd="sng" algn="ctr">
                       <a:solidFill>
                         <a:srgbClr val="D8DBE0"/>
@@ -4586,7 +4352,7 @@
                     <a:bodyPr/>
                     <a:lstStyle/>
                     <a:p>
-                      <a:pPr algn="ctr" indent="0" marL="0">
+                      <a:pPr marL="0" indent="0" algn="ctr">
                         <a:buNone/>
                       </a:pPr>
                       <a:r>
@@ -4594,20 +4360,20 @@
                           <a:solidFill>
                             <a:srgbClr val="1F2329"/>
                           </a:solidFill>
-                          <a:latin typeface="微软雅黑" pitchFamily="34" charset="0"/>
-                          <a:ea typeface="微软雅黑" pitchFamily="34" charset="-122"/>
-                          <a:cs typeface="微软雅黑" pitchFamily="34" charset="-120"/>
+                          <a:latin typeface="微软雅黑" panose="020B0503020204020204" pitchFamily="34" charset="-122"/>
+                          <a:ea typeface="微软雅黑" panose="020B0503020204020204" pitchFamily="34" charset="-122"/>
+                          <a:cs typeface="微软雅黑" panose="020B0503020204020204" pitchFamily="34" charset="-120"/>
                         </a:rPr>
                         <a:t>左 根 右</a:t>
                       </a:r>
                       <a:endParaRPr lang="en-US" sz="1500" dirty="0">
-                        <a:latin typeface="微软雅黑" charset="0"/>
-                        <a:ea typeface="微软雅黑" charset="0"/>
-                        <a:cs typeface="微软雅黑" charset="0"/>
+                        <a:latin typeface="微软雅黑" panose="020B0503020204020204" pitchFamily="34" charset="-122"/>
+                        <a:ea typeface="微软雅黑" panose="020B0503020204020204" pitchFamily="34" charset="-122"/>
+                        <a:cs typeface="微软雅黑" panose="020B0503020204020204" pitchFamily="34" charset="-122"/>
                       </a:endParaRPr>
                     </a:p>
                   </a:txBody>
-                  <a:tcPr marL="91440" marR="91440" marT="45720" marB="45720" anchor="ctr">
+                  <a:tcPr anchor="ctr">
                     <a:lnL w="9525" cap="flat" cmpd="sng" algn="ctr">
                       <a:solidFill>
                         <a:srgbClr val="D8DBE0"/>
@@ -4654,7 +4420,7 @@
                     <a:bodyPr/>
                     <a:lstStyle/>
                     <a:p>
-                      <a:pPr algn="ctr" indent="0" marL="0">
+                      <a:pPr marL="0" indent="0" algn="ctr">
                         <a:buNone/>
                       </a:pPr>
                       <a:r>
@@ -4662,20 +4428,20 @@
                           <a:solidFill>
                             <a:srgbClr val="1F2329"/>
                           </a:solidFill>
-                          <a:latin typeface="微软雅黑" pitchFamily="34" charset="0"/>
-                          <a:ea typeface="微软雅黑" pitchFamily="34" charset="-122"/>
-                          <a:cs typeface="微软雅黑" pitchFamily="34" charset="-120"/>
+                          <a:latin typeface="微软雅黑" panose="020B0503020204020204" pitchFamily="34" charset="-122"/>
+                          <a:ea typeface="微软雅黑" panose="020B0503020204020204" pitchFamily="34" charset="-122"/>
+                          <a:cs typeface="微软雅黑" panose="020B0503020204020204" pitchFamily="34" charset="-120"/>
                         </a:rPr>
                         <a:t>O(n)</a:t>
                       </a:r>
                       <a:endParaRPr lang="en-US" sz="1500" dirty="0">
-                        <a:latin typeface="微软雅黑" charset="0"/>
-                        <a:ea typeface="微软雅黑" charset="0"/>
-                        <a:cs typeface="微软雅黑" charset="0"/>
+                        <a:latin typeface="微软雅黑" panose="020B0503020204020204" pitchFamily="34" charset="-122"/>
+                        <a:ea typeface="微软雅黑" panose="020B0503020204020204" pitchFamily="34" charset="-122"/>
+                        <a:cs typeface="微软雅黑" panose="020B0503020204020204" pitchFamily="34" charset="-122"/>
                       </a:endParaRPr>
                     </a:p>
                   </a:txBody>
-                  <a:tcPr marL="91440" marR="91440" marT="45720" marB="45720" anchor="ctr">
+                  <a:tcPr anchor="ctr">
                     <a:lnL w="9525" cap="flat" cmpd="sng" algn="ctr">
                       <a:solidFill>
                         <a:srgbClr val="D8DBE0"/>
@@ -4722,7 +4488,7 @@
                     <a:bodyPr/>
                     <a:lstStyle/>
                     <a:p>
-                      <a:pPr algn="ctr" indent="0" marL="0">
+                      <a:pPr marL="0" indent="0" algn="ctr">
                         <a:buNone/>
                       </a:pPr>
                       <a:r>
@@ -4730,20 +4496,20 @@
                           <a:solidFill>
                             <a:srgbClr val="1F2329"/>
                           </a:solidFill>
-                          <a:latin typeface="微软雅黑" pitchFamily="34" charset="0"/>
-                          <a:ea typeface="微软雅黑" pitchFamily="34" charset="-122"/>
-                          <a:cs typeface="微软雅黑" pitchFamily="34" charset="-120"/>
+                          <a:latin typeface="微软雅黑" panose="020B0503020204020204" pitchFamily="34" charset="-122"/>
+                          <a:ea typeface="微软雅黑" panose="020B0503020204020204" pitchFamily="34" charset="-122"/>
+                          <a:cs typeface="微软雅黑" panose="020B0503020204020204" pitchFamily="34" charset="-120"/>
                         </a:rPr>
                         <a:t>O(树高)，最坏 O(n)</a:t>
                       </a:r>
                       <a:endParaRPr lang="en-US" sz="1500" dirty="0">
-                        <a:latin typeface="微软雅黑" charset="0"/>
-                        <a:ea typeface="微软雅黑" charset="0"/>
-                        <a:cs typeface="微软雅黑" charset="0"/>
+                        <a:latin typeface="微软雅黑" panose="020B0503020204020204" pitchFamily="34" charset="-122"/>
+                        <a:ea typeface="微软雅黑" panose="020B0503020204020204" pitchFamily="34" charset="-122"/>
+                        <a:cs typeface="微软雅黑" panose="020B0503020204020204" pitchFamily="34" charset="-122"/>
                       </a:endParaRPr>
                     </a:p>
                   </a:txBody>
-                  <a:tcPr marL="91440" marR="91440" marT="45720" marB="45720" anchor="ctr">
+                  <a:tcPr anchor="ctr">
                     <a:lnL w="9525" cap="flat" cmpd="sng" algn="ctr">
                       <a:solidFill>
                         <a:srgbClr val="D8DBE0"/>
@@ -4792,7 +4558,7 @@
                     <a:bodyPr/>
                     <a:lstStyle/>
                     <a:p>
-                      <a:pPr algn="ctr" indent="0" marL="0">
+                      <a:pPr marL="0" indent="0" algn="ctr">
                         <a:buNone/>
                       </a:pPr>
                       <a:r>
@@ -4800,20 +4566,20 @@
                           <a:solidFill>
                             <a:srgbClr val="1F2329"/>
                           </a:solidFill>
-                          <a:latin typeface="微软雅黑" pitchFamily="34" charset="0"/>
-                          <a:ea typeface="微软雅黑" pitchFamily="34" charset="-122"/>
-                          <a:cs typeface="微软雅黑" pitchFamily="34" charset="-120"/>
+                          <a:latin typeface="微软雅黑" panose="020B0503020204020204" pitchFamily="34" charset="-122"/>
+                          <a:ea typeface="微软雅黑" panose="020B0503020204020204" pitchFamily="34" charset="-122"/>
+                          <a:cs typeface="微软雅黑" panose="020B0503020204020204" pitchFamily="34" charset="-120"/>
                         </a:rPr>
                         <a:t>后序</a:t>
                       </a:r>
                       <a:endParaRPr lang="en-US" sz="1500" dirty="0">
-                        <a:latin typeface="微软雅黑" charset="0"/>
-                        <a:ea typeface="微软雅黑" charset="0"/>
-                        <a:cs typeface="微软雅黑" charset="0"/>
+                        <a:latin typeface="微软雅黑" panose="020B0503020204020204" pitchFamily="34" charset="-122"/>
+                        <a:ea typeface="微软雅黑" panose="020B0503020204020204" pitchFamily="34" charset="-122"/>
+                        <a:cs typeface="微软雅黑" panose="020B0503020204020204" pitchFamily="34" charset="-122"/>
                       </a:endParaRPr>
                     </a:p>
                   </a:txBody>
-                  <a:tcPr marL="91440" marR="91440" marT="45720" marB="45720" anchor="ctr">
+                  <a:tcPr anchor="ctr">
                     <a:lnL w="9525" cap="flat" cmpd="sng" algn="ctr">
                       <a:solidFill>
                         <a:srgbClr val="D8DBE0"/>
@@ -4860,7 +4626,7 @@
                     <a:bodyPr/>
                     <a:lstStyle/>
                     <a:p>
-                      <a:pPr algn="ctr" indent="0" marL="0">
+                      <a:pPr marL="0" indent="0" algn="ctr">
                         <a:buNone/>
                       </a:pPr>
                       <a:r>
@@ -4868,20 +4634,20 @@
                           <a:solidFill>
                             <a:srgbClr val="1F2329"/>
                           </a:solidFill>
-                          <a:latin typeface="微软雅黑" pitchFamily="34" charset="0"/>
-                          <a:ea typeface="微软雅黑" pitchFamily="34" charset="-122"/>
-                          <a:cs typeface="微软雅黑" pitchFamily="34" charset="-120"/>
+                          <a:latin typeface="微软雅黑" panose="020B0503020204020204" pitchFamily="34" charset="-122"/>
+                          <a:ea typeface="微软雅黑" panose="020B0503020204020204" pitchFamily="34" charset="-122"/>
+                          <a:cs typeface="微软雅黑" panose="020B0503020204020204" pitchFamily="34" charset="-120"/>
                         </a:rPr>
                         <a:t>左 右 根</a:t>
                       </a:r>
                       <a:endParaRPr lang="en-US" sz="1500" dirty="0">
-                        <a:latin typeface="微软雅黑" charset="0"/>
-                        <a:ea typeface="微软雅黑" charset="0"/>
-                        <a:cs typeface="微软雅黑" charset="0"/>
+                        <a:latin typeface="微软雅黑" panose="020B0503020204020204" pitchFamily="34" charset="-122"/>
+                        <a:ea typeface="微软雅黑" panose="020B0503020204020204" pitchFamily="34" charset="-122"/>
+                        <a:cs typeface="微软雅黑" panose="020B0503020204020204" pitchFamily="34" charset="-122"/>
                       </a:endParaRPr>
                     </a:p>
                   </a:txBody>
-                  <a:tcPr marL="91440" marR="91440" marT="45720" marB="45720" anchor="ctr">
+                  <a:tcPr anchor="ctr">
                     <a:lnL w="9525" cap="flat" cmpd="sng" algn="ctr">
                       <a:solidFill>
                         <a:srgbClr val="D8DBE0"/>
@@ -4928,7 +4694,7 @@
                     <a:bodyPr/>
                     <a:lstStyle/>
                     <a:p>
-                      <a:pPr algn="ctr" indent="0" marL="0">
+                      <a:pPr marL="0" indent="0" algn="ctr">
                         <a:buNone/>
                       </a:pPr>
                       <a:r>
@@ -4936,20 +4702,20 @@
                           <a:solidFill>
                             <a:srgbClr val="1F2329"/>
                           </a:solidFill>
-                          <a:latin typeface="微软雅黑" pitchFamily="34" charset="0"/>
-                          <a:ea typeface="微软雅黑" pitchFamily="34" charset="-122"/>
-                          <a:cs typeface="微软雅黑" pitchFamily="34" charset="-120"/>
+                          <a:latin typeface="微软雅黑" panose="020B0503020204020204" pitchFamily="34" charset="-122"/>
+                          <a:ea typeface="微软雅黑" panose="020B0503020204020204" pitchFamily="34" charset="-122"/>
+                          <a:cs typeface="微软雅黑" panose="020B0503020204020204" pitchFamily="34" charset="-120"/>
                         </a:rPr>
                         <a:t>O(n)</a:t>
                       </a:r>
                       <a:endParaRPr lang="en-US" sz="1500" dirty="0">
-                        <a:latin typeface="微软雅黑" charset="0"/>
-                        <a:ea typeface="微软雅黑" charset="0"/>
-                        <a:cs typeface="微软雅黑" charset="0"/>
+                        <a:latin typeface="微软雅黑" panose="020B0503020204020204" pitchFamily="34" charset="-122"/>
+                        <a:ea typeface="微软雅黑" panose="020B0503020204020204" pitchFamily="34" charset="-122"/>
+                        <a:cs typeface="微软雅黑" panose="020B0503020204020204" pitchFamily="34" charset="-122"/>
                       </a:endParaRPr>
                     </a:p>
                   </a:txBody>
-                  <a:tcPr marL="91440" marR="91440" marT="45720" marB="45720" anchor="ctr">
+                  <a:tcPr anchor="ctr">
                     <a:lnL w="9525" cap="flat" cmpd="sng" algn="ctr">
                       <a:solidFill>
                         <a:srgbClr val="D8DBE0"/>
@@ -4996,7 +4762,7 @@
                     <a:bodyPr/>
                     <a:lstStyle/>
                     <a:p>
-                      <a:pPr algn="ctr" indent="0" marL="0">
+                      <a:pPr marL="0" indent="0" algn="ctr">
                         <a:buNone/>
                       </a:pPr>
                       <a:r>
@@ -5004,20 +4770,20 @@
                           <a:solidFill>
                             <a:srgbClr val="1F2329"/>
                           </a:solidFill>
-                          <a:latin typeface="微软雅黑" pitchFamily="34" charset="0"/>
-                          <a:ea typeface="微软雅黑" pitchFamily="34" charset="-122"/>
-                          <a:cs typeface="微软雅黑" pitchFamily="34" charset="-120"/>
+                          <a:latin typeface="微软雅黑" panose="020B0503020204020204" pitchFamily="34" charset="-122"/>
+                          <a:ea typeface="微软雅黑" panose="020B0503020204020204" pitchFamily="34" charset="-122"/>
+                          <a:cs typeface="微软雅黑" panose="020B0503020204020204" pitchFamily="34" charset="-120"/>
                         </a:rPr>
                         <a:t>O(树高)，最坏 O(n)</a:t>
                       </a:r>
                       <a:endParaRPr lang="en-US" sz="1500" dirty="0">
-                        <a:latin typeface="微软雅黑" charset="0"/>
-                        <a:ea typeface="微软雅黑" charset="0"/>
-                        <a:cs typeface="微软雅黑" charset="0"/>
+                        <a:latin typeface="微软雅黑" panose="020B0503020204020204" pitchFamily="34" charset="-122"/>
+                        <a:ea typeface="微软雅黑" panose="020B0503020204020204" pitchFamily="34" charset="-122"/>
+                        <a:cs typeface="微软雅黑" panose="020B0503020204020204" pitchFamily="34" charset="-122"/>
                       </a:endParaRPr>
                     </a:p>
                   </a:txBody>
-                  <a:tcPr marL="91440" marR="91440" marT="45720" marB="45720" anchor="ctr">
+                  <a:tcPr anchor="ctr">
                     <a:lnL w="9525" cap="flat" cmpd="sng" algn="ctr">
                       <a:solidFill>
                         <a:srgbClr val="D8DBE0"/>
@@ -5066,7 +4832,7 @@
                     <a:bodyPr/>
                     <a:lstStyle/>
                     <a:p>
-                      <a:pPr algn="ctr" indent="0" marL="0">
+                      <a:pPr marL="0" indent="0" algn="ctr">
                         <a:buNone/>
                       </a:pPr>
                       <a:r>
@@ -5074,20 +4840,20 @@
                           <a:solidFill>
                             <a:srgbClr val="1F2329"/>
                           </a:solidFill>
-                          <a:latin typeface="微软雅黑" pitchFamily="34" charset="0"/>
-                          <a:ea typeface="微软雅黑" pitchFamily="34" charset="-122"/>
-                          <a:cs typeface="微软雅黑" pitchFamily="34" charset="-120"/>
+                          <a:latin typeface="微软雅黑" panose="020B0503020204020204" pitchFamily="34" charset="-122"/>
+                          <a:ea typeface="微软雅黑" panose="020B0503020204020204" pitchFamily="34" charset="-122"/>
+                          <a:cs typeface="微软雅黑" panose="020B0503020204020204" pitchFamily="34" charset="-120"/>
                         </a:rPr>
                         <a:t>层序</a:t>
                       </a:r>
                       <a:endParaRPr lang="en-US" sz="1500" dirty="0">
-                        <a:latin typeface="微软雅黑" charset="0"/>
-                        <a:ea typeface="微软雅黑" charset="0"/>
-                        <a:cs typeface="微软雅黑" charset="0"/>
+                        <a:latin typeface="微软雅黑" panose="020B0503020204020204" pitchFamily="34" charset="-122"/>
+                        <a:ea typeface="微软雅黑" panose="020B0503020204020204" pitchFamily="34" charset="-122"/>
+                        <a:cs typeface="微软雅黑" panose="020B0503020204020204" pitchFamily="34" charset="-122"/>
                       </a:endParaRPr>
                     </a:p>
                   </a:txBody>
-                  <a:tcPr marL="91440" marR="91440" marT="45720" marB="45720" anchor="ctr">
+                  <a:tcPr anchor="ctr">
                     <a:lnL w="9525" cap="flat" cmpd="sng" algn="ctr">
                       <a:solidFill>
                         <a:srgbClr val="D8DBE0"/>
@@ -5134,7 +4900,7 @@
                     <a:bodyPr/>
                     <a:lstStyle/>
                     <a:p>
-                      <a:pPr algn="ctr" indent="0" marL="0">
+                      <a:pPr marL="0" indent="0" algn="ctr">
                         <a:buNone/>
                       </a:pPr>
                       <a:r>
@@ -5142,20 +4908,20 @@
                           <a:solidFill>
                             <a:srgbClr val="1F2329"/>
                           </a:solidFill>
-                          <a:latin typeface="微软雅黑" pitchFamily="34" charset="0"/>
-                          <a:ea typeface="微软雅黑" pitchFamily="34" charset="-122"/>
-                          <a:cs typeface="微软雅黑" pitchFamily="34" charset="-120"/>
+                          <a:latin typeface="微软雅黑" panose="020B0503020204020204" pitchFamily="34" charset="-122"/>
+                          <a:ea typeface="微软雅黑" panose="020B0503020204020204" pitchFamily="34" charset="-122"/>
+                          <a:cs typeface="微软雅黑" panose="020B0503020204020204" pitchFamily="34" charset="-120"/>
                         </a:rPr>
                         <a:t>一层一层</a:t>
                       </a:r>
                       <a:endParaRPr lang="en-US" sz="1500" dirty="0">
-                        <a:latin typeface="微软雅黑" charset="0"/>
-                        <a:ea typeface="微软雅黑" charset="0"/>
-                        <a:cs typeface="微软雅黑" charset="0"/>
+                        <a:latin typeface="微软雅黑" panose="020B0503020204020204" pitchFamily="34" charset="-122"/>
+                        <a:ea typeface="微软雅黑" panose="020B0503020204020204" pitchFamily="34" charset="-122"/>
+                        <a:cs typeface="微软雅黑" panose="020B0503020204020204" pitchFamily="34" charset="-122"/>
                       </a:endParaRPr>
                     </a:p>
                   </a:txBody>
-                  <a:tcPr marL="91440" marR="91440" marT="45720" marB="45720" anchor="ctr">
+                  <a:tcPr anchor="ctr">
                     <a:lnL w="9525" cap="flat" cmpd="sng" algn="ctr">
                       <a:solidFill>
                         <a:srgbClr val="D8DBE0"/>
@@ -5202,7 +4968,7 @@
                     <a:bodyPr/>
                     <a:lstStyle/>
                     <a:p>
-                      <a:pPr algn="ctr" indent="0" marL="0">
+                      <a:pPr marL="0" indent="0" algn="ctr">
                         <a:buNone/>
                       </a:pPr>
                       <a:r>
@@ -5210,20 +4976,20 @@
                           <a:solidFill>
                             <a:srgbClr val="1F2329"/>
                           </a:solidFill>
-                          <a:latin typeface="微软雅黑" pitchFamily="34" charset="0"/>
-                          <a:ea typeface="微软雅黑" pitchFamily="34" charset="-122"/>
-                          <a:cs typeface="微软雅黑" pitchFamily="34" charset="-120"/>
+                          <a:latin typeface="微软雅黑" panose="020B0503020204020204" pitchFamily="34" charset="-122"/>
+                          <a:ea typeface="微软雅黑" panose="020B0503020204020204" pitchFamily="34" charset="-122"/>
+                          <a:cs typeface="微软雅黑" panose="020B0503020204020204" pitchFamily="34" charset="-120"/>
                         </a:rPr>
                         <a:t>O(n)</a:t>
                       </a:r>
                       <a:endParaRPr lang="en-US" sz="1500" dirty="0">
-                        <a:latin typeface="微软雅黑" charset="0"/>
-                        <a:ea typeface="微软雅黑" charset="0"/>
-                        <a:cs typeface="微软雅黑" charset="0"/>
+                        <a:latin typeface="微软雅黑" panose="020B0503020204020204" pitchFamily="34" charset="-122"/>
+                        <a:ea typeface="微软雅黑" panose="020B0503020204020204" pitchFamily="34" charset="-122"/>
+                        <a:cs typeface="微软雅黑" panose="020B0503020204020204" pitchFamily="34" charset="-122"/>
                       </a:endParaRPr>
                     </a:p>
                   </a:txBody>
-                  <a:tcPr marL="91440" marR="91440" marT="45720" marB="45720" anchor="ctr">
+                  <a:tcPr anchor="ctr">
                     <a:lnL w="9525" cap="flat" cmpd="sng" algn="ctr">
                       <a:solidFill>
                         <a:srgbClr val="D8DBE0"/>
@@ -5270,7 +5036,7 @@
                     <a:bodyPr/>
                     <a:lstStyle/>
                     <a:p>
-                      <a:pPr algn="ctr" indent="0" marL="0">
+                      <a:pPr marL="0" indent="0" algn="ctr">
                         <a:buNone/>
                       </a:pPr>
                       <a:r>
@@ -5278,20 +5044,20 @@
                           <a:solidFill>
                             <a:srgbClr val="1F2329"/>
                           </a:solidFill>
-                          <a:latin typeface="微软雅黑" pitchFamily="34" charset="0"/>
-                          <a:ea typeface="微软雅黑" pitchFamily="34" charset="-122"/>
-                          <a:cs typeface="微软雅黑" pitchFamily="34" charset="-120"/>
+                          <a:latin typeface="微软雅黑" panose="020B0503020204020204" pitchFamily="34" charset="-122"/>
+                          <a:ea typeface="微软雅黑" panose="020B0503020204020204" pitchFamily="34" charset="-122"/>
+                          <a:cs typeface="微软雅黑" panose="020B0503020204020204" pitchFamily="34" charset="-120"/>
                         </a:rPr>
                         <a:t>O(队列最多一层结点)</a:t>
                       </a:r>
                       <a:endParaRPr lang="en-US" sz="1500" dirty="0">
-                        <a:latin typeface="微软雅黑" charset="0"/>
-                        <a:ea typeface="微软雅黑" charset="0"/>
-                        <a:cs typeface="微软雅黑" charset="0"/>
+                        <a:latin typeface="微软雅黑" panose="020B0503020204020204" pitchFamily="34" charset="-122"/>
+                        <a:ea typeface="微软雅黑" panose="020B0503020204020204" pitchFamily="34" charset="-122"/>
+                        <a:cs typeface="微软雅黑" panose="020B0503020204020204" pitchFamily="34" charset="-122"/>
                       </a:endParaRPr>
                     </a:p>
                   </a:txBody>
-                  <a:tcPr marL="91440" marR="91440" marT="45720" marB="45720" anchor="ctr">
+                  <a:tcPr anchor="ctr">
                     <a:lnL w="9525" cap="flat" cmpd="sng" algn="ctr">
                       <a:solidFill>
                         <a:srgbClr val="D8DBE0"/>
@@ -5353,13 +5119,12 @@
             <a:avLst/>
           </a:prstGeom>
           <a:noFill/>
-          <a:ln/>
         </p:spPr>
         <p:txBody>
           <a:bodyPr wrap="square" rtlCol="0" anchor="t"/>
           <a:lstStyle/>
           <a:p>
-            <a:pPr algn="l" indent="0" marL="0">
+            <a:pPr marL="0" indent="0" algn="l">
               <a:buNone/>
             </a:pPr>
             <a:r>
@@ -5367,9 +5132,9 @@
                 <a:solidFill>
                   <a:srgbClr val="8A9099"/>
                 </a:solidFill>
-                <a:latin typeface="微软雅黑" pitchFamily="34" charset="0"/>
-                <a:ea typeface="微软雅黑" pitchFamily="34" charset="-122"/>
-                <a:cs typeface="微软雅黑" pitchFamily="34" charset="-120"/>
+                <a:latin typeface="微软雅黑" panose="020B0503020204020204" pitchFamily="34" charset="-122"/>
+                <a:ea typeface="微软雅黑" panose="020B0503020204020204" pitchFamily="34" charset="-122"/>
+                <a:cs typeface="微软雅黑" panose="020B0503020204020204" pitchFamily="34" charset="-120"/>
               </a:rPr>
               <a:t>递归遍历空间是 O(树高) 不是 O(1)，栈深度要算；单支树最坏 O(n)。四种遍历是强化阶段所有树算法的基础</a:t>
             </a:r>
@@ -5387,7 +5152,7 @@
 
 <file path=ppt/slides/slide15.xml><?xml version="1.0" encoding="utf-8"?>
 <p:sld xmlns:a="http://schemas.openxmlformats.org/drawingml/2006/main" xmlns:r="http://schemas.openxmlformats.org/officeDocument/2006/relationships" xmlns:p="http://schemas.openxmlformats.org/presentationml/2006/main">
-  <p:cSld name="Slide 15">
+  <p:cSld>
     <p:bg>
       <p:bgPr>
         <a:blipFill dpi="0" rotWithShape="1">
@@ -5431,13 +5196,12 @@
             <a:avLst/>
           </a:prstGeom>
           <a:noFill/>
-          <a:ln/>
         </p:spPr>
         <p:txBody>
           <a:bodyPr wrap="square" rtlCol="0" anchor="ctr"/>
           <a:lstStyle/>
           <a:p>
-            <a:pPr algn="r" indent="0" marL="0">
+            <a:pPr marL="0" indent="0" algn="r">
               <a:buNone/>
             </a:pPr>
             <a:r>
@@ -5445,9 +5209,9 @@
                 <a:solidFill>
                   <a:srgbClr val="8A9099"/>
                 </a:solidFill>
-                <a:latin typeface="微软雅黑" pitchFamily="34" charset="0"/>
-                <a:ea typeface="微软雅黑" pitchFamily="34" charset="-122"/>
-                <a:cs typeface="微软雅黑" pitchFamily="34" charset="-120"/>
+                <a:latin typeface="微软雅黑" panose="020B0503020204020204" pitchFamily="34" charset="-122"/>
+                <a:ea typeface="微软雅黑" panose="020B0503020204020204" pitchFamily="34" charset="-122"/>
+                <a:cs typeface="微软雅黑" panose="020B0503020204020204" pitchFamily="34" charset="-120"/>
               </a:rPr>
               <a:t>15 / 17</a:t>
             </a:r>
@@ -5470,13 +5234,12 @@
             <a:avLst/>
           </a:prstGeom>
           <a:noFill/>
-          <a:ln/>
         </p:spPr>
         <p:txBody>
           <a:bodyPr wrap="square" rtlCol="0" anchor="ctr"/>
           <a:lstStyle/>
           <a:p>
-            <a:pPr algn="l" indent="0" marL="0">
+            <a:pPr marL="0" indent="0" algn="l">
               <a:buNone/>
             </a:pPr>
             <a:r>
@@ -5484,9 +5247,9 @@
                 <a:solidFill>
                   <a:srgbClr val="1F4E9C"/>
                 </a:solidFill>
-                <a:latin typeface="微软雅黑" pitchFamily="34" charset="0"/>
-                <a:ea typeface="微软雅黑" pitchFamily="34" charset="-122"/>
-                <a:cs typeface="微软雅黑" pitchFamily="34" charset="-120"/>
+                <a:latin typeface="微软雅黑" panose="020B0503020204020204" pitchFamily="34" charset="-122"/>
+                <a:ea typeface="微软雅黑" panose="020B0503020204020204" pitchFamily="34" charset="-122"/>
+                <a:cs typeface="微软雅黑" panose="020B0503020204020204" pitchFamily="34" charset="-120"/>
               </a:rPr>
               <a:t>课后任务</a:t>
             </a:r>
@@ -5509,13 +5272,12 @@
             <a:avLst/>
           </a:prstGeom>
           <a:noFill/>
-          <a:ln/>
         </p:spPr>
         <p:txBody>
           <a:bodyPr wrap="square" rtlCol="0" anchor="ctr"/>
           <a:lstStyle/>
           <a:p>
-            <a:pPr algn="l" indent="0" marL="0">
+            <a:pPr marL="0" indent="0" algn="l">
               <a:buNone/>
             </a:pPr>
             <a:r>
@@ -5523,9 +5285,9 @@
                 <a:solidFill>
                   <a:srgbClr val="1F2329"/>
                 </a:solidFill>
-                <a:latin typeface="微软雅黑" pitchFamily="34" charset="0"/>
-                <a:ea typeface="微软雅黑" pitchFamily="34" charset="-122"/>
-                <a:cs typeface="微软雅黑" pitchFamily="34" charset="-120"/>
+                <a:latin typeface="微软雅黑" panose="020B0503020204020204" pitchFamily="34" charset="-122"/>
+                <a:ea typeface="微软雅黑" panose="020B0503020204020204" pitchFamily="34" charset="-122"/>
+                <a:cs typeface="微软雅黑" panose="020B0503020204020204" pitchFamily="34" charset="-120"/>
               </a:rPr>
               <a:t>1道跟练 ＋ 1道模仿</a:t>
             </a:r>
@@ -5548,13 +5310,12 @@
             <a:avLst/>
           </a:prstGeom>
           <a:noFill/>
-          <a:ln/>
         </p:spPr>
         <p:txBody>
           <a:bodyPr wrap="square" rtlCol="0" anchor="t"/>
           <a:lstStyle/>
           <a:p>
-            <a:pPr algn="l" indent="0" marL="0">
+            <a:pPr marL="0" indent="0" algn="l">
               <a:lnSpc>
                 <a:spcPct val="115000"/>
               </a:lnSpc>
@@ -5565,13 +5326,53 @@
                 <a:solidFill>
                   <a:srgbClr val="1F4E9C"/>
                 </a:solidFill>
-                <a:latin typeface="微软雅黑" pitchFamily="34" charset="0"/>
-                <a:ea typeface="微软雅黑" pitchFamily="34" charset="-122"/>
-                <a:cs typeface="微软雅黑" pitchFamily="34" charset="-120"/>
+                <a:latin typeface="微软雅黑" panose="020B0503020204020204" pitchFamily="34" charset="-122"/>
+                <a:ea typeface="微软雅黑" panose="020B0503020204020204" pitchFamily="34" charset="-122"/>
+                <a:cs typeface="微软雅黑" panose="020B0503020204020204" pitchFamily="34" charset="-120"/>
               </a:rPr>
               <a:t>•  </a:t>
             </a:r>
-            <a:pPr algn="l" indent="0" marL="0">
+            <a:r>
+              <a:rPr lang="en-US" sz="1800" b="1" dirty="0">
+                <a:solidFill>
+                  <a:srgbClr val="000000"/>
+                </a:solidFill>
+              </a:rPr>
+              <a:t>跟练题</a:t>
+            </a:r>
+            <a:r>
+              <a:rPr lang="en-US" sz="1800" dirty="0">
+                <a:solidFill>
+                  <a:srgbClr val="000000"/>
+                </a:solidFill>
+              </a:rPr>
+              <a:t>：默写三种递归遍历、非递归中序、层序遍历；再由先序 1 2 4 5 3、中序 4 2 5 1 3 画出这棵树</a:t>
+            </a:r>
+            <a:endParaRPr lang="en-US" sz="1800" dirty="0"/>
+          </a:p>
+        </p:txBody>
+      </p:sp>
+      <p:sp>
+        <p:nvSpPr>
+          <p:cNvPr id="6" name="Text 4"/>
+          <p:cNvSpPr/>
+          <p:nvPr/>
+        </p:nvSpPr>
+        <p:spPr>
+          <a:xfrm>
+            <a:off x="896112" y="3209544"/>
+            <a:ext cx="10454335" cy="740664"/>
+          </a:xfrm>
+          <a:prstGeom prst="rect">
+            <a:avLst/>
+          </a:prstGeom>
+          <a:noFill/>
+        </p:spPr>
+        <p:txBody>
+          <a:bodyPr wrap="square" rtlCol="0" anchor="t"/>
+          <a:lstStyle/>
+          <a:p>
+            <a:pPr marL="0" indent="0" algn="l">
               <a:lnSpc>
                 <a:spcPct val="115000"/>
               </a:lnSpc>
@@ -5580,87 +5381,22 @@
             <a:r>
               <a:rPr lang="en-US" sz="1800" b="1" dirty="0">
                 <a:solidFill>
+                  <a:srgbClr val="1F4E9C"/>
+                </a:solidFill>
+                <a:latin typeface="微软雅黑" panose="020B0503020204020204" pitchFamily="34" charset="-122"/>
+                <a:ea typeface="微软雅黑" panose="020B0503020204020204" pitchFamily="34" charset="-122"/>
+                <a:cs typeface="微软雅黑" panose="020B0503020204020204" pitchFamily="34" charset="-120"/>
+              </a:rPr>
+              <a:t>•  </a:t>
+            </a:r>
+            <a:r>
+              <a:rPr lang="en-US" sz="1800" b="1" dirty="0">
+                <a:solidFill>
                   <a:srgbClr val="000000"/>
                 </a:solidFill>
               </a:rPr>
-              <a:t>跟练题</a:t>
-            </a:r>
-            <a:pPr algn="l" indent="0" marL="0">
-              <a:lnSpc>
-                <a:spcPct val="115000"/>
-              </a:lnSpc>
-              <a:buNone/>
-            </a:pPr>
-            <a:r>
-              <a:rPr lang="en-US" sz="1800" dirty="0">
-                <a:solidFill>
-                  <a:srgbClr val="000000"/>
-                </a:solidFill>
-              </a:rPr>
-              <a:t>：默写三种递归遍历、非递归中序、层序遍历；再由先序 1 2 4 5 3、中序 4 2 5 1 3 画出这棵树</a:t>
-            </a:r>
-            <a:endParaRPr lang="en-US" sz="1800" dirty="0"/>
-          </a:p>
-        </p:txBody>
-      </p:sp>
-      <p:sp>
-        <p:nvSpPr>
-          <p:cNvPr id="6" name="Text 4"/>
-          <p:cNvSpPr/>
-          <p:nvPr/>
-        </p:nvSpPr>
-        <p:spPr>
-          <a:xfrm>
-            <a:off x="896112" y="3209544"/>
-            <a:ext cx="10454335" cy="740664"/>
-          </a:xfrm>
-          <a:prstGeom prst="rect">
-            <a:avLst/>
-          </a:prstGeom>
-          <a:noFill/>
-          <a:ln/>
-        </p:spPr>
-        <p:txBody>
-          <a:bodyPr wrap="square" rtlCol="0" anchor="t"/>
-          <a:lstStyle/>
-          <a:p>
-            <a:pPr algn="l" indent="0" marL="0">
-              <a:lnSpc>
-                <a:spcPct val="115000"/>
-              </a:lnSpc>
-              <a:buNone/>
-            </a:pPr>
-            <a:r>
-              <a:rPr lang="en-US" sz="1800" b="1" dirty="0">
-                <a:solidFill>
-                  <a:srgbClr val="1F4E9C"/>
-                </a:solidFill>
-                <a:latin typeface="微软雅黑" pitchFamily="34" charset="0"/>
-                <a:ea typeface="微软雅黑" pitchFamily="34" charset="-122"/>
-                <a:cs typeface="微软雅黑" pitchFamily="34" charset="-120"/>
-              </a:rPr>
-              <a:t>•  </a:t>
-            </a:r>
-            <a:pPr algn="l" indent="0" marL="0">
-              <a:lnSpc>
-                <a:spcPct val="115000"/>
-              </a:lnSpc>
-              <a:buNone/>
-            </a:pPr>
-            <a:r>
-              <a:rPr lang="en-US" sz="1800" b="1" dirty="0">
-                <a:solidFill>
-                  <a:srgbClr val="000000"/>
-                </a:solidFill>
-              </a:rPr>
               <a:t>模仿题</a:t>
             </a:r>
-            <a:pPr algn="l" indent="0" marL="0">
-              <a:lnSpc>
-                <a:spcPct val="115000"/>
-              </a:lnSpc>
-              <a:buNone/>
-            </a:pPr>
             <a:r>
               <a:rPr lang="en-US" sz="1800" dirty="0">
                 <a:solidFill>
@@ -5688,13 +5424,12 @@
             <a:avLst/>
           </a:prstGeom>
           <a:noFill/>
-          <a:ln/>
         </p:spPr>
         <p:txBody>
           <a:bodyPr wrap="square" rtlCol="0" anchor="t"/>
           <a:lstStyle/>
           <a:p>
-            <a:pPr algn="l" indent="0" marL="0">
+            <a:pPr marL="0" indent="0" algn="l">
               <a:buNone/>
             </a:pPr>
             <a:r>
@@ -5702,9 +5437,9 @@
                 <a:solidFill>
                   <a:srgbClr val="8A9099"/>
                 </a:solidFill>
-                <a:latin typeface="微软雅黑" pitchFamily="34" charset="0"/>
-                <a:ea typeface="微软雅黑" pitchFamily="34" charset="-122"/>
-                <a:cs typeface="微软雅黑" pitchFamily="34" charset="-120"/>
+                <a:latin typeface="微软雅黑" panose="020B0503020204020204" pitchFamily="34" charset="-122"/>
+                <a:ea typeface="微软雅黑" panose="020B0503020204020204" pitchFamily="34" charset="-122"/>
+                <a:cs typeface="微软雅黑" panose="020B0503020204020204" pitchFamily="34" charset="-120"/>
               </a:rPr>
               <a:t>默写要求：合上资料能写出递归三遍历与非递归中序、层序；参考答案在本PPT最后两页，课后自行对照</a:t>
             </a:r>
@@ -5722,7 +5457,7 @@
 
 <file path=ppt/slides/slide16.xml><?xml version="1.0" encoding="utf-8"?>
 <p:sld xmlns:a="http://schemas.openxmlformats.org/drawingml/2006/main" xmlns:r="http://schemas.openxmlformats.org/officeDocument/2006/relationships" xmlns:p="http://schemas.openxmlformats.org/presentationml/2006/main">
-  <p:cSld name="Slide 16">
+  <p:cSld>
     <p:bg>
       <p:bgPr>
         <a:blipFill dpi="0" rotWithShape="1">
@@ -5766,13 +5501,12 @@
             <a:avLst/>
           </a:prstGeom>
           <a:noFill/>
-          <a:ln/>
         </p:spPr>
         <p:txBody>
           <a:bodyPr wrap="square" rtlCol="0" anchor="ctr"/>
           <a:lstStyle/>
           <a:p>
-            <a:pPr algn="r" indent="0" marL="0">
+            <a:pPr marL="0" indent="0" algn="r">
               <a:buNone/>
             </a:pPr>
             <a:r>
@@ -5780,9 +5514,9 @@
                 <a:solidFill>
                   <a:srgbClr val="8A9099"/>
                 </a:solidFill>
-                <a:latin typeface="微软雅黑" pitchFamily="34" charset="0"/>
-                <a:ea typeface="微软雅黑" pitchFamily="34" charset="-122"/>
-                <a:cs typeface="微软雅黑" pitchFamily="34" charset="-120"/>
+                <a:latin typeface="微软雅黑" panose="020B0503020204020204" pitchFamily="34" charset="-122"/>
+                <a:ea typeface="微软雅黑" panose="020B0503020204020204" pitchFamily="34" charset="-122"/>
+                <a:cs typeface="微软雅黑" panose="020B0503020204020204" pitchFamily="34" charset="-120"/>
               </a:rPr>
               <a:t>16 / 17</a:t>
             </a:r>
@@ -5805,13 +5539,12 @@
             <a:avLst/>
           </a:prstGeom>
           <a:noFill/>
-          <a:ln/>
         </p:spPr>
         <p:txBody>
           <a:bodyPr wrap="square" rtlCol="0" anchor="ctr"/>
           <a:lstStyle/>
           <a:p>
-            <a:pPr algn="l" indent="0" marL="0">
+            <a:pPr marL="0" indent="0" algn="l">
               <a:buNone/>
             </a:pPr>
             <a:r>
@@ -5819,9 +5552,9 @@
                 <a:solidFill>
                   <a:srgbClr val="1F4E9C"/>
                 </a:solidFill>
-                <a:latin typeface="微软雅黑" pitchFamily="34" charset="0"/>
-                <a:ea typeface="微软雅黑" pitchFamily="34" charset="-122"/>
-                <a:cs typeface="微软雅黑" pitchFamily="34" charset="-120"/>
+                <a:latin typeface="微软雅黑" panose="020B0503020204020204" pitchFamily="34" charset="-122"/>
+                <a:ea typeface="微软雅黑" panose="020B0503020204020204" pitchFamily="34" charset="-122"/>
+                <a:cs typeface="微软雅黑" panose="020B0503020204020204" pitchFamily="34" charset="-120"/>
               </a:rPr>
               <a:t>参考答案 · 跟练题</a:t>
             </a:r>
@@ -5844,13 +5577,12 @@
             <a:avLst/>
           </a:prstGeom>
           <a:noFill/>
-          <a:ln/>
         </p:spPr>
         <p:txBody>
           <a:bodyPr wrap="square" rtlCol="0" anchor="ctr"/>
           <a:lstStyle/>
           <a:p>
-            <a:pPr algn="l" indent="0" marL="0">
+            <a:pPr marL="0" indent="0" algn="l">
               <a:buNone/>
             </a:pPr>
             <a:r>
@@ -5858,9 +5590,9 @@
                 <a:solidFill>
                   <a:srgbClr val="1F2329"/>
                 </a:solidFill>
-                <a:latin typeface="微软雅黑" pitchFamily="34" charset="0"/>
-                <a:ea typeface="微软雅黑" pitchFamily="34" charset="-122"/>
-                <a:cs typeface="微软雅黑" pitchFamily="34" charset="-120"/>
+                <a:latin typeface="微软雅黑" panose="020B0503020204020204" pitchFamily="34" charset="-122"/>
+                <a:ea typeface="微软雅黑" panose="020B0503020204020204" pitchFamily="34" charset="-122"/>
+                <a:cs typeface="微软雅黑" panose="020B0503020204020204" pitchFamily="34" charset="-120"/>
               </a:rPr>
               <a:t>跟练题参考答案（自行对照）</a:t>
             </a:r>
@@ -5885,7 +5617,6 @@
           <a:solidFill>
             <a:srgbClr val="F7F9FC"/>
           </a:solidFill>
-          <a:ln/>
         </p:spPr>
       </p:sp>
       <p:sp>
@@ -5905,7 +5636,6 @@
           <a:solidFill>
             <a:srgbClr val="1F4E9C"/>
           </a:solidFill>
-          <a:ln/>
         </p:spPr>
       </p:sp>
       <p:sp>
@@ -5923,13 +5653,12 @@
             <a:avLst/>
           </a:prstGeom>
           <a:noFill/>
-          <a:ln/>
         </p:spPr>
         <p:txBody>
           <a:bodyPr wrap="square" rtlCol="0" anchor="t"/>
           <a:lstStyle/>
           <a:p>
-            <a:pPr algn="l" indent="0" marL="0">
+            <a:pPr marL="0" indent="0" algn="l">
               <a:lnSpc>
                 <a:spcPct val="125000"/>
               </a:lnSpc>
@@ -5940,9 +5669,9 @@
                 <a:solidFill>
                   <a:srgbClr val="1F2329"/>
                 </a:solidFill>
-                <a:latin typeface="Consolas" pitchFamily="34" charset="0"/>
-                <a:ea typeface="Consolas" pitchFamily="34" charset="-122"/>
-                <a:cs typeface="Consolas" pitchFamily="34" charset="-120"/>
+                <a:latin typeface="Consolas" panose="020B0609020204030204" pitchFamily="34" charset="0"/>
+                <a:ea typeface="Consolas" panose="020B0609020204030204" pitchFamily="34" charset="-122"/>
+                <a:cs typeface="Consolas" panose="020B0609020204030204" pitchFamily="34" charset="-120"/>
               </a:rPr>
               <a:t>void InOrder(BiTree T){ if(T==NULL) return;
     InOrder(T-&gt;lchild); visit(T); InOrder(T-&gt;rchild); }
@@ -5972,13 +5701,12 @@
             <a:avLst/>
           </a:prstGeom>
           <a:noFill/>
-          <a:ln/>
         </p:spPr>
         <p:txBody>
           <a:bodyPr wrap="square" rtlCol="0" anchor="t"/>
           <a:lstStyle/>
           <a:p>
-            <a:pPr algn="l" indent="0" marL="0">
+            <a:pPr marL="0" indent="0" algn="l">
               <a:buNone/>
             </a:pPr>
             <a:r>
@@ -5986,9 +5714,9 @@
                 <a:solidFill>
                   <a:srgbClr val="8A9099"/>
                 </a:solidFill>
-                <a:latin typeface="微软雅黑" pitchFamily="34" charset="0"/>
-                <a:ea typeface="微软雅黑" pitchFamily="34" charset="-122"/>
-                <a:cs typeface="微软雅黑" pitchFamily="34" charset="-120"/>
+                <a:latin typeface="微软雅黑" panose="020B0503020204020204" pitchFamily="34" charset="-122"/>
+                <a:ea typeface="微软雅黑" panose="020B0503020204020204" pitchFamily="34" charset="-122"/>
+                <a:cs typeface="微软雅黑" panose="020B0503020204020204" pitchFamily="34" charset="-120"/>
               </a:rPr>
               <a:t>先序 1 2 4 5 3、中序 4 2 5 1 3 建出的树：1 为根，左子树 2（4、5 为其左右孩子），右子树 3；非递归中序见本节代码合集</a:t>
             </a:r>
@@ -6006,7 +5734,7 @@
 
 <file path=ppt/slides/slide17.xml><?xml version="1.0" encoding="utf-8"?>
 <p:sld xmlns:a="http://schemas.openxmlformats.org/drawingml/2006/main" xmlns:r="http://schemas.openxmlformats.org/officeDocument/2006/relationships" xmlns:p="http://schemas.openxmlformats.org/presentationml/2006/main">
-  <p:cSld name="Slide 17">
+  <p:cSld>
     <p:bg>
       <p:bgPr>
         <a:blipFill dpi="0" rotWithShape="1">
@@ -6050,13 +5778,12 @@
             <a:avLst/>
           </a:prstGeom>
           <a:noFill/>
-          <a:ln/>
         </p:spPr>
         <p:txBody>
           <a:bodyPr wrap="square" rtlCol="0" anchor="ctr"/>
           <a:lstStyle/>
           <a:p>
-            <a:pPr algn="r" indent="0" marL="0">
+            <a:pPr marL="0" indent="0" algn="r">
               <a:buNone/>
             </a:pPr>
             <a:r>
@@ -6064,9 +5791,9 @@
                 <a:solidFill>
                   <a:srgbClr val="8A9099"/>
                 </a:solidFill>
-                <a:latin typeface="微软雅黑" pitchFamily="34" charset="0"/>
-                <a:ea typeface="微软雅黑" pitchFamily="34" charset="-122"/>
-                <a:cs typeface="微软雅黑" pitchFamily="34" charset="-120"/>
+                <a:latin typeface="微软雅黑" panose="020B0503020204020204" pitchFamily="34" charset="-122"/>
+                <a:ea typeface="微软雅黑" panose="020B0503020204020204" pitchFamily="34" charset="-122"/>
+                <a:cs typeface="微软雅黑" panose="020B0503020204020204" pitchFamily="34" charset="-120"/>
               </a:rPr>
               <a:t>17 / 17</a:t>
             </a:r>
@@ -6089,13 +5816,12 @@
             <a:avLst/>
           </a:prstGeom>
           <a:noFill/>
-          <a:ln/>
         </p:spPr>
         <p:txBody>
           <a:bodyPr wrap="square" rtlCol="0" anchor="ctr"/>
           <a:lstStyle/>
           <a:p>
-            <a:pPr algn="l" indent="0" marL="0">
+            <a:pPr marL="0" indent="0" algn="l">
               <a:buNone/>
             </a:pPr>
             <a:r>
@@ -6103,9 +5829,9 @@
                 <a:solidFill>
                   <a:srgbClr val="1F4E9C"/>
                 </a:solidFill>
-                <a:latin typeface="微软雅黑" pitchFamily="34" charset="0"/>
-                <a:ea typeface="微软雅黑" pitchFamily="34" charset="-122"/>
-                <a:cs typeface="微软雅黑" pitchFamily="34" charset="-120"/>
+                <a:latin typeface="微软雅黑" panose="020B0503020204020204" pitchFamily="34" charset="-122"/>
+                <a:ea typeface="微软雅黑" panose="020B0503020204020204" pitchFamily="34" charset="-122"/>
+                <a:cs typeface="微软雅黑" panose="020B0503020204020204" pitchFamily="34" charset="-120"/>
               </a:rPr>
               <a:t>参考答案 · 模仿题</a:t>
             </a:r>
@@ -6128,13 +5854,12 @@
             <a:avLst/>
           </a:prstGeom>
           <a:noFill/>
-          <a:ln/>
         </p:spPr>
         <p:txBody>
           <a:bodyPr wrap="square" rtlCol="0" anchor="ctr"/>
           <a:lstStyle/>
           <a:p>
-            <a:pPr algn="l" indent="0" marL="0">
+            <a:pPr marL="0" indent="0" algn="l">
               <a:buNone/>
             </a:pPr>
             <a:r>
@@ -6142,9 +5867,9 @@
                 <a:solidFill>
                   <a:srgbClr val="1F2329"/>
                 </a:solidFill>
-                <a:latin typeface="微软雅黑" pitchFamily="34" charset="0"/>
-                <a:ea typeface="微软雅黑" pitchFamily="34" charset="-122"/>
-                <a:cs typeface="微软雅黑" pitchFamily="34" charset="-120"/>
+                <a:latin typeface="微软雅黑" panose="020B0503020204020204" pitchFamily="34" charset="-122"/>
+                <a:ea typeface="微软雅黑" panose="020B0503020204020204" pitchFamily="34" charset="-122"/>
+                <a:cs typeface="微软雅黑" panose="020B0503020204020204" pitchFamily="34" charset="-120"/>
               </a:rPr>
               <a:t>模仿题参考答案（自行对照）</a:t>
             </a:r>
@@ -6167,13 +5892,12 @@
             <a:avLst/>
           </a:prstGeom>
           <a:noFill/>
-          <a:ln/>
         </p:spPr>
         <p:txBody>
           <a:bodyPr wrap="square" rtlCol="0" anchor="t"/>
           <a:lstStyle/>
           <a:p>
-            <a:pPr algn="l" indent="0" marL="0">
+            <a:pPr marL="0" indent="0" algn="l">
               <a:lnSpc>
                 <a:spcPct val="115000"/>
               </a:lnSpc>
@@ -6184,25 +5908,68 @@
                 <a:solidFill>
                   <a:srgbClr val="1F4E9C"/>
                 </a:solidFill>
-                <a:latin typeface="微软雅黑" pitchFamily="34" charset="0"/>
-                <a:ea typeface="微软雅黑" pitchFamily="34" charset="-122"/>
-                <a:cs typeface="微软雅黑" pitchFamily="34" charset="-120"/>
+                <a:latin typeface="微软雅黑" panose="020B0503020204020204" pitchFamily="34" charset="-122"/>
+                <a:ea typeface="微软雅黑" panose="020B0503020204020204" pitchFamily="34" charset="-122"/>
+                <a:cs typeface="微软雅黑" panose="020B0503020204020204" pitchFamily="34" charset="-120"/>
               </a:rPr>
               <a:t>•  </a:t>
             </a:r>
-            <a:pPr algn="l" indent="0" marL="0">
+            <a:r>
+              <a:rPr lang="en-US" sz="1800" dirty="0">
+                <a:solidFill>
+                  <a:srgbClr val="000000"/>
+                </a:solidFill>
+              </a:rPr>
+              <a:t>中序+后序建树：后序的最后一个元素是根（后序是左右根）</a:t>
+            </a:r>
+            <a:endParaRPr lang="en-US" sz="1800" dirty="0"/>
+          </a:p>
+        </p:txBody>
+      </p:sp>
+      <p:sp>
+        <p:nvSpPr>
+          <p:cNvPr id="6" name="Text 4"/>
+          <p:cNvSpPr/>
+          <p:nvPr/>
+        </p:nvSpPr>
+        <p:spPr>
+          <a:xfrm>
+            <a:off x="896112" y="2866644"/>
+            <a:ext cx="10454335" cy="397764"/>
+          </a:xfrm>
+          <a:prstGeom prst="rect">
+            <a:avLst/>
+          </a:prstGeom>
+          <a:noFill/>
+        </p:spPr>
+        <p:txBody>
+          <a:bodyPr wrap="square" rtlCol="0" anchor="t"/>
+          <a:lstStyle/>
+          <a:p>
+            <a:pPr marL="0" indent="0" algn="l">
               <a:lnSpc>
                 <a:spcPct val="115000"/>
               </a:lnSpc>
               <a:buNone/>
             </a:pPr>
             <a:r>
+              <a:rPr lang="en-US" sz="1800" b="1" dirty="0">
+                <a:solidFill>
+                  <a:srgbClr val="1F4E9C"/>
+                </a:solidFill>
+                <a:latin typeface="微软雅黑" panose="020B0503020204020204" pitchFamily="34" charset="-122"/>
+                <a:ea typeface="微软雅黑" panose="020B0503020204020204" pitchFamily="34" charset="-122"/>
+                <a:cs typeface="微软雅黑" panose="020B0503020204020204" pitchFamily="34" charset="-120"/>
+              </a:rPr>
+              <a:t>•  </a:t>
+            </a:r>
+            <a:r>
               <a:rPr lang="en-US" sz="1800" dirty="0">
                 <a:solidFill>
                   <a:srgbClr val="000000"/>
                 </a:solidFill>
               </a:rPr>
-              <a:t>中序+后序建树：后序的最后一个元素是根（后序是左右根）</a:t>
+              <a:t>在中序里定位这个根，左边是左子树的中序、右边是右子树的中序</a:t>
             </a:r>
             <a:endParaRPr lang="en-US" sz="1800" dirty="0"/>
           </a:p>
@@ -6210,26 +5977,25 @@
       </p:sp>
       <p:sp>
         <p:nvSpPr>
-          <p:cNvPr id="6" name="Text 4"/>
-          <p:cNvSpPr/>
-          <p:nvPr/>
-        </p:nvSpPr>
-        <p:spPr>
-          <a:xfrm>
-            <a:off x="896112" y="2866644"/>
+          <p:cNvPr id="7" name="Text 5"/>
+          <p:cNvSpPr/>
+          <p:nvPr/>
+        </p:nvSpPr>
+        <p:spPr>
+          <a:xfrm>
+            <a:off x="896112" y="3337560"/>
             <a:ext cx="10454335" cy="397764"/>
           </a:xfrm>
           <a:prstGeom prst="rect">
             <a:avLst/>
           </a:prstGeom>
           <a:noFill/>
-          <a:ln/>
         </p:spPr>
         <p:txBody>
           <a:bodyPr wrap="square" rtlCol="0" anchor="t"/>
           <a:lstStyle/>
           <a:p>
-            <a:pPr algn="l" indent="0" marL="0">
+            <a:pPr marL="0" indent="0" algn="l">
               <a:lnSpc>
                 <a:spcPct val="115000"/>
               </a:lnSpc>
@@ -6240,130 +6006,61 @@
                 <a:solidFill>
                   <a:srgbClr val="1F4E9C"/>
                 </a:solidFill>
-                <a:latin typeface="微软雅黑" pitchFamily="34" charset="0"/>
-                <a:ea typeface="微软雅黑" pitchFamily="34" charset="-122"/>
-                <a:cs typeface="微软雅黑" pitchFamily="34" charset="-120"/>
+                <a:latin typeface="微软雅黑" panose="020B0503020204020204" pitchFamily="34" charset="-122"/>
+                <a:ea typeface="微软雅黑" panose="020B0503020204020204" pitchFamily="34" charset="-122"/>
+                <a:cs typeface="微软雅黑" panose="020B0503020204020204" pitchFamily="34" charset="-120"/>
               </a:rPr>
               <a:t>•  </a:t>
             </a:r>
-            <a:pPr algn="l" indent="0" marL="0">
+            <a:r>
+              <a:rPr lang="en-US" sz="1800" dirty="0">
+                <a:solidFill>
+                  <a:srgbClr val="000000"/>
+                </a:solidFill>
+              </a:rPr>
+              <a:t>用左子树结点个数把后序也切成左、右两段，递归建左右子树</a:t>
+            </a:r>
+            <a:endParaRPr lang="en-US" sz="1800" dirty="0"/>
+          </a:p>
+        </p:txBody>
+      </p:sp>
+      <p:sp>
+        <p:nvSpPr>
+          <p:cNvPr id="8" name="Text 6"/>
+          <p:cNvSpPr/>
+          <p:nvPr/>
+        </p:nvSpPr>
+        <p:spPr>
+          <a:xfrm>
+            <a:off x="896112" y="3808476"/>
+            <a:ext cx="10454335" cy="397764"/>
+          </a:xfrm>
+          <a:prstGeom prst="rect">
+            <a:avLst/>
+          </a:prstGeom>
+          <a:noFill/>
+        </p:spPr>
+        <p:txBody>
+          <a:bodyPr wrap="square" rtlCol="0" anchor="t"/>
+          <a:lstStyle/>
+          <a:p>
+            <a:pPr marL="0" indent="0" algn="l">
               <a:lnSpc>
                 <a:spcPct val="115000"/>
               </a:lnSpc>
               <a:buNone/>
             </a:pPr>
             <a:r>
-              <a:rPr lang="en-US" sz="1800" dirty="0">
-                <a:solidFill>
-                  <a:srgbClr val="000000"/>
-                </a:solidFill>
-              </a:rPr>
-              <a:t>在中序里定位这个根，左边是左子树的中序、右边是右子树的中序</a:t>
-            </a:r>
-            <a:endParaRPr lang="en-US" sz="1800" dirty="0"/>
-          </a:p>
-        </p:txBody>
-      </p:sp>
-      <p:sp>
-        <p:nvSpPr>
-          <p:cNvPr id="7" name="Text 5"/>
-          <p:cNvSpPr/>
-          <p:nvPr/>
-        </p:nvSpPr>
-        <p:spPr>
-          <a:xfrm>
-            <a:off x="896112" y="3337560"/>
-            <a:ext cx="10454335" cy="397764"/>
-          </a:xfrm>
-          <a:prstGeom prst="rect">
-            <a:avLst/>
-          </a:prstGeom>
-          <a:noFill/>
-          <a:ln/>
-        </p:spPr>
-        <p:txBody>
-          <a:bodyPr wrap="square" rtlCol="0" anchor="t"/>
-          <a:lstStyle/>
-          <a:p>
-            <a:pPr algn="l" indent="0" marL="0">
-              <a:lnSpc>
-                <a:spcPct val="115000"/>
-              </a:lnSpc>
-              <a:buNone/>
-            </a:pPr>
-            <a:r>
               <a:rPr lang="en-US" sz="1800" b="1" dirty="0">
                 <a:solidFill>
                   <a:srgbClr val="1F4E9C"/>
                 </a:solidFill>
-                <a:latin typeface="微软雅黑" pitchFamily="34" charset="0"/>
-                <a:ea typeface="微软雅黑" pitchFamily="34" charset="-122"/>
-                <a:cs typeface="微软雅黑" pitchFamily="34" charset="-120"/>
+                <a:latin typeface="微软雅黑" panose="020B0503020204020204" pitchFamily="34" charset="-122"/>
+                <a:ea typeface="微软雅黑" panose="020B0503020204020204" pitchFamily="34" charset="-122"/>
+                <a:cs typeface="微软雅黑" panose="020B0503020204020204" pitchFamily="34" charset="-120"/>
               </a:rPr>
               <a:t>•  </a:t>
             </a:r>
-            <a:pPr algn="l" indent="0" marL="0">
-              <a:lnSpc>
-                <a:spcPct val="115000"/>
-              </a:lnSpc>
-              <a:buNone/>
-            </a:pPr>
-            <a:r>
-              <a:rPr lang="en-US" sz="1800" dirty="0">
-                <a:solidFill>
-                  <a:srgbClr val="000000"/>
-                </a:solidFill>
-              </a:rPr>
-              <a:t>用左子树结点个数把后序也切成左、右两段，递归建左右子树</a:t>
-            </a:r>
-            <a:endParaRPr lang="en-US" sz="1800" dirty="0"/>
-          </a:p>
-        </p:txBody>
-      </p:sp>
-      <p:sp>
-        <p:nvSpPr>
-          <p:cNvPr id="8" name="Text 6"/>
-          <p:cNvSpPr/>
-          <p:nvPr/>
-        </p:nvSpPr>
-        <p:spPr>
-          <a:xfrm>
-            <a:off x="896112" y="3808476"/>
-            <a:ext cx="10454335" cy="397764"/>
-          </a:xfrm>
-          <a:prstGeom prst="rect">
-            <a:avLst/>
-          </a:prstGeom>
-          <a:noFill/>
-          <a:ln/>
-        </p:spPr>
-        <p:txBody>
-          <a:bodyPr wrap="square" rtlCol="0" anchor="t"/>
-          <a:lstStyle/>
-          <a:p>
-            <a:pPr algn="l" indent="0" marL="0">
-              <a:lnSpc>
-                <a:spcPct val="115000"/>
-              </a:lnSpc>
-              <a:buNone/>
-            </a:pPr>
-            <a:r>
-              <a:rPr lang="en-US" sz="1800" b="1" dirty="0">
-                <a:solidFill>
-                  <a:srgbClr val="1F4E9C"/>
-                </a:solidFill>
-                <a:latin typeface="微软雅黑" pitchFamily="34" charset="0"/>
-                <a:ea typeface="微软雅黑" pitchFamily="34" charset="-122"/>
-                <a:cs typeface="微软雅黑" pitchFamily="34" charset="-120"/>
-              </a:rPr>
-              <a:t>•  </a:t>
-            </a:r>
-            <a:pPr algn="l" indent="0" marL="0">
-              <a:lnSpc>
-                <a:spcPct val="115000"/>
-              </a:lnSpc>
-              <a:buNone/>
-            </a:pPr>
             <a:r>
               <a:rPr lang="en-US" sz="1800" dirty="0">
                 <a:solidFill>
@@ -6391,13 +6088,12 @@
             <a:avLst/>
           </a:prstGeom>
           <a:noFill/>
-          <a:ln/>
         </p:spPr>
         <p:txBody>
           <a:bodyPr wrap="square" rtlCol="0" anchor="t"/>
           <a:lstStyle/>
           <a:p>
-            <a:pPr algn="l" indent="0" marL="0">
+            <a:pPr marL="0" indent="0" algn="l">
               <a:buNone/>
             </a:pPr>
             <a:r>
@@ -6405,9 +6101,9 @@
                 <a:solidFill>
                   <a:srgbClr val="8A9099"/>
                 </a:solidFill>
-                <a:latin typeface="微软雅黑" pitchFamily="34" charset="0"/>
-                <a:ea typeface="微软雅黑" pitchFamily="34" charset="-122"/>
-                <a:cs typeface="微软雅黑" pitchFamily="34" charset="-120"/>
+                <a:latin typeface="微软雅黑" panose="020B0503020204020204" pitchFamily="34" charset="-122"/>
+                <a:ea typeface="微软雅黑" panose="020B0503020204020204" pitchFamily="34" charset="-122"/>
+                <a:cs typeface="微软雅黑" panose="020B0503020204020204" pitchFamily="34" charset="-120"/>
               </a:rPr>
               <a:t>先序定根看第一个、后序定根看最后一个，但必须配上中序才能分清左右子树；能唯一确定一棵树的是先序+中序、后序+中序、层序+中序，唯独先序+后序不行（分不清某结点是左还是右）</a:t>
             </a:r>
@@ -6425,7 +6121,7 @@
 
 <file path=ppt/slides/slide2.xml><?xml version="1.0" encoding="utf-8"?>
 <p:sld xmlns:a="http://schemas.openxmlformats.org/drawingml/2006/main" xmlns:r="http://schemas.openxmlformats.org/officeDocument/2006/relationships" xmlns:p="http://schemas.openxmlformats.org/presentationml/2006/main">
-  <p:cSld name="Slide 2">
+  <p:cSld>
     <p:bg>
       <p:bgPr>
         <a:blipFill dpi="0" rotWithShape="1">
@@ -6469,13 +6165,12 @@
             <a:avLst/>
           </a:prstGeom>
           <a:noFill/>
-          <a:ln/>
         </p:spPr>
         <p:txBody>
           <a:bodyPr wrap="square" rtlCol="0" anchor="ctr"/>
           <a:lstStyle/>
           <a:p>
-            <a:pPr algn="r" indent="0" marL="0">
+            <a:pPr marL="0" indent="0" algn="r">
               <a:buNone/>
             </a:pPr>
             <a:r>
@@ -6483,9 +6178,9 @@
                 <a:solidFill>
                   <a:srgbClr val="8A9099"/>
                 </a:solidFill>
-                <a:latin typeface="微软雅黑" pitchFamily="34" charset="0"/>
-                <a:ea typeface="微软雅黑" pitchFamily="34" charset="-122"/>
-                <a:cs typeface="微软雅黑" pitchFamily="34" charset="-120"/>
+                <a:latin typeface="微软雅黑" panose="020B0503020204020204" pitchFamily="34" charset="-122"/>
+                <a:ea typeface="微软雅黑" panose="020B0503020204020204" pitchFamily="34" charset="-122"/>
+                <a:cs typeface="微软雅黑" panose="020B0503020204020204" pitchFamily="34" charset="-120"/>
               </a:rPr>
               <a:t>2 / 17</a:t>
             </a:r>
@@ -6508,13 +6203,12 @@
             <a:avLst/>
           </a:prstGeom>
           <a:noFill/>
-          <a:ln/>
         </p:spPr>
         <p:txBody>
           <a:bodyPr wrap="square" rtlCol="0" anchor="ctr"/>
           <a:lstStyle/>
           <a:p>
-            <a:pPr algn="l" indent="0" marL="0">
+            <a:pPr marL="0" indent="0" algn="l">
               <a:buNone/>
             </a:pPr>
             <a:r>
@@ -6522,9 +6216,9 @@
                 <a:solidFill>
                   <a:srgbClr val="1F4E9C"/>
                 </a:solidFill>
-                <a:latin typeface="微软雅黑" pitchFamily="34" charset="0"/>
-                <a:ea typeface="微软雅黑" pitchFamily="34" charset="-122"/>
-                <a:cs typeface="微软雅黑" pitchFamily="34" charset="-120"/>
+                <a:latin typeface="微软雅黑" panose="020B0503020204020204" pitchFamily="34" charset="-122"/>
+                <a:ea typeface="微软雅黑" panose="020B0503020204020204" pitchFamily="34" charset="-122"/>
+                <a:cs typeface="微软雅黑" panose="020B0503020204020204" pitchFamily="34" charset="-120"/>
               </a:rPr>
               <a:t>引题</a:t>
             </a:r>
@@ -6547,13 +6241,12 @@
             <a:avLst/>
           </a:prstGeom>
           <a:noFill/>
-          <a:ln/>
         </p:spPr>
         <p:txBody>
           <a:bodyPr wrap="square" rtlCol="0" anchor="ctr"/>
           <a:lstStyle/>
           <a:p>
-            <a:pPr algn="l" indent="0" marL="0">
+            <a:pPr marL="0" indent="0" algn="l">
               <a:buNone/>
             </a:pPr>
             <a:r>
@@ -6561,9 +6254,9 @@
                 <a:solidFill>
                   <a:srgbClr val="1F2329"/>
                 </a:solidFill>
-                <a:latin typeface="微软雅黑" pitchFamily="34" charset="0"/>
-                <a:ea typeface="微软雅黑" pitchFamily="34" charset="-122"/>
-                <a:cs typeface="微软雅黑" pitchFamily="34" charset="-120"/>
+                <a:latin typeface="微软雅黑" panose="020B0503020204020204" pitchFamily="34" charset="-122"/>
+                <a:ea typeface="微软雅黑" panose="020B0503020204020204" pitchFamily="34" charset="-122"/>
+                <a:cs typeface="微软雅黑" panose="020B0503020204020204" pitchFamily="34" charset="-120"/>
               </a:rPr>
               <a:t>二叉树为什么不用数组存</a:t>
             </a:r>
@@ -6586,13 +6279,12 @@
             <a:avLst/>
           </a:prstGeom>
           <a:noFill/>
-          <a:ln/>
         </p:spPr>
         <p:txBody>
           <a:bodyPr wrap="square" rtlCol="0" anchor="t"/>
           <a:lstStyle/>
           <a:p>
-            <a:pPr algn="l" indent="0" marL="0">
+            <a:pPr marL="0" indent="0" algn="l">
               <a:lnSpc>
                 <a:spcPct val="115000"/>
               </a:lnSpc>
@@ -6603,25 +6295,68 @@
                 <a:solidFill>
                   <a:srgbClr val="1F4E9C"/>
                 </a:solidFill>
-                <a:latin typeface="微软雅黑" pitchFamily="34" charset="0"/>
-                <a:ea typeface="微软雅黑" pitchFamily="34" charset="-122"/>
-                <a:cs typeface="微软雅黑" pitchFamily="34" charset="-120"/>
+                <a:latin typeface="微软雅黑" panose="020B0503020204020204" pitchFamily="34" charset="-122"/>
+                <a:ea typeface="微软雅黑" panose="020B0503020204020204" pitchFamily="34" charset="-122"/>
+                <a:cs typeface="微软雅黑" panose="020B0503020204020204" pitchFamily="34" charset="-120"/>
               </a:rPr>
               <a:t>•  </a:t>
             </a:r>
-            <a:pPr algn="l" indent="0" marL="0">
+            <a:r>
+              <a:rPr lang="en-US" sz="1800" dirty="0">
+                <a:solidFill>
+                  <a:srgbClr val="000000"/>
+                </a:solidFill>
+              </a:rPr>
+              <a:t>完全二叉树、满二叉树可以用数组存：结点 i 的左右孩子固定在 2i、2i+1，不浪费</a:t>
+            </a:r>
+            <a:endParaRPr lang="en-US" sz="1800" dirty="0"/>
+          </a:p>
+        </p:txBody>
+      </p:sp>
+      <p:sp>
+        <p:nvSpPr>
+          <p:cNvPr id="6" name="Text 4"/>
+          <p:cNvSpPr/>
+          <p:nvPr/>
+        </p:nvSpPr>
+        <p:spPr>
+          <a:xfrm>
+            <a:off x="896112" y="3209544"/>
+            <a:ext cx="10454335" cy="397764"/>
+          </a:xfrm>
+          <a:prstGeom prst="rect">
+            <a:avLst/>
+          </a:prstGeom>
+          <a:noFill/>
+        </p:spPr>
+        <p:txBody>
+          <a:bodyPr wrap="square" rtlCol="0" anchor="t"/>
+          <a:lstStyle/>
+          <a:p>
+            <a:pPr marL="0" indent="0" algn="l">
               <a:lnSpc>
                 <a:spcPct val="115000"/>
               </a:lnSpc>
               <a:buNone/>
             </a:pPr>
             <a:r>
+              <a:rPr lang="en-US" sz="1800" b="1" dirty="0">
+                <a:solidFill>
+                  <a:srgbClr val="1F4E9C"/>
+                </a:solidFill>
+                <a:latin typeface="微软雅黑" panose="020B0503020204020204" pitchFamily="34" charset="-122"/>
+                <a:ea typeface="微软雅黑" panose="020B0503020204020204" pitchFamily="34" charset="-122"/>
+                <a:cs typeface="微软雅黑" panose="020B0503020204020204" pitchFamily="34" charset="-120"/>
+              </a:rPr>
+              <a:t>•  </a:t>
+            </a:r>
+            <a:r>
               <a:rPr lang="en-US" sz="1800" dirty="0">
                 <a:solidFill>
                   <a:srgbClr val="000000"/>
                 </a:solidFill>
               </a:rPr>
-              <a:t>完全二叉树、满二叉树可以用数组存：结点 i 的左右孩子固定在 2i、2i+1，不浪费</a:t>
+              <a:t>但一般二叉树形态千奇百怪，斜树、缺枝少叶，用数组要补大量空位，浪费严重</a:t>
             </a:r>
             <a:endParaRPr lang="en-US" sz="1800" dirty="0"/>
           </a:p>
@@ -6629,26 +6364,25 @@
       </p:sp>
       <p:sp>
         <p:nvSpPr>
-          <p:cNvPr id="6" name="Text 4"/>
-          <p:cNvSpPr/>
-          <p:nvPr/>
-        </p:nvSpPr>
-        <p:spPr>
-          <a:xfrm>
-            <a:off x="896112" y="3209544"/>
+          <p:cNvPr id="7" name="Text 5"/>
+          <p:cNvSpPr/>
+          <p:nvPr/>
+        </p:nvSpPr>
+        <p:spPr>
+          <a:xfrm>
+            <a:off x="896112" y="3680460"/>
             <a:ext cx="10454335" cy="397764"/>
           </a:xfrm>
           <a:prstGeom prst="rect">
             <a:avLst/>
           </a:prstGeom>
           <a:noFill/>
-          <a:ln/>
         </p:spPr>
         <p:txBody>
           <a:bodyPr wrap="square" rtlCol="0" anchor="t"/>
           <a:lstStyle/>
           <a:p>
-            <a:pPr algn="l" indent="0" marL="0">
+            <a:pPr marL="0" indent="0" algn="l">
               <a:lnSpc>
                 <a:spcPct val="115000"/>
               </a:lnSpc>
@@ -6659,74 +6393,12 @@
                 <a:solidFill>
                   <a:srgbClr val="1F4E9C"/>
                 </a:solidFill>
-                <a:latin typeface="微软雅黑" pitchFamily="34" charset="0"/>
-                <a:ea typeface="微软雅黑" pitchFamily="34" charset="-122"/>
-                <a:cs typeface="微软雅黑" pitchFamily="34" charset="-120"/>
+                <a:latin typeface="微软雅黑" panose="020B0503020204020204" pitchFamily="34" charset="-122"/>
+                <a:ea typeface="微软雅黑" panose="020B0503020204020204" pitchFamily="34" charset="-122"/>
+                <a:cs typeface="微软雅黑" panose="020B0503020204020204" pitchFamily="34" charset="-120"/>
               </a:rPr>
               <a:t>•  </a:t>
             </a:r>
-            <a:pPr algn="l" indent="0" marL="0">
-              <a:lnSpc>
-                <a:spcPct val="115000"/>
-              </a:lnSpc>
-              <a:buNone/>
-            </a:pPr>
-            <a:r>
-              <a:rPr lang="en-US" sz="1800" dirty="0">
-                <a:solidFill>
-                  <a:srgbClr val="000000"/>
-                </a:solidFill>
-              </a:rPr>
-              <a:t>但一般二叉树形态千奇百怪，斜树、缺枝少叶，用数组要补大量空位，浪费严重</a:t>
-            </a:r>
-            <a:endParaRPr lang="en-US" sz="1800" dirty="0"/>
-          </a:p>
-        </p:txBody>
-      </p:sp>
-      <p:sp>
-        <p:nvSpPr>
-          <p:cNvPr id="7" name="Text 5"/>
-          <p:cNvSpPr/>
-          <p:nvPr/>
-        </p:nvSpPr>
-        <p:spPr>
-          <a:xfrm>
-            <a:off x="896112" y="3680460"/>
-            <a:ext cx="10454335" cy="397764"/>
-          </a:xfrm>
-          <a:prstGeom prst="rect">
-            <a:avLst/>
-          </a:prstGeom>
-          <a:noFill/>
-          <a:ln/>
-        </p:spPr>
-        <p:txBody>
-          <a:bodyPr wrap="square" rtlCol="0" anchor="t"/>
-          <a:lstStyle/>
-          <a:p>
-            <a:pPr algn="l" indent="0" marL="0">
-              <a:lnSpc>
-                <a:spcPct val="115000"/>
-              </a:lnSpc>
-              <a:buNone/>
-            </a:pPr>
-            <a:r>
-              <a:rPr lang="en-US" sz="1800" b="1" dirty="0">
-                <a:solidFill>
-                  <a:srgbClr val="1F4E9C"/>
-                </a:solidFill>
-                <a:latin typeface="微软雅黑" pitchFamily="34" charset="0"/>
-                <a:ea typeface="微软雅黑" pitchFamily="34" charset="-122"/>
-                <a:cs typeface="微软雅黑" pitchFamily="34" charset="-120"/>
-              </a:rPr>
-              <a:t>•  </a:t>
-            </a:r>
-            <a:pPr algn="l" indent="0" marL="0">
-              <a:lnSpc>
-                <a:spcPct val="115000"/>
-              </a:lnSpc>
-              <a:buNone/>
-            </a:pPr>
             <a:r>
               <a:rPr lang="en-US" sz="1800" dirty="0">
                 <a:solidFill>
@@ -6754,13 +6426,12 @@
             <a:avLst/>
           </a:prstGeom>
           <a:noFill/>
-          <a:ln/>
         </p:spPr>
         <p:txBody>
           <a:bodyPr wrap="square" rtlCol="0" anchor="t"/>
           <a:lstStyle/>
           <a:p>
-            <a:pPr algn="l" indent="0" marL="0">
+            <a:pPr marL="0" indent="0" algn="l">
               <a:buNone/>
             </a:pPr>
             <a:r>
@@ -6768,9 +6439,9 @@
                 <a:solidFill>
                   <a:srgbClr val="8A9099"/>
                 </a:solidFill>
-                <a:latin typeface="微软雅黑" pitchFamily="34" charset="0"/>
-                <a:ea typeface="微软雅黑" pitchFamily="34" charset="-122"/>
-                <a:cs typeface="微软雅黑" pitchFamily="34" charset="-120"/>
+                <a:latin typeface="微软雅黑" panose="020B0503020204020204" pitchFamily="34" charset="-122"/>
+                <a:ea typeface="微软雅黑" panose="020B0503020204020204" pitchFamily="34" charset="-122"/>
+                <a:cs typeface="微软雅黑" panose="020B0503020204020204" pitchFamily="34" charset="-120"/>
               </a:rPr>
               <a:t>遍历是二叉树全部算法的基础，强化阶段十个树算法都建在'能走一遍这棵树'上，所以这一节把四种遍历讲到位</a:t>
             </a:r>
@@ -6788,7 +6459,7 @@
 
 <file path=ppt/slides/slide3.xml><?xml version="1.0" encoding="utf-8"?>
 <p:sld xmlns:a="http://schemas.openxmlformats.org/drawingml/2006/main" xmlns:r="http://schemas.openxmlformats.org/officeDocument/2006/relationships" xmlns:p="http://schemas.openxmlformats.org/presentationml/2006/main">
-  <p:cSld name="Slide 3">
+  <p:cSld>
     <p:bg>
       <p:bgPr>
         <a:blipFill dpi="0" rotWithShape="1">
@@ -6832,13 +6503,12 @@
             <a:avLst/>
           </a:prstGeom>
           <a:noFill/>
-          <a:ln/>
         </p:spPr>
         <p:txBody>
           <a:bodyPr wrap="square" rtlCol="0" anchor="ctr"/>
           <a:lstStyle/>
           <a:p>
-            <a:pPr algn="r" indent="0" marL="0">
+            <a:pPr marL="0" indent="0" algn="r">
               <a:buNone/>
             </a:pPr>
             <a:r>
@@ -6846,9 +6516,9 @@
                 <a:solidFill>
                   <a:srgbClr val="8A9099"/>
                 </a:solidFill>
-                <a:latin typeface="微软雅黑" pitchFamily="34" charset="0"/>
-                <a:ea typeface="微软雅黑" pitchFamily="34" charset="-122"/>
-                <a:cs typeface="微软雅黑" pitchFamily="34" charset="-120"/>
+                <a:latin typeface="微软雅黑" panose="020B0503020204020204" pitchFamily="34" charset="-122"/>
+                <a:ea typeface="微软雅黑" panose="020B0503020204020204" pitchFamily="34" charset="-122"/>
+                <a:cs typeface="微软雅黑" panose="020B0503020204020204" pitchFamily="34" charset="-120"/>
               </a:rPr>
               <a:t>3 / 17</a:t>
             </a:r>
@@ -6871,13 +6541,12 @@
             <a:avLst/>
           </a:prstGeom>
           <a:noFill/>
-          <a:ln/>
         </p:spPr>
         <p:txBody>
           <a:bodyPr wrap="square" rtlCol="0" anchor="ctr"/>
           <a:lstStyle/>
           <a:p>
-            <a:pPr algn="l" indent="0" marL="0">
+            <a:pPr marL="0" indent="0" algn="l">
               <a:buNone/>
             </a:pPr>
             <a:r>
@@ -6885,9 +6554,9 @@
                 <a:solidFill>
                   <a:srgbClr val="1F4E9C"/>
                 </a:solidFill>
-                <a:latin typeface="微软雅黑" pitchFamily="34" charset="0"/>
-                <a:ea typeface="微软雅黑" pitchFamily="34" charset="-122"/>
-                <a:cs typeface="微软雅黑" pitchFamily="34" charset="-120"/>
+                <a:latin typeface="微软雅黑" panose="020B0503020204020204" pitchFamily="34" charset="-122"/>
+                <a:ea typeface="微软雅黑" panose="020B0503020204020204" pitchFamily="34" charset="-122"/>
+                <a:cs typeface="微软雅黑" panose="020B0503020204020204" pitchFamily="34" charset="-120"/>
               </a:rPr>
               <a:t>存储结构</a:t>
             </a:r>
@@ -6910,13 +6579,12 @@
             <a:avLst/>
           </a:prstGeom>
           <a:noFill/>
-          <a:ln/>
         </p:spPr>
         <p:txBody>
           <a:bodyPr wrap="square" rtlCol="0" anchor="ctr"/>
           <a:lstStyle/>
           <a:p>
-            <a:pPr algn="l" indent="0" marL="0">
+            <a:pPr marL="0" indent="0" algn="l">
               <a:buNone/>
             </a:pPr>
             <a:r>
@@ -6924,9 +6592,9 @@
                 <a:solidFill>
                   <a:srgbClr val="1F2329"/>
                 </a:solidFill>
-                <a:latin typeface="微软雅黑" pitchFamily="34" charset="0"/>
-                <a:ea typeface="微软雅黑" pitchFamily="34" charset="-122"/>
-                <a:cs typeface="微软雅黑" pitchFamily="34" charset="-120"/>
+                <a:latin typeface="微软雅黑" panose="020B0503020204020204" pitchFamily="34" charset="-122"/>
+                <a:ea typeface="微软雅黑" panose="020B0503020204020204" pitchFamily="34" charset="-122"/>
+                <a:cs typeface="微软雅黑" panose="020B0503020204020204" pitchFamily="34" charset="-120"/>
               </a:rPr>
               <a:t>二叉链表与孩子兄弟链表</a:t>
             </a:r>
@@ -6951,7 +6619,6 @@
           <a:solidFill>
             <a:srgbClr val="F7F9FC"/>
           </a:solidFill>
-          <a:ln/>
         </p:spPr>
       </p:sp>
       <p:sp>
@@ -6971,7 +6638,6 @@
           <a:solidFill>
             <a:srgbClr val="1F4E9C"/>
           </a:solidFill>
-          <a:ln/>
         </p:spPr>
       </p:sp>
       <p:sp>
@@ -6989,13 +6655,12 @@
             <a:avLst/>
           </a:prstGeom>
           <a:noFill/>
-          <a:ln/>
         </p:spPr>
         <p:txBody>
           <a:bodyPr wrap="square" rtlCol="0" anchor="t"/>
           <a:lstStyle/>
           <a:p>
-            <a:pPr algn="l" indent="0" marL="0">
+            <a:pPr marL="0" indent="0" algn="l">
               <a:lnSpc>
                 <a:spcPct val="125000"/>
               </a:lnSpc>
@@ -7006,9 +6671,9 @@
                 <a:solidFill>
                   <a:srgbClr val="1F2329"/>
                 </a:solidFill>
-                <a:latin typeface="Consolas" pitchFamily="34" charset="0"/>
-                <a:ea typeface="Consolas" pitchFamily="34" charset="-122"/>
-                <a:cs typeface="Consolas" pitchFamily="34" charset="-120"/>
+                <a:latin typeface="Consolas" panose="020B0609020204030204" pitchFamily="34" charset="0"/>
+                <a:ea typeface="Consolas" panose="020B0609020204030204" pitchFamily="34" charset="-122"/>
+                <a:cs typeface="Consolas" panose="020B0609020204030204" pitchFamily="34" charset="-120"/>
               </a:rPr>
               <a:t>typedef struct BiTNode{
     ElemType data;
@@ -7039,13 +6704,12 @@
             <a:avLst/>
           </a:prstGeom>
           <a:noFill/>
-          <a:ln/>
         </p:spPr>
         <p:txBody>
           <a:bodyPr wrap="square" rtlCol="0" anchor="t"/>
           <a:lstStyle/>
           <a:p>
-            <a:pPr algn="l" indent="0" marL="0">
+            <a:pPr marL="0" indent="0" algn="l">
               <a:buNone/>
             </a:pPr>
             <a:r>
@@ -7053,9 +6717,9 @@
                 <a:solidFill>
                   <a:srgbClr val="8A9099"/>
                 </a:solidFill>
-                <a:latin typeface="微软雅黑" pitchFamily="34" charset="0"/>
-                <a:ea typeface="微软雅黑" pitchFamily="34" charset="-122"/>
-                <a:cs typeface="微软雅黑" pitchFamily="34" charset="-120"/>
+                <a:latin typeface="微软雅黑" panose="020B0503020204020204" pitchFamily="34" charset="-122"/>
+                <a:ea typeface="微软雅黑" panose="020B0503020204020204" pitchFamily="34" charset="-122"/>
+                <a:cs typeface="微软雅黑" panose="020B0503020204020204" pitchFamily="34" charset="-120"/>
               </a:rPr>
               <a:t>BiTree 是指向结点的指针，代表一棵树；孩子兄弟链表是把一般的树存成二叉树的办法，下一节展开，这里先认定义</a:t>
             </a:r>
@@ -7073,7 +6737,7 @@
 
 <file path=ppt/slides/slide4.xml><?xml version="1.0" encoding="utf-8"?>
 <p:sld xmlns:a="http://schemas.openxmlformats.org/drawingml/2006/main" xmlns:r="http://schemas.openxmlformats.org/officeDocument/2006/relationships" xmlns:p="http://schemas.openxmlformats.org/presentationml/2006/main">
-  <p:cSld name="Slide 4">
+  <p:cSld>
     <p:bg>
       <p:bgPr>
         <a:blipFill dpi="0" rotWithShape="1">
@@ -7117,13 +6781,12 @@
             <a:avLst/>
           </a:prstGeom>
           <a:noFill/>
-          <a:ln/>
         </p:spPr>
         <p:txBody>
           <a:bodyPr wrap="square" rtlCol="0" anchor="ctr"/>
           <a:lstStyle/>
           <a:p>
-            <a:pPr algn="r" indent="0" marL="0">
+            <a:pPr marL="0" indent="0" algn="r">
               <a:buNone/>
             </a:pPr>
             <a:r>
@@ -7131,9 +6794,9 @@
                 <a:solidFill>
                   <a:srgbClr val="8A9099"/>
                 </a:solidFill>
-                <a:latin typeface="微软雅黑" pitchFamily="34" charset="0"/>
-                <a:ea typeface="微软雅黑" pitchFamily="34" charset="-122"/>
-                <a:cs typeface="微软雅黑" pitchFamily="34" charset="-120"/>
+                <a:latin typeface="微软雅黑" panose="020B0503020204020204" pitchFamily="34" charset="-122"/>
+                <a:ea typeface="微软雅黑" panose="020B0503020204020204" pitchFamily="34" charset="-122"/>
+                <a:cs typeface="微软雅黑" panose="020B0503020204020204" pitchFamily="34" charset="-120"/>
               </a:rPr>
               <a:t>4 / 17</a:t>
             </a:r>
@@ -7156,13 +6819,12 @@
             <a:avLst/>
           </a:prstGeom>
           <a:noFill/>
-          <a:ln/>
         </p:spPr>
         <p:txBody>
           <a:bodyPr wrap="square" rtlCol="0" anchor="ctr"/>
           <a:lstStyle/>
           <a:p>
-            <a:pPr algn="l" indent="0" marL="0">
+            <a:pPr marL="0" indent="0" algn="l">
               <a:buNone/>
             </a:pPr>
             <a:r>
@@ -7170,9 +6832,9 @@
                 <a:solidFill>
                   <a:srgbClr val="1F4E9C"/>
                 </a:solidFill>
-                <a:latin typeface="微软雅黑" pitchFamily="34" charset="0"/>
-                <a:ea typeface="微软雅黑" pitchFamily="34" charset="-122"/>
-                <a:cs typeface="微软雅黑" pitchFamily="34" charset="-120"/>
+                <a:latin typeface="微软雅黑" panose="020B0503020204020204" pitchFamily="34" charset="-122"/>
+                <a:ea typeface="微软雅黑" panose="020B0503020204020204" pitchFamily="34" charset="-122"/>
+                <a:cs typeface="微软雅黑" panose="020B0503020204020204" pitchFamily="34" charset="-120"/>
               </a:rPr>
               <a:t>递归遍历</a:t>
             </a:r>
@@ -7195,13 +6857,12 @@
             <a:avLst/>
           </a:prstGeom>
           <a:noFill/>
-          <a:ln/>
         </p:spPr>
         <p:txBody>
           <a:bodyPr wrap="square" rtlCol="0" anchor="ctr"/>
           <a:lstStyle/>
           <a:p>
-            <a:pPr algn="l" indent="0" marL="0">
+            <a:pPr marL="0" indent="0" algn="l">
               <a:buNone/>
             </a:pPr>
             <a:r>
@@ -7209,9 +6870,9 @@
                 <a:solidFill>
                   <a:srgbClr val="1F2329"/>
                 </a:solidFill>
-                <a:latin typeface="微软雅黑" pitchFamily="34" charset="0"/>
-                <a:ea typeface="微软雅黑" pitchFamily="34" charset="-122"/>
-                <a:cs typeface="微软雅黑" pitchFamily="34" charset="-120"/>
+                <a:latin typeface="微软雅黑" panose="020B0503020204020204" pitchFamily="34" charset="-122"/>
+                <a:ea typeface="微软雅黑" panose="020B0503020204020204" pitchFamily="34" charset="-122"/>
+                <a:cs typeface="微软雅黑" panose="020B0503020204020204" pitchFamily="34" charset="-120"/>
               </a:rPr>
               <a:t>三种递归遍历：只是 visit 的位置不同</a:t>
             </a:r>
@@ -7236,7 +6897,6 @@
           <a:solidFill>
             <a:srgbClr val="F7F9FC"/>
           </a:solidFill>
-          <a:ln/>
         </p:spPr>
       </p:sp>
       <p:sp>
@@ -7256,7 +6916,6 @@
           <a:solidFill>
             <a:srgbClr val="1F4E9C"/>
           </a:solidFill>
-          <a:ln/>
         </p:spPr>
       </p:sp>
       <p:sp>
@@ -7274,13 +6933,12 @@
             <a:avLst/>
           </a:prstGeom>
           <a:noFill/>
-          <a:ln/>
         </p:spPr>
         <p:txBody>
           <a:bodyPr wrap="square" rtlCol="0" anchor="t"/>
           <a:lstStyle/>
           <a:p>
-            <a:pPr algn="l" indent="0" marL="0">
+            <a:pPr marL="0" indent="0" algn="l">
               <a:lnSpc>
                 <a:spcPct val="125000"/>
               </a:lnSpc>
@@ -7291,9 +6949,9 @@
                 <a:solidFill>
                   <a:srgbClr val="1F2329"/>
                 </a:solidFill>
-                <a:latin typeface="Consolas" pitchFamily="34" charset="0"/>
-                <a:ea typeface="Consolas" pitchFamily="34" charset="-122"/>
-                <a:cs typeface="Consolas" pitchFamily="34" charset="-120"/>
+                <a:latin typeface="Consolas" panose="020B0609020204030204" pitchFamily="34" charset="0"/>
+                <a:ea typeface="Consolas" panose="020B0609020204030204" pitchFamily="34" charset="-122"/>
+                <a:cs typeface="Consolas" panose="020B0609020204030204" pitchFamily="34" charset="-120"/>
               </a:rPr>
               <a:t>void PreOrder(BiTree T){ if(T==NULL) return;
     visit(T); PreOrder(T-&gt;lchild); PreOrder(T-&gt;rchild); }   // 先序：根 左 右
@@ -7322,13 +6980,12 @@
             <a:avLst/>
           </a:prstGeom>
           <a:noFill/>
-          <a:ln/>
         </p:spPr>
         <p:txBody>
           <a:bodyPr wrap="square" rtlCol="0" anchor="t"/>
           <a:lstStyle/>
           <a:p>
-            <a:pPr algn="l" indent="0" marL="0">
+            <a:pPr marL="0" indent="0" algn="l">
               <a:buNone/>
             </a:pPr>
             <a:r>
@@ -7336,9 +6993,9 @@
                 <a:solidFill>
                   <a:srgbClr val="8A9099"/>
                 </a:solidFill>
-                <a:latin typeface="微软雅黑" pitchFamily="34" charset="0"/>
-                <a:ea typeface="微软雅黑" pitchFamily="34" charset="-122"/>
-                <a:cs typeface="微软雅黑" pitchFamily="34" charset="-120"/>
+                <a:latin typeface="微软雅黑" panose="020B0503020204020204" pitchFamily="34" charset="-122"/>
+                <a:ea typeface="微软雅黑" panose="020B0503020204020204" pitchFamily="34" charset="-122"/>
+                <a:cs typeface="微软雅黑" panose="020B0503020204020204" pitchFamily="34" charset="-120"/>
               </a:rPr>
               <a:t>三个函数摆一起你就看懂了：递归框架完全一样，只有 visit(T) 的位置在动——这就是遍历方式的全部区别</a:t>
             </a:r>
@@ -7356,7 +7013,7 @@
 
 <file path=ppt/slides/slide5.xml><?xml version="1.0" encoding="utf-8"?>
 <p:sld xmlns:a="http://schemas.openxmlformats.org/drawingml/2006/main" xmlns:r="http://schemas.openxmlformats.org/officeDocument/2006/relationships" xmlns:p="http://schemas.openxmlformats.org/presentationml/2006/main">
-  <p:cSld name="Slide 5">
+  <p:cSld>
     <p:bg>
       <p:bgPr>
         <a:blipFill dpi="0" rotWithShape="1">
@@ -7400,13 +7057,12 @@
             <a:avLst/>
           </a:prstGeom>
           <a:noFill/>
-          <a:ln/>
         </p:spPr>
         <p:txBody>
           <a:bodyPr wrap="square" rtlCol="0" anchor="ctr"/>
           <a:lstStyle/>
           <a:p>
-            <a:pPr algn="r" indent="0" marL="0">
+            <a:pPr marL="0" indent="0" algn="r">
               <a:buNone/>
             </a:pPr>
             <a:r>
@@ -7414,9 +7070,9 @@
                 <a:solidFill>
                   <a:srgbClr val="8A9099"/>
                 </a:solidFill>
-                <a:latin typeface="微软雅黑" pitchFamily="34" charset="0"/>
-                <a:ea typeface="微软雅黑" pitchFamily="34" charset="-122"/>
-                <a:cs typeface="微软雅黑" pitchFamily="34" charset="-120"/>
+                <a:latin typeface="微软雅黑" panose="020B0503020204020204" pitchFamily="34" charset="-122"/>
+                <a:ea typeface="微软雅黑" panose="020B0503020204020204" pitchFamily="34" charset="-122"/>
+                <a:cs typeface="微软雅黑" panose="020B0503020204020204" pitchFamily="34" charset="-120"/>
               </a:rPr>
               <a:t>5 / 17</a:t>
             </a:r>
@@ -7439,13 +7095,12 @@
             <a:avLst/>
           </a:prstGeom>
           <a:noFill/>
-          <a:ln/>
         </p:spPr>
         <p:txBody>
           <a:bodyPr wrap="square" rtlCol="0" anchor="ctr"/>
           <a:lstStyle/>
           <a:p>
-            <a:pPr algn="l" indent="0" marL="0">
+            <a:pPr marL="0" indent="0" algn="l">
               <a:buNone/>
             </a:pPr>
             <a:r>
@@ -7453,9 +7108,9 @@
                 <a:solidFill>
                   <a:srgbClr val="1F4E9C"/>
                 </a:solidFill>
-                <a:latin typeface="微软雅黑" pitchFamily="34" charset="0"/>
-                <a:ea typeface="微软雅黑" pitchFamily="34" charset="-122"/>
-                <a:cs typeface="微软雅黑" pitchFamily="34" charset="-120"/>
+                <a:latin typeface="微软雅黑" panose="020B0503020204020204" pitchFamily="34" charset="-122"/>
+                <a:ea typeface="微软雅黑" panose="020B0503020204020204" pitchFamily="34" charset="-122"/>
+                <a:cs typeface="微软雅黑" panose="020B0503020204020204" pitchFamily="34" charset="-120"/>
               </a:rPr>
               <a:t>递归遍历 · 检查页</a:t>
             </a:r>
@@ -7478,13 +7133,12 @@
             <a:avLst/>
           </a:prstGeom>
           <a:noFill/>
-          <a:ln/>
         </p:spPr>
         <p:txBody>
           <a:bodyPr wrap="square" rtlCol="0" anchor="ctr"/>
           <a:lstStyle/>
           <a:p>
-            <a:pPr algn="l" indent="0" marL="0">
+            <a:pPr marL="0" indent="0" algn="l">
               <a:buNone/>
             </a:pPr>
             <a:r>
@@ -7492,9 +7146,9 @@
                 <a:solidFill>
                   <a:srgbClr val="1F2329"/>
                 </a:solidFill>
-                <a:latin typeface="微软雅黑" pitchFamily="34" charset="0"/>
-                <a:ea typeface="微软雅黑" pitchFamily="34" charset="-122"/>
-                <a:cs typeface="微软雅黑" pitchFamily="34" charset="-120"/>
+                <a:latin typeface="微软雅黑" panose="020B0503020204020204" pitchFamily="34" charset="-122"/>
+                <a:ea typeface="微软雅黑" panose="020B0503020204020204" pitchFamily="34" charset="-122"/>
+                <a:cs typeface="微软雅黑" panose="020B0503020204020204" pitchFamily="34" charset="-120"/>
               </a:rPr>
               <a:t>这棵树的三种序列，先自己写（拿纸画）</a:t>
             </a:r>
@@ -7504,7 +7158,7 @@
       </p:sp>
       <p:pic>
         <p:nvPicPr>
-          <p:cNvPr id="5" name="Image 0" descr="D:\Program Project\SpecialtyCourses\assets\diagrams\a7-tree.png">    </p:cNvPr>
+          <p:cNvPr id="5" name="Image 0" descr="D:\Program Project\SpecialtyCourses\assets\diagrams\a7-tree.png"/>
           <p:cNvPicPr>
             <a:picLocks noChangeAspect="1"/>
           </p:cNvPicPr>
@@ -7512,8 +7166,10 @@
         </p:nvPicPr>
         <p:blipFill>
           <a:blip r:embed="rId2"/>
-          <a:srcRect l="0" r="0" t="0" b="0"/>
-          <a:stretch/>
+          <a:srcRect/>
+          <a:stretch>
+            <a:fillRect/>
+          </a:stretch>
         </p:blipFill>
         <p:spPr>
           <a:xfrm>
@@ -7540,13 +7196,12 @@
             <a:avLst/>
           </a:prstGeom>
           <a:noFill/>
-          <a:ln/>
         </p:spPr>
         <p:txBody>
           <a:bodyPr wrap="square" rtlCol="0" anchor="t"/>
           <a:lstStyle/>
           <a:p>
-            <a:pPr algn="l" indent="0" marL="0">
+            <a:pPr marL="0" indent="0" algn="l">
               <a:buNone/>
             </a:pPr>
             <a:r>
@@ -7569,20 +7224,19 @@
         </p:nvSpPr>
         <p:spPr>
           <a:xfrm>
-            <a:off x="896112" y="5241036"/>
-            <a:ext cx="10454335" cy="321564"/>
-          </a:xfrm>
-          <a:prstGeom prst="rect">
-            <a:avLst/>
-          </a:prstGeom>
-          <a:noFill/>
-          <a:ln/>
+            <a:off x="895985" y="5241290"/>
+            <a:ext cx="2625725" cy="321310"/>
+          </a:xfrm>
+          <a:prstGeom prst="rect">
+            <a:avLst/>
+          </a:prstGeom>
+          <a:noFill/>
         </p:spPr>
         <p:txBody>
           <a:bodyPr wrap="square" rtlCol="0" anchor="t"/>
           <a:lstStyle/>
           <a:p>
-            <a:pPr algn="l" indent="0" marL="0">
+            <a:pPr marL="0" indent="0" algn="l">
               <a:lnSpc>
                 <a:spcPct val="115000"/>
               </a:lnSpc>
@@ -7593,25 +7247,68 @@
                 <a:solidFill>
                   <a:srgbClr val="1F4E9C"/>
                 </a:solidFill>
-                <a:latin typeface="微软雅黑" pitchFamily="34" charset="0"/>
-                <a:ea typeface="微软雅黑" pitchFamily="34" charset="-122"/>
-                <a:cs typeface="微软雅黑" pitchFamily="34" charset="-120"/>
+                <a:latin typeface="微软雅黑" panose="020B0503020204020204" pitchFamily="34" charset="-122"/>
+                <a:ea typeface="微软雅黑" panose="020B0503020204020204" pitchFamily="34" charset="-122"/>
+                <a:cs typeface="微软雅黑" panose="020B0503020204020204" pitchFamily="34" charset="-120"/>
               </a:rPr>
               <a:t>•  </a:t>
             </a:r>
-            <a:pPr algn="l" indent="0" marL="0">
+            <a:r>
+              <a:rPr lang="en-US" sz="1400" dirty="0">
+                <a:solidFill>
+                  <a:srgbClr val="000000"/>
+                </a:solidFill>
+              </a:rPr>
+              <a:t>先序（根左右）：1 2 4 5 3</a:t>
+            </a:r>
+            <a:endParaRPr lang="en-US" sz="1400" dirty="0"/>
+          </a:p>
+        </p:txBody>
+      </p:sp>
+      <p:sp>
+        <p:nvSpPr>
+          <p:cNvPr id="8" name="Text 5"/>
+          <p:cNvSpPr/>
+          <p:nvPr/>
+        </p:nvSpPr>
+        <p:spPr>
+          <a:xfrm>
+            <a:off x="895985" y="5635625"/>
+            <a:ext cx="2632075" cy="321310"/>
+          </a:xfrm>
+          <a:prstGeom prst="rect">
+            <a:avLst/>
+          </a:prstGeom>
+          <a:noFill/>
+        </p:spPr>
+        <p:txBody>
+          <a:bodyPr wrap="square" rtlCol="0" anchor="t"/>
+          <a:lstStyle/>
+          <a:p>
+            <a:pPr marL="0" indent="0" algn="l">
               <a:lnSpc>
                 <a:spcPct val="115000"/>
               </a:lnSpc>
               <a:buNone/>
             </a:pPr>
             <a:r>
+              <a:rPr lang="en-US" sz="1400" b="1" dirty="0">
+                <a:solidFill>
+                  <a:srgbClr val="1F4E9C"/>
+                </a:solidFill>
+                <a:latin typeface="微软雅黑" panose="020B0503020204020204" pitchFamily="34" charset="-122"/>
+                <a:ea typeface="微软雅黑" panose="020B0503020204020204" pitchFamily="34" charset="-122"/>
+                <a:cs typeface="微软雅黑" panose="020B0503020204020204" pitchFamily="34" charset="-120"/>
+              </a:rPr>
+              <a:t>•  </a:t>
+            </a:r>
+            <a:r>
               <a:rPr lang="en-US" sz="1400" dirty="0">
                 <a:solidFill>
                   <a:srgbClr val="000000"/>
                 </a:solidFill>
               </a:rPr>
-              <a:t>先序（根左右）：1 2 4 5 3</a:t>
+              <a:t>中序（左根右）：4 2 5 1 3</a:t>
             </a:r>
             <a:endParaRPr lang="en-US" sz="1400" dirty="0"/>
           </a:p>
@@ -7619,26 +7316,25 @@
       </p:sp>
       <p:sp>
         <p:nvSpPr>
-          <p:cNvPr id="8" name="Text 5"/>
-          <p:cNvSpPr/>
-          <p:nvPr/>
-        </p:nvSpPr>
-        <p:spPr>
-          <a:xfrm>
-            <a:off x="896112" y="5635752"/>
-            <a:ext cx="10454335" cy="321564"/>
-          </a:xfrm>
-          <a:prstGeom prst="rect">
-            <a:avLst/>
-          </a:prstGeom>
-          <a:noFill/>
-          <a:ln/>
+          <p:cNvPr id="9" name="Text 6"/>
+          <p:cNvSpPr/>
+          <p:nvPr/>
+        </p:nvSpPr>
+        <p:spPr>
+          <a:xfrm>
+            <a:off x="3945890" y="5241290"/>
+            <a:ext cx="2611120" cy="321310"/>
+          </a:xfrm>
+          <a:prstGeom prst="rect">
+            <a:avLst/>
+          </a:prstGeom>
+          <a:noFill/>
         </p:spPr>
         <p:txBody>
           <a:bodyPr wrap="square" rtlCol="0" anchor="t"/>
           <a:lstStyle/>
           <a:p>
-            <a:pPr algn="l" indent="0" marL="0">
+            <a:pPr marL="0" indent="0" algn="l">
               <a:lnSpc>
                 <a:spcPct val="115000"/>
               </a:lnSpc>
@@ -7649,25 +7345,68 @@
                 <a:solidFill>
                   <a:srgbClr val="1F4E9C"/>
                 </a:solidFill>
-                <a:latin typeface="微软雅黑" pitchFamily="34" charset="0"/>
-                <a:ea typeface="微软雅黑" pitchFamily="34" charset="-122"/>
-                <a:cs typeface="微软雅黑" pitchFamily="34" charset="-120"/>
+                <a:latin typeface="微软雅黑" panose="020B0503020204020204" pitchFamily="34" charset="-122"/>
+                <a:ea typeface="微软雅黑" panose="020B0503020204020204" pitchFamily="34" charset="-122"/>
+                <a:cs typeface="微软雅黑" panose="020B0503020204020204" pitchFamily="34" charset="-120"/>
               </a:rPr>
               <a:t>•  </a:t>
             </a:r>
-            <a:pPr algn="l" indent="0" marL="0">
+            <a:r>
+              <a:rPr lang="en-US" sz="1400" dirty="0">
+                <a:solidFill>
+                  <a:srgbClr val="000000"/>
+                </a:solidFill>
+              </a:rPr>
+              <a:t>后序（左右根）：4 5 2 3 1</a:t>
+            </a:r>
+            <a:endParaRPr lang="en-US" sz="1400" dirty="0"/>
+          </a:p>
+        </p:txBody>
+      </p:sp>
+      <p:sp>
+        <p:nvSpPr>
+          <p:cNvPr id="10" name="Text 7"/>
+          <p:cNvSpPr/>
+          <p:nvPr/>
+        </p:nvSpPr>
+        <p:spPr>
+          <a:xfrm>
+            <a:off x="3917950" y="5626735"/>
+            <a:ext cx="2639060" cy="321310"/>
+          </a:xfrm>
+          <a:prstGeom prst="rect">
+            <a:avLst/>
+          </a:prstGeom>
+          <a:noFill/>
+        </p:spPr>
+        <p:txBody>
+          <a:bodyPr wrap="square" rtlCol="0" anchor="t"/>
+          <a:lstStyle/>
+          <a:p>
+            <a:pPr marL="0" indent="0" algn="l">
               <a:lnSpc>
                 <a:spcPct val="115000"/>
               </a:lnSpc>
               <a:buNone/>
             </a:pPr>
             <a:r>
+              <a:rPr lang="en-US" sz="1400" b="1" dirty="0">
+                <a:solidFill>
+                  <a:srgbClr val="1F4E9C"/>
+                </a:solidFill>
+                <a:latin typeface="微软雅黑" panose="020B0503020204020204" pitchFamily="34" charset="-122"/>
+                <a:ea typeface="微软雅黑" panose="020B0503020204020204" pitchFamily="34" charset="-122"/>
+                <a:cs typeface="微软雅黑" panose="020B0503020204020204" pitchFamily="34" charset="-120"/>
+              </a:rPr>
+              <a:t>•  </a:t>
+            </a:r>
+            <a:r>
               <a:rPr lang="en-US" sz="1400" dirty="0">
                 <a:solidFill>
                   <a:srgbClr val="000000"/>
                 </a:solidFill>
               </a:rPr>
-              <a:t>中序（左根右）：4 2 5 1 3</a:t>
+              <a:t>层序（一层一层）：1 2 3 4 5</a:t>
             </a:r>
             <a:endParaRPr lang="en-US" sz="1400" dirty="0"/>
           </a:p>
@@ -7675,138 +7414,25 @@
       </p:sp>
       <p:sp>
         <p:nvSpPr>
-          <p:cNvPr id="9" name="Text 6"/>
-          <p:cNvSpPr/>
-          <p:nvPr/>
-        </p:nvSpPr>
-        <p:spPr>
-          <a:xfrm>
-            <a:off x="896112" y="6030468"/>
-            <a:ext cx="10454335" cy="321564"/>
-          </a:xfrm>
-          <a:prstGeom prst="rect">
-            <a:avLst/>
-          </a:prstGeom>
-          <a:noFill/>
-          <a:ln/>
+          <p:cNvPr id="11" name="Text 8"/>
+          <p:cNvSpPr/>
+          <p:nvPr/>
+        </p:nvSpPr>
+        <p:spPr>
+          <a:xfrm>
+            <a:off x="1457960" y="6042025"/>
+            <a:ext cx="6123305" cy="301625"/>
+          </a:xfrm>
+          <a:prstGeom prst="rect">
+            <a:avLst/>
+          </a:prstGeom>
+          <a:noFill/>
         </p:spPr>
         <p:txBody>
           <a:bodyPr wrap="square" rtlCol="0" anchor="t"/>
           <a:lstStyle/>
           <a:p>
-            <a:pPr algn="l" indent="0" marL="0">
-              <a:lnSpc>
-                <a:spcPct val="115000"/>
-              </a:lnSpc>
-              <a:buNone/>
-            </a:pPr>
-            <a:r>
-              <a:rPr lang="en-US" sz="1400" b="1" dirty="0">
-                <a:solidFill>
-                  <a:srgbClr val="1F4E9C"/>
-                </a:solidFill>
-                <a:latin typeface="微软雅黑" pitchFamily="34" charset="0"/>
-                <a:ea typeface="微软雅黑" pitchFamily="34" charset="-122"/>
-                <a:cs typeface="微软雅黑" pitchFamily="34" charset="-120"/>
-              </a:rPr>
-              <a:t>•  </a:t>
-            </a:r>
-            <a:pPr algn="l" indent="0" marL="0">
-              <a:lnSpc>
-                <a:spcPct val="115000"/>
-              </a:lnSpc>
-              <a:buNone/>
-            </a:pPr>
-            <a:r>
-              <a:rPr lang="en-US" sz="1400" dirty="0">
-                <a:solidFill>
-                  <a:srgbClr val="000000"/>
-                </a:solidFill>
-              </a:rPr>
-              <a:t>后序（左右根）：4 5 2 3 1</a:t>
-            </a:r>
-            <a:endParaRPr lang="en-US" sz="1400" dirty="0"/>
-          </a:p>
-        </p:txBody>
-      </p:sp>
-      <p:sp>
-        <p:nvSpPr>
-          <p:cNvPr id="10" name="Text 7"/>
-          <p:cNvSpPr/>
-          <p:nvPr/>
-        </p:nvSpPr>
-        <p:spPr>
-          <a:xfrm>
-            <a:off x="896112" y="6425184"/>
-            <a:ext cx="10454335" cy="321564"/>
-          </a:xfrm>
-          <a:prstGeom prst="rect">
-            <a:avLst/>
-          </a:prstGeom>
-          <a:noFill/>
-          <a:ln/>
-        </p:spPr>
-        <p:txBody>
-          <a:bodyPr wrap="square" rtlCol="0" anchor="t"/>
-          <a:lstStyle/>
-          <a:p>
-            <a:pPr algn="l" indent="0" marL="0">
-              <a:lnSpc>
-                <a:spcPct val="115000"/>
-              </a:lnSpc>
-              <a:buNone/>
-            </a:pPr>
-            <a:r>
-              <a:rPr lang="en-US" sz="1400" b="1" dirty="0">
-                <a:solidFill>
-                  <a:srgbClr val="1F4E9C"/>
-                </a:solidFill>
-                <a:latin typeface="微软雅黑" pitchFamily="34" charset="0"/>
-                <a:ea typeface="微软雅黑" pitchFamily="34" charset="-122"/>
-                <a:cs typeface="微软雅黑" pitchFamily="34" charset="-120"/>
-              </a:rPr>
-              <a:t>•  </a:t>
-            </a:r>
-            <a:pPr algn="l" indent="0" marL="0">
-              <a:lnSpc>
-                <a:spcPct val="115000"/>
-              </a:lnSpc>
-              <a:buNone/>
-            </a:pPr>
-            <a:r>
-              <a:rPr lang="en-US" sz="1400" dirty="0">
-                <a:solidFill>
-                  <a:srgbClr val="000000"/>
-                </a:solidFill>
-              </a:rPr>
-              <a:t>层序（一层一层）：1 2 3 4 5</a:t>
-            </a:r>
-            <a:endParaRPr lang="en-US" sz="1400" dirty="0"/>
-          </a:p>
-        </p:txBody>
-      </p:sp>
-      <p:sp>
-        <p:nvSpPr>
-          <p:cNvPr id="11" name="Text 8"/>
-          <p:cNvSpPr/>
-          <p:nvPr/>
-        </p:nvSpPr>
-        <p:spPr>
-          <a:xfrm>
-            <a:off x="822960" y="6911340"/>
-            <a:ext cx="10545775" cy="301752"/>
-          </a:xfrm>
-          <a:prstGeom prst="rect">
-            <a:avLst/>
-          </a:prstGeom>
-          <a:noFill/>
-          <a:ln/>
-        </p:spPr>
-        <p:txBody>
-          <a:bodyPr wrap="square" rtlCol="0" anchor="t"/>
-          <a:lstStyle/>
-          <a:p>
-            <a:pPr algn="l" indent="0" marL="0">
+            <a:pPr marL="0" indent="0" algn="l">
               <a:buNone/>
             </a:pPr>
             <a:r>
@@ -7814,9 +7440,9 @@
                 <a:solidFill>
                   <a:srgbClr val="8A9099"/>
                 </a:solidFill>
-                <a:latin typeface="微软雅黑" pitchFamily="34" charset="0"/>
-                <a:ea typeface="微软雅黑" pitchFamily="34" charset="-122"/>
-                <a:cs typeface="微软雅黑" pitchFamily="34" charset="-120"/>
+                <a:latin typeface="微软雅黑" panose="020B0503020204020204" pitchFamily="34" charset="-122"/>
+                <a:ea typeface="微软雅黑" panose="020B0503020204020204" pitchFamily="34" charset="-122"/>
+                <a:cs typeface="微软雅黑" panose="020B0503020204020204" pitchFamily="34" charset="-120"/>
               </a:rPr>
               <a:t>这棵树后面还会用它演示非递归中序和建树，你先把它画在纸上</a:t>
             </a:r>
@@ -7829,12 +7455,437 @@
   <p:clrMapOvr>
     <a:masterClrMapping/>
   </p:clrMapOvr>
+  <p:timing>
+    <p:tnLst>
+      <p:par>
+        <p:cTn id="1" dur="indefinite" restart="never" nodeType="tmRoot">
+          <p:childTnLst>
+            <p:seq concurrent="1" nextAc="seek">
+              <p:cTn id="2" dur="indefinite" nodeType="mainSeq">
+                <p:childTnLst>
+                  <p:par>
+                    <p:cTn id="3" fill="hold">
+                      <p:stCondLst>
+                        <p:cond delay="indefinite"/>
+                      </p:stCondLst>
+                      <p:childTnLst>
+                        <p:par>
+                          <p:cTn id="4" fill="hold">
+                            <p:stCondLst>
+                              <p:cond delay="0"/>
+                            </p:stCondLst>
+                            <p:childTnLst>
+                              <p:par>
+                                <p:cTn id="5" presetID="2" presetClass="entr" presetSubtype="4" fill="hold" grpId="0" nodeType="clickEffect">
+                                  <p:stCondLst>
+                                    <p:cond delay="0"/>
+                                  </p:stCondLst>
+                                  <p:childTnLst>
+                                    <p:set>
+                                      <p:cBhvr>
+                                        <p:cTn id="6" dur="1" fill="hold">
+                                          <p:stCondLst>
+                                            <p:cond delay="0"/>
+                                          </p:stCondLst>
+                                        </p:cTn>
+                                        <p:tgtEl>
+                                          <p:spTgt spid="7"/>
+                                        </p:tgtEl>
+                                        <p:attrNameLst>
+                                          <p:attrName>style.visibility</p:attrName>
+                                        </p:attrNameLst>
+                                      </p:cBhvr>
+                                      <p:to>
+                                        <p:strVal val="visible"/>
+                                      </p:to>
+                                    </p:set>
+                                    <p:anim calcmode="lin" valueType="num">
+                                      <p:cBhvr additive="base">
+                                        <p:cTn id="7" dur="500" fill="hold"/>
+                                        <p:tgtEl>
+                                          <p:spTgt spid="7"/>
+                                        </p:tgtEl>
+                                        <p:attrNameLst>
+                                          <p:attrName>ppt_x</p:attrName>
+                                        </p:attrNameLst>
+                                      </p:cBhvr>
+                                      <p:tavLst>
+                                        <p:tav tm="0">
+                                          <p:val>
+                                            <p:strVal val="#ppt_x"/>
+                                          </p:val>
+                                        </p:tav>
+                                        <p:tav tm="100000">
+                                          <p:val>
+                                            <p:strVal val="#ppt_x"/>
+                                          </p:val>
+                                        </p:tav>
+                                      </p:tavLst>
+                                    </p:anim>
+                                    <p:anim calcmode="lin" valueType="num">
+                                      <p:cBhvr additive="base">
+                                        <p:cTn id="8" dur="500" fill="hold"/>
+                                        <p:tgtEl>
+                                          <p:spTgt spid="7"/>
+                                        </p:tgtEl>
+                                        <p:attrNameLst>
+                                          <p:attrName>ppt_y</p:attrName>
+                                        </p:attrNameLst>
+                                      </p:cBhvr>
+                                      <p:tavLst>
+                                        <p:tav tm="0">
+                                          <p:val>
+                                            <p:strVal val="1+#ppt_h/2"/>
+                                          </p:val>
+                                        </p:tav>
+                                        <p:tav tm="100000">
+                                          <p:val>
+                                            <p:strVal val="#ppt_y"/>
+                                          </p:val>
+                                        </p:tav>
+                                      </p:tavLst>
+                                    </p:anim>
+                                  </p:childTnLst>
+                                </p:cTn>
+                              </p:par>
+                              <p:par>
+                                <p:cTn id="9" presetID="2" presetClass="entr" presetSubtype="4" fill="hold" grpId="0" nodeType="withEffect">
+                                  <p:stCondLst>
+                                    <p:cond delay="0"/>
+                                  </p:stCondLst>
+                                  <p:childTnLst>
+                                    <p:set>
+                                      <p:cBhvr>
+                                        <p:cTn id="10" dur="1" fill="hold">
+                                          <p:stCondLst>
+                                            <p:cond delay="0"/>
+                                          </p:stCondLst>
+                                        </p:cTn>
+                                        <p:tgtEl>
+                                          <p:spTgt spid="8"/>
+                                        </p:tgtEl>
+                                        <p:attrNameLst>
+                                          <p:attrName>style.visibility</p:attrName>
+                                        </p:attrNameLst>
+                                      </p:cBhvr>
+                                      <p:to>
+                                        <p:strVal val="visible"/>
+                                      </p:to>
+                                    </p:set>
+                                    <p:anim calcmode="lin" valueType="num">
+                                      <p:cBhvr additive="base">
+                                        <p:cTn id="11" dur="500" fill="hold"/>
+                                        <p:tgtEl>
+                                          <p:spTgt spid="8"/>
+                                        </p:tgtEl>
+                                        <p:attrNameLst>
+                                          <p:attrName>ppt_x</p:attrName>
+                                        </p:attrNameLst>
+                                      </p:cBhvr>
+                                      <p:tavLst>
+                                        <p:tav tm="0">
+                                          <p:val>
+                                            <p:strVal val="#ppt_x"/>
+                                          </p:val>
+                                        </p:tav>
+                                        <p:tav tm="100000">
+                                          <p:val>
+                                            <p:strVal val="#ppt_x"/>
+                                          </p:val>
+                                        </p:tav>
+                                      </p:tavLst>
+                                    </p:anim>
+                                    <p:anim calcmode="lin" valueType="num">
+                                      <p:cBhvr additive="base">
+                                        <p:cTn id="12" dur="500" fill="hold"/>
+                                        <p:tgtEl>
+                                          <p:spTgt spid="8"/>
+                                        </p:tgtEl>
+                                        <p:attrNameLst>
+                                          <p:attrName>ppt_y</p:attrName>
+                                        </p:attrNameLst>
+                                      </p:cBhvr>
+                                      <p:tavLst>
+                                        <p:tav tm="0">
+                                          <p:val>
+                                            <p:strVal val="1+#ppt_h/2"/>
+                                          </p:val>
+                                        </p:tav>
+                                        <p:tav tm="100000">
+                                          <p:val>
+                                            <p:strVal val="#ppt_y"/>
+                                          </p:val>
+                                        </p:tav>
+                                      </p:tavLst>
+                                    </p:anim>
+                                  </p:childTnLst>
+                                </p:cTn>
+                              </p:par>
+                              <p:par>
+                                <p:cTn id="13" presetID="2" presetClass="entr" presetSubtype="4" fill="hold" grpId="0" nodeType="withEffect">
+                                  <p:stCondLst>
+                                    <p:cond delay="0"/>
+                                  </p:stCondLst>
+                                  <p:childTnLst>
+                                    <p:set>
+                                      <p:cBhvr>
+                                        <p:cTn id="14" dur="1" fill="hold">
+                                          <p:stCondLst>
+                                            <p:cond delay="0"/>
+                                          </p:stCondLst>
+                                        </p:cTn>
+                                        <p:tgtEl>
+                                          <p:spTgt spid="9"/>
+                                        </p:tgtEl>
+                                        <p:attrNameLst>
+                                          <p:attrName>style.visibility</p:attrName>
+                                        </p:attrNameLst>
+                                      </p:cBhvr>
+                                      <p:to>
+                                        <p:strVal val="visible"/>
+                                      </p:to>
+                                    </p:set>
+                                    <p:anim calcmode="lin" valueType="num">
+                                      <p:cBhvr additive="base">
+                                        <p:cTn id="15" dur="500" fill="hold"/>
+                                        <p:tgtEl>
+                                          <p:spTgt spid="9"/>
+                                        </p:tgtEl>
+                                        <p:attrNameLst>
+                                          <p:attrName>ppt_x</p:attrName>
+                                        </p:attrNameLst>
+                                      </p:cBhvr>
+                                      <p:tavLst>
+                                        <p:tav tm="0">
+                                          <p:val>
+                                            <p:strVal val="#ppt_x"/>
+                                          </p:val>
+                                        </p:tav>
+                                        <p:tav tm="100000">
+                                          <p:val>
+                                            <p:strVal val="#ppt_x"/>
+                                          </p:val>
+                                        </p:tav>
+                                      </p:tavLst>
+                                    </p:anim>
+                                    <p:anim calcmode="lin" valueType="num">
+                                      <p:cBhvr additive="base">
+                                        <p:cTn id="16" dur="500" fill="hold"/>
+                                        <p:tgtEl>
+                                          <p:spTgt spid="9"/>
+                                        </p:tgtEl>
+                                        <p:attrNameLst>
+                                          <p:attrName>ppt_y</p:attrName>
+                                        </p:attrNameLst>
+                                      </p:cBhvr>
+                                      <p:tavLst>
+                                        <p:tav tm="0">
+                                          <p:val>
+                                            <p:strVal val="1+#ppt_h/2"/>
+                                          </p:val>
+                                        </p:tav>
+                                        <p:tav tm="100000">
+                                          <p:val>
+                                            <p:strVal val="#ppt_y"/>
+                                          </p:val>
+                                        </p:tav>
+                                      </p:tavLst>
+                                    </p:anim>
+                                  </p:childTnLst>
+                                </p:cTn>
+                              </p:par>
+                              <p:par>
+                                <p:cTn id="17" presetID="2" presetClass="entr" presetSubtype="4" fill="hold" grpId="0" nodeType="withEffect">
+                                  <p:stCondLst>
+                                    <p:cond delay="0"/>
+                                  </p:stCondLst>
+                                  <p:childTnLst>
+                                    <p:set>
+                                      <p:cBhvr>
+                                        <p:cTn id="18" dur="1" fill="hold">
+                                          <p:stCondLst>
+                                            <p:cond delay="0"/>
+                                          </p:stCondLst>
+                                        </p:cTn>
+                                        <p:tgtEl>
+                                          <p:spTgt spid="10"/>
+                                        </p:tgtEl>
+                                        <p:attrNameLst>
+                                          <p:attrName>style.visibility</p:attrName>
+                                        </p:attrNameLst>
+                                      </p:cBhvr>
+                                      <p:to>
+                                        <p:strVal val="visible"/>
+                                      </p:to>
+                                    </p:set>
+                                    <p:anim calcmode="lin" valueType="num">
+                                      <p:cBhvr additive="base">
+                                        <p:cTn id="19" dur="500" fill="hold"/>
+                                        <p:tgtEl>
+                                          <p:spTgt spid="10"/>
+                                        </p:tgtEl>
+                                        <p:attrNameLst>
+                                          <p:attrName>ppt_x</p:attrName>
+                                        </p:attrNameLst>
+                                      </p:cBhvr>
+                                      <p:tavLst>
+                                        <p:tav tm="0">
+                                          <p:val>
+                                            <p:strVal val="#ppt_x"/>
+                                          </p:val>
+                                        </p:tav>
+                                        <p:tav tm="100000">
+                                          <p:val>
+                                            <p:strVal val="#ppt_x"/>
+                                          </p:val>
+                                        </p:tav>
+                                      </p:tavLst>
+                                    </p:anim>
+                                    <p:anim calcmode="lin" valueType="num">
+                                      <p:cBhvr additive="base">
+                                        <p:cTn id="20" dur="500" fill="hold"/>
+                                        <p:tgtEl>
+                                          <p:spTgt spid="10"/>
+                                        </p:tgtEl>
+                                        <p:attrNameLst>
+                                          <p:attrName>ppt_y</p:attrName>
+                                        </p:attrNameLst>
+                                      </p:cBhvr>
+                                      <p:tavLst>
+                                        <p:tav tm="0">
+                                          <p:val>
+                                            <p:strVal val="1+#ppt_h/2"/>
+                                          </p:val>
+                                        </p:tav>
+                                        <p:tav tm="100000">
+                                          <p:val>
+                                            <p:strVal val="#ppt_y"/>
+                                          </p:val>
+                                        </p:tav>
+                                      </p:tavLst>
+                                    </p:anim>
+                                  </p:childTnLst>
+                                </p:cTn>
+                              </p:par>
+                              <p:par>
+                                <p:cTn id="21" presetID="2" presetClass="entr" presetSubtype="4" fill="hold" grpId="0" nodeType="withEffect">
+                                  <p:stCondLst>
+                                    <p:cond delay="0"/>
+                                  </p:stCondLst>
+                                  <p:childTnLst>
+                                    <p:set>
+                                      <p:cBhvr>
+                                        <p:cTn id="22" dur="1" fill="hold">
+                                          <p:stCondLst>
+                                            <p:cond delay="0"/>
+                                          </p:stCondLst>
+                                        </p:cTn>
+                                        <p:tgtEl>
+                                          <p:spTgt spid="11"/>
+                                        </p:tgtEl>
+                                        <p:attrNameLst>
+                                          <p:attrName>style.visibility</p:attrName>
+                                        </p:attrNameLst>
+                                      </p:cBhvr>
+                                      <p:to>
+                                        <p:strVal val="visible"/>
+                                      </p:to>
+                                    </p:set>
+                                    <p:anim calcmode="lin" valueType="num">
+                                      <p:cBhvr additive="base">
+                                        <p:cTn id="23" dur="500" fill="hold"/>
+                                        <p:tgtEl>
+                                          <p:spTgt spid="11"/>
+                                        </p:tgtEl>
+                                        <p:attrNameLst>
+                                          <p:attrName>ppt_x</p:attrName>
+                                        </p:attrNameLst>
+                                      </p:cBhvr>
+                                      <p:tavLst>
+                                        <p:tav tm="0">
+                                          <p:val>
+                                            <p:strVal val="#ppt_x"/>
+                                          </p:val>
+                                        </p:tav>
+                                        <p:tav tm="100000">
+                                          <p:val>
+                                            <p:strVal val="#ppt_x"/>
+                                          </p:val>
+                                        </p:tav>
+                                      </p:tavLst>
+                                    </p:anim>
+                                    <p:anim calcmode="lin" valueType="num">
+                                      <p:cBhvr additive="base">
+                                        <p:cTn id="24" dur="500" fill="hold"/>
+                                        <p:tgtEl>
+                                          <p:spTgt spid="11"/>
+                                        </p:tgtEl>
+                                        <p:attrNameLst>
+                                          <p:attrName>ppt_y</p:attrName>
+                                        </p:attrNameLst>
+                                      </p:cBhvr>
+                                      <p:tavLst>
+                                        <p:tav tm="0">
+                                          <p:val>
+                                            <p:strVal val="1+#ppt_h/2"/>
+                                          </p:val>
+                                        </p:tav>
+                                        <p:tav tm="100000">
+                                          <p:val>
+                                            <p:strVal val="#ppt_y"/>
+                                          </p:val>
+                                        </p:tav>
+                                      </p:tavLst>
+                                    </p:anim>
+                                  </p:childTnLst>
+                                </p:cTn>
+                              </p:par>
+                            </p:childTnLst>
+                          </p:cTn>
+                        </p:par>
+                      </p:childTnLst>
+                    </p:cTn>
+                  </p:par>
+                </p:childTnLst>
+              </p:cTn>
+              <p:prevCondLst>
+                <p:cond evt="onPrev" delay="0">
+                  <p:tgtEl>
+                    <p:sldTgt/>
+                  </p:tgtEl>
+                </p:cond>
+              </p:prevCondLst>
+              <p:nextCondLst>
+                <p:cond evt="onNext" delay="0">
+                  <p:tgtEl>
+                    <p:sldTgt/>
+                  </p:tgtEl>
+                </p:cond>
+              </p:nextCondLst>
+            </p:seq>
+          </p:childTnLst>
+        </p:cTn>
+      </p:par>
+    </p:tnLst>
+    <p:bldLst>
+      <p:bldP spid="7" grpId="0"/>
+      <p:bldP spid="8" grpId="0"/>
+      <p:bldP spid="9" grpId="0"/>
+      <p:bldP spid="10" grpId="0"/>
+      <p:bldP spid="11" grpId="0"/>
+      <p:bldP spid="7" grpId="1"/>
+      <p:bldP spid="8" grpId="1"/>
+      <p:bldP spid="9" grpId="1"/>
+      <p:bldP spid="10" grpId="1"/>
+      <p:bldP spid="11" grpId="1"/>
+    </p:bldLst>
+  </p:timing>
 </p:sld>
 </file>
 
 <file path=ppt/slides/slide6.xml><?xml version="1.0" encoding="utf-8"?>
 <p:sld xmlns:a="http://schemas.openxmlformats.org/drawingml/2006/main" xmlns:r="http://schemas.openxmlformats.org/officeDocument/2006/relationships" xmlns:p="http://schemas.openxmlformats.org/presentationml/2006/main">
-  <p:cSld name="Slide 6">
+  <p:cSld>
     <p:bg>
       <p:bgPr>
         <a:blipFill dpi="0" rotWithShape="1">
@@ -7878,13 +7929,12 @@
             <a:avLst/>
           </a:prstGeom>
           <a:noFill/>
-          <a:ln/>
         </p:spPr>
         <p:txBody>
           <a:bodyPr wrap="square" rtlCol="0" anchor="ctr"/>
           <a:lstStyle/>
           <a:p>
-            <a:pPr algn="r" indent="0" marL="0">
+            <a:pPr marL="0" indent="0" algn="r">
               <a:buNone/>
             </a:pPr>
             <a:r>
@@ -7892,9 +7942,9 @@
                 <a:solidFill>
                   <a:srgbClr val="8A9099"/>
                 </a:solidFill>
-                <a:latin typeface="微软雅黑" pitchFamily="34" charset="0"/>
-                <a:ea typeface="微软雅黑" pitchFamily="34" charset="-122"/>
-                <a:cs typeface="微软雅黑" pitchFamily="34" charset="-120"/>
+                <a:latin typeface="微软雅黑" panose="020B0503020204020204" pitchFamily="34" charset="-122"/>
+                <a:ea typeface="微软雅黑" panose="020B0503020204020204" pitchFamily="34" charset="-122"/>
+                <a:cs typeface="微软雅黑" panose="020B0503020204020204" pitchFamily="34" charset="-120"/>
               </a:rPr>
               <a:t>6 / 17</a:t>
             </a:r>
@@ -7917,13 +7967,12 @@
             <a:avLst/>
           </a:prstGeom>
           <a:noFill/>
-          <a:ln/>
         </p:spPr>
         <p:txBody>
           <a:bodyPr wrap="square" rtlCol="0" anchor="ctr"/>
           <a:lstStyle/>
           <a:p>
-            <a:pPr algn="l" indent="0" marL="0">
+            <a:pPr marL="0" indent="0" algn="l">
               <a:buNone/>
             </a:pPr>
             <a:r>
@@ -7931,9 +7980,9 @@
                 <a:solidFill>
                   <a:srgbClr val="1F4E9C"/>
                 </a:solidFill>
-                <a:latin typeface="微软雅黑" pitchFamily="34" charset="0"/>
-                <a:ea typeface="微软雅黑" pitchFamily="34" charset="-122"/>
-                <a:cs typeface="微软雅黑" pitchFamily="34" charset="-120"/>
+                <a:latin typeface="微软雅黑" panose="020B0503020204020204" pitchFamily="34" charset="-122"/>
+                <a:ea typeface="微软雅黑" panose="020B0503020204020204" pitchFamily="34" charset="-122"/>
+                <a:cs typeface="微软雅黑" panose="020B0503020204020204" pitchFamily="34" charset="-120"/>
               </a:rPr>
               <a:t>递归的展开</a:t>
             </a:r>
@@ -7956,13 +8005,12 @@
             <a:avLst/>
           </a:prstGeom>
           <a:noFill/>
-          <a:ln/>
         </p:spPr>
         <p:txBody>
           <a:bodyPr wrap="square" rtlCol="0" anchor="ctr"/>
           <a:lstStyle/>
           <a:p>
-            <a:pPr algn="l" indent="0" marL="0">
+            <a:pPr marL="0" indent="0" algn="l">
               <a:buNone/>
             </a:pPr>
             <a:r>
@@ -7970,9 +8018,9 @@
                 <a:solidFill>
                   <a:srgbClr val="1F2329"/>
                 </a:solidFill>
-                <a:latin typeface="微软雅黑" pitchFamily="34" charset="0"/>
-                <a:ea typeface="微软雅黑" pitchFamily="34" charset="-122"/>
-                <a:cs typeface="微软雅黑" pitchFamily="34" charset="-120"/>
+                <a:latin typeface="微软雅黑" panose="020B0503020204020204" pitchFamily="34" charset="-122"/>
+                <a:ea typeface="微软雅黑" panose="020B0503020204020204" pitchFamily="34" charset="-122"/>
+                <a:cs typeface="微软雅黑" panose="020B0503020204020204" pitchFamily="34" charset="-120"/>
               </a:rPr>
               <a:t>递归遍历在调用栈里怎么展开</a:t>
             </a:r>
@@ -7995,13 +8043,12 @@
             <a:avLst/>
           </a:prstGeom>
           <a:noFill/>
-          <a:ln/>
         </p:spPr>
         <p:txBody>
           <a:bodyPr wrap="square" rtlCol="0" anchor="t"/>
           <a:lstStyle/>
           <a:p>
-            <a:pPr algn="l" indent="0" marL="0">
+            <a:pPr marL="0" indent="0" algn="l">
               <a:lnSpc>
                 <a:spcPct val="115000"/>
               </a:lnSpc>
@@ -8012,25 +8059,68 @@
                 <a:solidFill>
                   <a:srgbClr val="1F4E9C"/>
                 </a:solidFill>
-                <a:latin typeface="微软雅黑" pitchFamily="34" charset="0"/>
-                <a:ea typeface="微软雅黑" pitchFamily="34" charset="-122"/>
-                <a:cs typeface="微软雅黑" pitchFamily="34" charset="-120"/>
+                <a:latin typeface="微软雅黑" panose="020B0503020204020204" pitchFamily="34" charset="-122"/>
+                <a:ea typeface="微软雅黑" panose="020B0503020204020204" pitchFamily="34" charset="-122"/>
+                <a:cs typeface="微软雅黑" panose="020B0503020204020204" pitchFamily="34" charset="-120"/>
               </a:rPr>
               <a:t>•  </a:t>
             </a:r>
-            <a:pPr algn="l" indent="0" marL="0">
+            <a:r>
+              <a:rPr lang="en-US" sz="1800" dirty="0">
+                <a:solidFill>
+                  <a:srgbClr val="000000"/>
+                </a:solidFill>
+              </a:rPr>
+              <a:t>以中序为例，InOrder(1) 先调 InOrder(2)，InOrder(2) 先调 InOrder(4)，一路往左压栈</a:t>
+            </a:r>
+            <a:endParaRPr lang="en-US" sz="1800" dirty="0"/>
+          </a:p>
+        </p:txBody>
+      </p:sp>
+      <p:sp>
+        <p:nvSpPr>
+          <p:cNvPr id="6" name="Text 4"/>
+          <p:cNvSpPr/>
+          <p:nvPr/>
+        </p:nvSpPr>
+        <p:spPr>
+          <a:xfrm>
+            <a:off x="896112" y="3209544"/>
+            <a:ext cx="10454335" cy="740664"/>
+          </a:xfrm>
+          <a:prstGeom prst="rect">
+            <a:avLst/>
+          </a:prstGeom>
+          <a:noFill/>
+        </p:spPr>
+        <p:txBody>
+          <a:bodyPr wrap="square" rtlCol="0" anchor="t"/>
+          <a:lstStyle/>
+          <a:p>
+            <a:pPr marL="0" indent="0" algn="l">
               <a:lnSpc>
                 <a:spcPct val="115000"/>
               </a:lnSpc>
               <a:buNone/>
             </a:pPr>
             <a:r>
+              <a:rPr lang="en-US" sz="1800" b="1" dirty="0">
+                <a:solidFill>
+                  <a:srgbClr val="1F4E9C"/>
+                </a:solidFill>
+                <a:latin typeface="微软雅黑" panose="020B0503020204020204" pitchFamily="34" charset="-122"/>
+                <a:ea typeface="微软雅黑" panose="020B0503020204020204" pitchFamily="34" charset="-122"/>
+                <a:cs typeface="微软雅黑" panose="020B0503020204020204" pitchFamily="34" charset="-120"/>
+              </a:rPr>
+              <a:t>•  </a:t>
+            </a:r>
+            <a:r>
               <a:rPr lang="en-US" sz="1800" dirty="0">
                 <a:solidFill>
                   <a:srgbClr val="000000"/>
                 </a:solidFill>
               </a:rPr>
-              <a:t>以中序为例，InOrder(1) 先调 InOrder(2)，InOrder(2) 先调 InOrder(4)，一路往左压栈</a:t>
+              <a:t>到了 InOrder(4)，它的左孩子是 NULL 返回，才 visit(4)，再调它的右孩子（NULL）返回</a:t>
             </a:r>
             <a:endParaRPr lang="en-US" sz="1800" dirty="0"/>
           </a:p>
@@ -8038,26 +8128,25 @@
       </p:sp>
       <p:sp>
         <p:nvSpPr>
-          <p:cNvPr id="6" name="Text 4"/>
-          <p:cNvSpPr/>
-          <p:nvPr/>
-        </p:nvSpPr>
-        <p:spPr>
-          <a:xfrm>
-            <a:off x="896112" y="3209544"/>
+          <p:cNvPr id="7" name="Text 5"/>
+          <p:cNvSpPr/>
+          <p:nvPr/>
+        </p:nvSpPr>
+        <p:spPr>
+          <a:xfrm>
+            <a:off x="896112" y="4023360"/>
             <a:ext cx="10454335" cy="740664"/>
           </a:xfrm>
           <a:prstGeom prst="rect">
             <a:avLst/>
           </a:prstGeom>
           <a:noFill/>
-          <a:ln/>
         </p:spPr>
         <p:txBody>
           <a:bodyPr wrap="square" rtlCol="0" anchor="t"/>
           <a:lstStyle/>
           <a:p>
-            <a:pPr algn="l" indent="0" marL="0">
+            <a:pPr marL="0" indent="0" algn="l">
               <a:lnSpc>
                 <a:spcPct val="115000"/>
               </a:lnSpc>
@@ -8068,74 +8157,12 @@
                 <a:solidFill>
                   <a:srgbClr val="1F4E9C"/>
                 </a:solidFill>
-                <a:latin typeface="微软雅黑" pitchFamily="34" charset="0"/>
-                <a:ea typeface="微软雅黑" pitchFamily="34" charset="-122"/>
-                <a:cs typeface="微软雅黑" pitchFamily="34" charset="-120"/>
+                <a:latin typeface="微软雅黑" panose="020B0503020204020204" pitchFamily="34" charset="-122"/>
+                <a:ea typeface="微软雅黑" panose="020B0503020204020204" pitchFamily="34" charset="-122"/>
+                <a:cs typeface="微软雅黑" panose="020B0503020204020204" pitchFamily="34" charset="-120"/>
               </a:rPr>
               <a:t>•  </a:t>
             </a:r>
-            <a:pPr algn="l" indent="0" marL="0">
-              <a:lnSpc>
-                <a:spcPct val="115000"/>
-              </a:lnSpc>
-              <a:buNone/>
-            </a:pPr>
-            <a:r>
-              <a:rPr lang="en-US" sz="1800" dirty="0">
-                <a:solidFill>
-                  <a:srgbClr val="000000"/>
-                </a:solidFill>
-              </a:rPr>
-              <a:t>到了 InOrder(4)，它的左孩子是 NULL 返回，才 visit(4)，再调它的右孩子（NULL）返回</a:t>
-            </a:r>
-            <a:endParaRPr lang="en-US" sz="1800" dirty="0"/>
-          </a:p>
-        </p:txBody>
-      </p:sp>
-      <p:sp>
-        <p:nvSpPr>
-          <p:cNvPr id="7" name="Text 5"/>
-          <p:cNvSpPr/>
-          <p:nvPr/>
-        </p:nvSpPr>
-        <p:spPr>
-          <a:xfrm>
-            <a:off x="896112" y="4023360"/>
-            <a:ext cx="10454335" cy="740664"/>
-          </a:xfrm>
-          <a:prstGeom prst="rect">
-            <a:avLst/>
-          </a:prstGeom>
-          <a:noFill/>
-          <a:ln/>
-        </p:spPr>
-        <p:txBody>
-          <a:bodyPr wrap="square" rtlCol="0" anchor="t"/>
-          <a:lstStyle/>
-          <a:p>
-            <a:pPr algn="l" indent="0" marL="0">
-              <a:lnSpc>
-                <a:spcPct val="115000"/>
-              </a:lnSpc>
-              <a:buNone/>
-            </a:pPr>
-            <a:r>
-              <a:rPr lang="en-US" sz="1800" b="1" dirty="0">
-                <a:solidFill>
-                  <a:srgbClr val="1F4E9C"/>
-                </a:solidFill>
-                <a:latin typeface="微软雅黑" pitchFamily="34" charset="0"/>
-                <a:ea typeface="微软雅黑" pitchFamily="34" charset="-122"/>
-                <a:cs typeface="微软雅黑" pitchFamily="34" charset="-120"/>
-              </a:rPr>
-              <a:t>•  </a:t>
-            </a:r>
-            <a:pPr algn="l" indent="0" marL="0">
-              <a:lnSpc>
-                <a:spcPct val="115000"/>
-              </a:lnSpc>
-              <a:buNone/>
-            </a:pPr>
             <a:r>
               <a:rPr lang="en-US" sz="1800" dirty="0">
                 <a:solidFill>
@@ -8163,13 +8190,12 @@
             <a:avLst/>
           </a:prstGeom>
           <a:noFill/>
-          <a:ln/>
         </p:spPr>
         <p:txBody>
           <a:bodyPr wrap="square" rtlCol="0" anchor="t"/>
           <a:lstStyle/>
           <a:p>
-            <a:pPr algn="l" indent="0" marL="0">
+            <a:pPr marL="0" indent="0" algn="l">
               <a:buNone/>
             </a:pPr>
             <a:r>
@@ -8177,9 +8203,9 @@
                 <a:solidFill>
                   <a:srgbClr val="8A9099"/>
                 </a:solidFill>
-                <a:latin typeface="微软雅黑" pitchFamily="34" charset="0"/>
-                <a:ea typeface="微软雅黑" pitchFamily="34" charset="-122"/>
-                <a:cs typeface="微软雅黑" pitchFamily="34" charset="-120"/>
+                <a:latin typeface="微软雅黑" panose="020B0503020204020204" pitchFamily="34" charset="-122"/>
+                <a:ea typeface="微软雅黑" panose="020B0503020204020204" pitchFamily="34" charset="-122"/>
+                <a:cs typeface="微软雅黑" panose="020B0503020204020204" pitchFamily="34" charset="-120"/>
               </a:rPr>
               <a:t>这个'一路往左压、到底了再回退访问'的过程，就是非递归中序要用栈显式模拟的东西</a:t>
             </a:r>
@@ -8197,7 +8223,7 @@
 
 <file path=ppt/slides/slide7.xml><?xml version="1.0" encoding="utf-8"?>
 <p:sld xmlns:a="http://schemas.openxmlformats.org/drawingml/2006/main" xmlns:r="http://schemas.openxmlformats.org/officeDocument/2006/relationships" xmlns:p="http://schemas.openxmlformats.org/presentationml/2006/main">
-  <p:cSld name="Slide 7">
+  <p:cSld>
     <p:bg>
       <p:bgPr>
         <a:blipFill dpi="0" rotWithShape="1">
@@ -8241,13 +8267,12 @@
             <a:avLst/>
           </a:prstGeom>
           <a:noFill/>
-          <a:ln/>
         </p:spPr>
         <p:txBody>
           <a:bodyPr wrap="square" rtlCol="0" anchor="ctr"/>
           <a:lstStyle/>
           <a:p>
-            <a:pPr algn="r" indent="0" marL="0">
+            <a:pPr marL="0" indent="0" algn="r">
               <a:buNone/>
             </a:pPr>
             <a:r>
@@ -8255,9 +8280,9 @@
                 <a:solidFill>
                   <a:srgbClr val="8A9099"/>
                 </a:solidFill>
-                <a:latin typeface="微软雅黑" pitchFamily="34" charset="0"/>
-                <a:ea typeface="微软雅黑" pitchFamily="34" charset="-122"/>
-                <a:cs typeface="微软雅黑" pitchFamily="34" charset="-120"/>
+                <a:latin typeface="微软雅黑" panose="020B0503020204020204" pitchFamily="34" charset="-122"/>
+                <a:ea typeface="微软雅黑" panose="020B0503020204020204" pitchFamily="34" charset="-122"/>
+                <a:cs typeface="微软雅黑" panose="020B0503020204020204" pitchFamily="34" charset="-120"/>
               </a:rPr>
               <a:t>7 / 17</a:t>
             </a:r>
@@ -8280,13 +8305,12 @@
             <a:avLst/>
           </a:prstGeom>
           <a:noFill/>
-          <a:ln/>
         </p:spPr>
         <p:txBody>
           <a:bodyPr wrap="square" rtlCol="0" anchor="ctr"/>
           <a:lstStyle/>
           <a:p>
-            <a:pPr algn="l" indent="0" marL="0">
+            <a:pPr marL="0" indent="0" algn="l">
               <a:buNone/>
             </a:pPr>
             <a:r>
@@ -8294,9 +8318,9 @@
                 <a:solidFill>
                   <a:srgbClr val="1F4E9C"/>
                 </a:solidFill>
-                <a:latin typeface="微软雅黑" pitchFamily="34" charset="0"/>
-                <a:ea typeface="微软雅黑" pitchFamily="34" charset="-122"/>
-                <a:cs typeface="微软雅黑" pitchFamily="34" charset="-120"/>
+                <a:latin typeface="微软雅黑" panose="020B0503020204020204" pitchFamily="34" charset="-122"/>
+                <a:ea typeface="微软雅黑" panose="020B0503020204020204" pitchFamily="34" charset="-122"/>
+                <a:cs typeface="微软雅黑" panose="020B0503020204020204" pitchFamily="34" charset="-120"/>
               </a:rPr>
               <a:t>非递归先序</a:t>
             </a:r>
@@ -8319,13 +8343,12 @@
             <a:avLst/>
           </a:prstGeom>
           <a:noFill/>
-          <a:ln/>
         </p:spPr>
         <p:txBody>
           <a:bodyPr wrap="square" rtlCol="0" anchor="ctr"/>
           <a:lstStyle/>
           <a:p>
-            <a:pPr algn="l" indent="0" marL="0">
+            <a:pPr marL="0" indent="0" algn="l">
               <a:buNone/>
             </a:pPr>
             <a:r>
@@ -8333,9 +8356,9 @@
                 <a:solidFill>
                   <a:srgbClr val="1F2329"/>
                 </a:solidFill>
-                <a:latin typeface="微软雅黑" pitchFamily="34" charset="0"/>
-                <a:ea typeface="微软雅黑" pitchFamily="34" charset="-122"/>
-                <a:cs typeface="微软雅黑" pitchFamily="34" charset="-120"/>
+                <a:latin typeface="微软雅黑" panose="020B0503020204020204" pitchFamily="34" charset="-122"/>
+                <a:ea typeface="微软雅黑" panose="020B0503020204020204" pitchFamily="34" charset="-122"/>
+                <a:cs typeface="微软雅黑" panose="020B0503020204020204" pitchFamily="34" charset="-120"/>
               </a:rPr>
               <a:t>非递归先序：弹出即访问，先压右再压左</a:t>
             </a:r>
@@ -8360,7 +8383,6 @@
           <a:solidFill>
             <a:srgbClr val="F7F9FC"/>
           </a:solidFill>
-          <a:ln/>
         </p:spPr>
       </p:sp>
       <p:sp>
@@ -8380,7 +8402,6 @@
           <a:solidFill>
             <a:srgbClr val="1F4E9C"/>
           </a:solidFill>
-          <a:ln/>
         </p:spPr>
       </p:sp>
       <p:sp>
@@ -8398,13 +8419,12 @@
             <a:avLst/>
           </a:prstGeom>
           <a:noFill/>
-          <a:ln/>
         </p:spPr>
         <p:txBody>
           <a:bodyPr wrap="square" rtlCol="0" anchor="t"/>
           <a:lstStyle/>
           <a:p>
-            <a:pPr algn="l" indent="0" marL="0">
+            <a:pPr marL="0" indent="0" algn="l">
               <a:lnSpc>
                 <a:spcPct val="125000"/>
               </a:lnSpc>
@@ -8415,9 +8435,9 @@
                 <a:solidFill>
                   <a:srgbClr val="1F2329"/>
                 </a:solidFill>
-                <a:latin typeface="Consolas" pitchFamily="34" charset="0"/>
-                <a:ea typeface="Consolas" pitchFamily="34" charset="-122"/>
-                <a:cs typeface="Consolas" pitchFamily="34" charset="-120"/>
+                <a:latin typeface="Consolas" panose="020B0609020204030204" pitchFamily="34" charset="0"/>
+                <a:ea typeface="Consolas" panose="020B0609020204030204" pitchFamily="34" charset="-122"/>
+                <a:cs typeface="Consolas" panose="020B0609020204030204" pitchFamily="34" charset="-120"/>
               </a:rPr>
               <a:t>void PreOrder2(BiTree T){
     if(T == NULL) return;
@@ -8450,13 +8470,12 @@
             <a:avLst/>
           </a:prstGeom>
           <a:noFill/>
-          <a:ln/>
         </p:spPr>
         <p:txBody>
           <a:bodyPr wrap="square" rtlCol="0" anchor="t"/>
           <a:lstStyle/>
           <a:p>
-            <a:pPr algn="l" indent="0" marL="0">
+            <a:pPr marL="0" indent="0" algn="l">
               <a:buNone/>
             </a:pPr>
             <a:r>
@@ -8464,9 +8483,9 @@
                 <a:solidFill>
                   <a:srgbClr val="8A9099"/>
                 </a:solidFill>
-                <a:latin typeface="微软雅黑" pitchFamily="34" charset="0"/>
-                <a:ea typeface="微软雅黑" pitchFamily="34" charset="-122"/>
-                <a:cs typeface="微软雅黑" pitchFamily="34" charset="-120"/>
+                <a:latin typeface="微软雅黑" panose="020B0503020204020204" pitchFamily="34" charset="-122"/>
+                <a:ea typeface="微软雅黑" panose="020B0503020204020204" pitchFamily="34" charset="-122"/>
+                <a:cs typeface="微软雅黑" panose="020B0503020204020204" pitchFamily="34" charset="-120"/>
               </a:rPr>
               <a:t>为什么先压右再压左？栈后进先出，后压的左孩子先弹出，访问顺序就成了根、左、右</a:t>
             </a:r>
@@ -8484,7 +8503,7 @@
 
 <file path=ppt/slides/slide8.xml><?xml version="1.0" encoding="utf-8"?>
 <p:sld xmlns:a="http://schemas.openxmlformats.org/drawingml/2006/main" xmlns:r="http://schemas.openxmlformats.org/officeDocument/2006/relationships" xmlns:p="http://schemas.openxmlformats.org/presentationml/2006/main">
-  <p:cSld name="Slide 8">
+  <p:cSld>
     <p:bg>
       <p:bgPr>
         <a:blipFill dpi="0" rotWithShape="1">
@@ -8528,13 +8547,12 @@
             <a:avLst/>
           </a:prstGeom>
           <a:noFill/>
-          <a:ln/>
         </p:spPr>
         <p:txBody>
           <a:bodyPr wrap="square" rtlCol="0" anchor="ctr"/>
           <a:lstStyle/>
           <a:p>
-            <a:pPr algn="r" indent="0" marL="0">
+            <a:pPr marL="0" indent="0" algn="r">
               <a:buNone/>
             </a:pPr>
             <a:r>
@@ -8542,9 +8560,9 @@
                 <a:solidFill>
                   <a:srgbClr val="8A9099"/>
                 </a:solidFill>
-                <a:latin typeface="微软雅黑" pitchFamily="34" charset="0"/>
-                <a:ea typeface="微软雅黑" pitchFamily="34" charset="-122"/>
-                <a:cs typeface="微软雅黑" pitchFamily="34" charset="-120"/>
+                <a:latin typeface="微软雅黑" panose="020B0503020204020204" pitchFamily="34" charset="-122"/>
+                <a:ea typeface="微软雅黑" panose="020B0503020204020204" pitchFamily="34" charset="-122"/>
+                <a:cs typeface="微软雅黑" panose="020B0503020204020204" pitchFamily="34" charset="-120"/>
               </a:rPr>
               <a:t>8 / 17</a:t>
             </a:r>
@@ -8567,13 +8585,12 @@
             <a:avLst/>
           </a:prstGeom>
           <a:noFill/>
-          <a:ln/>
         </p:spPr>
         <p:txBody>
           <a:bodyPr wrap="square" rtlCol="0" anchor="ctr"/>
           <a:lstStyle/>
           <a:p>
-            <a:pPr algn="l" indent="0" marL="0">
+            <a:pPr marL="0" indent="0" algn="l">
               <a:buNone/>
             </a:pPr>
             <a:r>
@@ -8581,9 +8598,9 @@
                 <a:solidFill>
                   <a:srgbClr val="1F4E9C"/>
                 </a:solidFill>
-                <a:latin typeface="微软雅黑" pitchFamily="34" charset="0"/>
-                <a:ea typeface="微软雅黑" pitchFamily="34" charset="-122"/>
-                <a:cs typeface="微软雅黑" pitchFamily="34" charset="-120"/>
+                <a:latin typeface="微软雅黑" panose="020B0503020204020204" pitchFamily="34" charset="-122"/>
+                <a:ea typeface="微软雅黑" panose="020B0503020204020204" pitchFamily="34" charset="-122"/>
+                <a:cs typeface="微软雅黑" panose="020B0503020204020204" pitchFamily="34" charset="-120"/>
               </a:rPr>
               <a:t>非递归中序</a:t>
             </a:r>
@@ -8606,13 +8623,12 @@
             <a:avLst/>
           </a:prstGeom>
           <a:noFill/>
-          <a:ln/>
         </p:spPr>
         <p:txBody>
           <a:bodyPr wrap="square" rtlCol="0" anchor="ctr"/>
           <a:lstStyle/>
           <a:p>
-            <a:pPr algn="l" indent="0" marL="0">
+            <a:pPr marL="0" indent="0" algn="l">
               <a:buNone/>
             </a:pPr>
             <a:r>
@@ -8620,9 +8636,9 @@
                 <a:solidFill>
                   <a:srgbClr val="1F2329"/>
                 </a:solidFill>
-                <a:latin typeface="微软雅黑" pitchFamily="34" charset="0"/>
-                <a:ea typeface="微软雅黑" pitchFamily="34" charset="-122"/>
-                <a:cs typeface="微软雅黑" pitchFamily="34" charset="-120"/>
+                <a:latin typeface="微软雅黑" panose="020B0503020204020204" pitchFamily="34" charset="-122"/>
+                <a:ea typeface="微软雅黑" panose="020B0503020204020204" pitchFamily="34" charset="-122"/>
+                <a:cs typeface="微软雅黑" panose="020B0503020204020204" pitchFamily="34" charset="-120"/>
               </a:rPr>
               <a:t>非递归中序：一路压左到底，弹出访问，转向右</a:t>
             </a:r>
@@ -8647,7 +8663,6 @@
           <a:solidFill>
             <a:srgbClr val="F7F9FC"/>
           </a:solidFill>
-          <a:ln/>
         </p:spPr>
       </p:sp>
       <p:sp>
@@ -8667,7 +8682,6 @@
           <a:solidFill>
             <a:srgbClr val="1F4E9C"/>
           </a:solidFill>
-          <a:ln/>
         </p:spPr>
       </p:sp>
       <p:sp>
@@ -8685,13 +8699,12 @@
             <a:avLst/>
           </a:prstGeom>
           <a:noFill/>
-          <a:ln/>
         </p:spPr>
         <p:txBody>
           <a:bodyPr wrap="square" rtlCol="0" anchor="t"/>
           <a:lstStyle/>
           <a:p>
-            <a:pPr algn="l" indent="0" marL="0">
+            <a:pPr marL="0" indent="0" algn="l">
               <a:lnSpc>
                 <a:spcPct val="125000"/>
               </a:lnSpc>
@@ -8702,9 +8715,9 @@
                 <a:solidFill>
                   <a:srgbClr val="1F2329"/>
                 </a:solidFill>
-                <a:latin typeface="Consolas" pitchFamily="34" charset="0"/>
-                <a:ea typeface="Consolas" pitchFamily="34" charset="-122"/>
-                <a:cs typeface="Consolas" pitchFamily="34" charset="-120"/>
+                <a:latin typeface="Consolas" panose="020B0609020204030204" pitchFamily="34" charset="0"/>
+                <a:ea typeface="Consolas" panose="020B0609020204030204" pitchFamily="34" charset="-122"/>
+                <a:cs typeface="Consolas" panose="020B0609020204030204" pitchFamily="34" charset="-120"/>
               </a:rPr>
               <a:t>void InOrder2(BiTree T){
     if(T == NULL) return;
@@ -8736,13 +8749,12 @@
             <a:avLst/>
           </a:prstGeom>
           <a:noFill/>
-          <a:ln/>
         </p:spPr>
         <p:txBody>
           <a:bodyPr wrap="square" rtlCol="0" anchor="t"/>
           <a:lstStyle/>
           <a:p>
-            <a:pPr algn="l" indent="0" marL="0">
+            <a:pPr marL="0" indent="0" algn="l">
               <a:buNone/>
             </a:pPr>
             <a:r>
@@ -8750,9 +8762,9 @@
                 <a:solidFill>
                   <a:srgbClr val="8A9099"/>
                 </a:solidFill>
-                <a:latin typeface="微软雅黑" pitchFamily="34" charset="0"/>
-                <a:ea typeface="微软雅黑" pitchFamily="34" charset="-122"/>
-                <a:cs typeface="微软雅黑" pitchFamily="34" charset="-120"/>
+                <a:latin typeface="微软雅黑" panose="020B0503020204020204" pitchFamily="34" charset="-122"/>
+                <a:ea typeface="微软雅黑" panose="020B0503020204020204" pitchFamily="34" charset="-122"/>
+                <a:cs typeface="微软雅黑" panose="020B0503020204020204" pitchFamily="34" charset="-120"/>
               </a:rPr>
               <a:t>内层 while 把往左的一整条链全压栈，就是递归版'先一路往左走'的显式版；外层两个条件：栈空但 p 非空说明还有右子树，p 空但栈非空说明要回退</a:t>
             </a:r>
@@ -8770,7 +8782,7 @@
 
 <file path=ppt/slides/slide9.xml><?xml version="1.0" encoding="utf-8"?>
 <p:sld xmlns:a="http://schemas.openxmlformats.org/drawingml/2006/main" xmlns:r="http://schemas.openxmlformats.org/officeDocument/2006/relationships" xmlns:p="http://schemas.openxmlformats.org/presentationml/2006/main">
-  <p:cSld name="Slide 9">
+  <p:cSld>
     <p:bg>
       <p:bgPr>
         <a:blipFill dpi="0" rotWithShape="1">
@@ -8814,13 +8826,12 @@
             <a:avLst/>
           </a:prstGeom>
           <a:noFill/>
-          <a:ln/>
         </p:spPr>
         <p:txBody>
           <a:bodyPr wrap="square" rtlCol="0" anchor="ctr"/>
           <a:lstStyle/>
           <a:p>
-            <a:pPr algn="r" indent="0" marL="0">
+            <a:pPr marL="0" indent="0" algn="r">
               <a:buNone/>
             </a:pPr>
             <a:r>
@@ -8828,9 +8839,9 @@
                 <a:solidFill>
                   <a:srgbClr val="8A9099"/>
                 </a:solidFill>
-                <a:latin typeface="微软雅黑" pitchFamily="34" charset="0"/>
-                <a:ea typeface="微软雅黑" pitchFamily="34" charset="-122"/>
-                <a:cs typeface="微软雅黑" pitchFamily="34" charset="-120"/>
+                <a:latin typeface="微软雅黑" panose="020B0503020204020204" pitchFamily="34" charset="-122"/>
+                <a:ea typeface="微软雅黑" panose="020B0503020204020204" pitchFamily="34" charset="-122"/>
+                <a:cs typeface="微软雅黑" panose="020B0503020204020204" pitchFamily="34" charset="-120"/>
               </a:rPr>
               <a:t>9 / 17</a:t>
             </a:r>
@@ -8853,13 +8864,12 @@
             <a:avLst/>
           </a:prstGeom>
           <a:noFill/>
-          <a:ln/>
         </p:spPr>
         <p:txBody>
           <a:bodyPr wrap="square" rtlCol="0" anchor="ctr"/>
           <a:lstStyle/>
           <a:p>
-            <a:pPr algn="l" indent="0" marL="0">
+            <a:pPr marL="0" indent="0" algn="l">
               <a:buNone/>
             </a:pPr>
             <a:r>
@@ -8867,9 +8877,9 @@
                 <a:solidFill>
                   <a:srgbClr val="1F4E9C"/>
                 </a:solidFill>
-                <a:latin typeface="微软雅黑" pitchFamily="34" charset="0"/>
-                <a:ea typeface="微软雅黑" pitchFamily="34" charset="-122"/>
-                <a:cs typeface="微软雅黑" pitchFamily="34" charset="-120"/>
+                <a:latin typeface="微软雅黑" panose="020B0503020204020204" pitchFamily="34" charset="-122"/>
+                <a:ea typeface="微软雅黑" panose="020B0503020204020204" pitchFamily="34" charset="-122"/>
+                <a:cs typeface="微软雅黑" panose="020B0503020204020204" pitchFamily="34" charset="-120"/>
               </a:rPr>
               <a:t>非递归中序 · 过程页</a:t>
             </a:r>
@@ -8892,13 +8902,12 @@
             <a:avLst/>
           </a:prstGeom>
           <a:noFill/>
-          <a:ln/>
         </p:spPr>
         <p:txBody>
           <a:bodyPr wrap="square" rtlCol="0" anchor="ctr"/>
           <a:lstStyle/>
           <a:p>
-            <a:pPr algn="l" indent="0" marL="0">
+            <a:pPr marL="0" indent="0" algn="l">
               <a:buNone/>
             </a:pPr>
             <a:r>
@@ -8906,9 +8915,9 @@
                 <a:solidFill>
                   <a:srgbClr val="1F2329"/>
                 </a:solidFill>
-                <a:latin typeface="微软雅黑" pitchFamily="34" charset="0"/>
-                <a:ea typeface="微软雅黑" pitchFamily="34" charset="-122"/>
-                <a:cs typeface="微软雅黑" pitchFamily="34" charset="-120"/>
+                <a:latin typeface="微软雅黑" panose="020B0503020204020204" pitchFamily="34" charset="-122"/>
+                <a:ea typeface="微软雅黑" panose="020B0503020204020204" pitchFamily="34" charset="-122"/>
+                <a:cs typeface="微软雅黑" panose="020B0503020204020204" pitchFamily="34" charset="-120"/>
               </a:rPr>
               <a:t>中序遍历那棵树，栈怎么变（拿纸跟画）</a:t>
             </a:r>
@@ -8931,13 +8940,12 @@
             <a:avLst/>
           </a:prstGeom>
           <a:noFill/>
-          <a:ln/>
         </p:spPr>
         <p:txBody>
           <a:bodyPr wrap="square" rtlCol="0" anchor="t"/>
           <a:lstStyle/>
           <a:p>
-            <a:pPr algn="l" indent="0" marL="0">
+            <a:pPr marL="0" indent="0" algn="l">
               <a:lnSpc>
                 <a:spcPct val="115000"/>
               </a:lnSpc>
@@ -8948,25 +8956,68 @@
                 <a:solidFill>
                   <a:srgbClr val="1F4E9C"/>
                 </a:solidFill>
-                <a:latin typeface="微软雅黑" pitchFamily="34" charset="0"/>
-                <a:ea typeface="微软雅黑" pitchFamily="34" charset="-122"/>
-                <a:cs typeface="微软雅黑" pitchFamily="34" charset="-120"/>
+                <a:latin typeface="微软雅黑" panose="020B0503020204020204" pitchFamily="34" charset="-122"/>
+                <a:ea typeface="微软雅黑" panose="020B0503020204020204" pitchFamily="34" charset="-122"/>
+                <a:cs typeface="微软雅黑" panose="020B0503020204020204" pitchFamily="34" charset="-120"/>
               </a:rPr>
               <a:t>•  </a:t>
             </a:r>
-            <a:pPr algn="l" indent="0" marL="0">
+            <a:r>
+              <a:rPr lang="en-US" sz="1700" dirty="0">
+                <a:solidFill>
+                  <a:srgbClr val="000000"/>
+                </a:solidFill>
+              </a:rPr>
+              <a:t>① p=1，一路压左：压1、压2、压4，p 到 4 的左孩子 NULL 停；栈=[1,2,4]（4在顶）</a:t>
+            </a:r>
+            <a:endParaRPr lang="en-US" sz="1700" dirty="0"/>
+          </a:p>
+        </p:txBody>
+      </p:sp>
+      <p:sp>
+        <p:nvSpPr>
+          <p:cNvPr id="6" name="Text 4"/>
+          <p:cNvSpPr/>
+          <p:nvPr/>
+        </p:nvSpPr>
+        <p:spPr>
+          <a:xfrm>
+            <a:off x="896112" y="3171444"/>
+            <a:ext cx="10454335" cy="378714"/>
+          </a:xfrm>
+          <a:prstGeom prst="rect">
+            <a:avLst/>
+          </a:prstGeom>
+          <a:noFill/>
+        </p:spPr>
+        <p:txBody>
+          <a:bodyPr wrap="square" rtlCol="0" anchor="t"/>
+          <a:lstStyle/>
+          <a:p>
+            <a:pPr marL="0" indent="0" algn="l">
               <a:lnSpc>
                 <a:spcPct val="115000"/>
               </a:lnSpc>
               <a:buNone/>
             </a:pPr>
             <a:r>
+              <a:rPr lang="en-US" sz="1700" b="1" dirty="0">
+                <a:solidFill>
+                  <a:srgbClr val="1F4E9C"/>
+                </a:solidFill>
+                <a:latin typeface="微软雅黑" panose="020B0503020204020204" pitchFamily="34" charset="-122"/>
+                <a:ea typeface="微软雅黑" panose="020B0503020204020204" pitchFamily="34" charset="-122"/>
+                <a:cs typeface="微软雅黑" panose="020B0503020204020204" pitchFamily="34" charset="-120"/>
+              </a:rPr>
+              <a:t>•  </a:t>
+            </a:r>
+            <a:r>
               <a:rPr lang="en-US" sz="1700" dirty="0">
                 <a:solidFill>
                   <a:srgbClr val="000000"/>
                 </a:solidFill>
               </a:rPr>
-              <a:t>① p=1，一路压左：压1、压2、压4，p 到 4 的左孩子 NULL 停；栈=[1,2,4]（4在顶）</a:t>
+              <a:t>② 弹出4、visit(4)，p 转 4 的右孩子 NULL；输出 4</a:t>
             </a:r>
             <a:endParaRPr lang="en-US" sz="1700" dirty="0"/>
           </a:p>
@@ -8974,26 +9025,25 @@
       </p:sp>
       <p:sp>
         <p:nvSpPr>
-          <p:cNvPr id="6" name="Text 4"/>
-          <p:cNvSpPr/>
-          <p:nvPr/>
-        </p:nvSpPr>
-        <p:spPr>
-          <a:xfrm>
-            <a:off x="896112" y="3171444"/>
+          <p:cNvPr id="7" name="Text 5"/>
+          <p:cNvSpPr/>
+          <p:nvPr/>
+        </p:nvSpPr>
+        <p:spPr>
+          <a:xfrm>
+            <a:off x="896112" y="3623310"/>
             <a:ext cx="10454335" cy="378714"/>
           </a:xfrm>
           <a:prstGeom prst="rect">
             <a:avLst/>
           </a:prstGeom>
           <a:noFill/>
-          <a:ln/>
         </p:spPr>
         <p:txBody>
           <a:bodyPr wrap="square" rtlCol="0" anchor="t"/>
           <a:lstStyle/>
           <a:p>
-            <a:pPr algn="l" indent="0" marL="0">
+            <a:pPr marL="0" indent="0" algn="l">
               <a:lnSpc>
                 <a:spcPct val="115000"/>
               </a:lnSpc>
@@ -9004,25 +9054,68 @@
                 <a:solidFill>
                   <a:srgbClr val="1F4E9C"/>
                 </a:solidFill>
-                <a:latin typeface="微软雅黑" pitchFamily="34" charset="0"/>
-                <a:ea typeface="微软雅黑" pitchFamily="34" charset="-122"/>
-                <a:cs typeface="微软雅黑" pitchFamily="34" charset="-120"/>
+                <a:latin typeface="微软雅黑" panose="020B0503020204020204" pitchFamily="34" charset="-122"/>
+                <a:ea typeface="微软雅黑" panose="020B0503020204020204" pitchFamily="34" charset="-122"/>
+                <a:cs typeface="微软雅黑" panose="020B0503020204020204" pitchFamily="34" charset="-120"/>
               </a:rPr>
               <a:t>•  </a:t>
             </a:r>
-            <a:pPr algn="l" indent="0" marL="0">
+            <a:r>
+              <a:rPr lang="en-US" sz="1700" dirty="0">
+                <a:solidFill>
+                  <a:srgbClr val="000000"/>
+                </a:solidFill>
+              </a:rPr>
+              <a:t>③ p 空、栈非空，弹出2、visit(2)，p 转 2 的右孩子5；输出 4 2</a:t>
+            </a:r>
+            <a:endParaRPr lang="en-US" sz="1700" dirty="0"/>
+          </a:p>
+        </p:txBody>
+      </p:sp>
+      <p:sp>
+        <p:nvSpPr>
+          <p:cNvPr id="8" name="Text 6"/>
+          <p:cNvSpPr/>
+          <p:nvPr/>
+        </p:nvSpPr>
+        <p:spPr>
+          <a:xfrm>
+            <a:off x="896112" y="4075176"/>
+            <a:ext cx="10454335" cy="702564"/>
+          </a:xfrm>
+          <a:prstGeom prst="rect">
+            <a:avLst/>
+          </a:prstGeom>
+          <a:noFill/>
+        </p:spPr>
+        <p:txBody>
+          <a:bodyPr wrap="square" rtlCol="0" anchor="t"/>
+          <a:lstStyle/>
+          <a:p>
+            <a:pPr marL="0" indent="0" algn="l">
               <a:lnSpc>
                 <a:spcPct val="115000"/>
               </a:lnSpc>
               <a:buNone/>
             </a:pPr>
             <a:r>
+              <a:rPr lang="en-US" sz="1700" b="1" dirty="0">
+                <a:solidFill>
+                  <a:srgbClr val="1F4E9C"/>
+                </a:solidFill>
+                <a:latin typeface="微软雅黑" panose="020B0503020204020204" pitchFamily="34" charset="-122"/>
+                <a:ea typeface="微软雅黑" panose="020B0503020204020204" pitchFamily="34" charset="-122"/>
+                <a:cs typeface="微软雅黑" panose="020B0503020204020204" pitchFamily="34" charset="-120"/>
+              </a:rPr>
+              <a:t>•  </a:t>
+            </a:r>
+            <a:r>
               <a:rPr lang="en-US" sz="1700" dirty="0">
                 <a:solidFill>
                   <a:srgbClr val="000000"/>
                 </a:solidFill>
               </a:rPr>
-              <a:t>② 弹出4、visit(4)，p 转 4 的右孩子 NULL；输出 4</a:t>
+              <a:t>④ p=5，压5，p 到 5 左孩子 NULL；弹出5、visit(5)，p 转 NULL；输出 4 2 5</a:t>
             </a:r>
             <a:endParaRPr lang="en-US" sz="1700" dirty="0"/>
           </a:p>
@@ -9030,26 +9123,25 @@
       </p:sp>
       <p:sp>
         <p:nvSpPr>
-          <p:cNvPr id="7" name="Text 5"/>
-          <p:cNvSpPr/>
-          <p:nvPr/>
-        </p:nvSpPr>
-        <p:spPr>
-          <a:xfrm>
-            <a:off x="896112" y="3623310"/>
-            <a:ext cx="10454335" cy="378714"/>
-          </a:xfrm>
-          <a:prstGeom prst="rect">
-            <a:avLst/>
-          </a:prstGeom>
-          <a:noFill/>
-          <a:ln/>
+          <p:cNvPr id="9" name="Text 7"/>
+          <p:cNvSpPr/>
+          <p:nvPr/>
+        </p:nvSpPr>
+        <p:spPr>
+          <a:xfrm>
+            <a:off x="896112" y="4850892"/>
+            <a:ext cx="10454335" cy="702564"/>
+          </a:xfrm>
+          <a:prstGeom prst="rect">
+            <a:avLst/>
+          </a:prstGeom>
+          <a:noFill/>
         </p:spPr>
         <p:txBody>
           <a:bodyPr wrap="square" rtlCol="0" anchor="t"/>
           <a:lstStyle/>
           <a:p>
-            <a:pPr algn="l" indent="0" marL="0">
+            <a:pPr marL="0" indent="0" algn="l">
               <a:lnSpc>
                 <a:spcPct val="115000"/>
               </a:lnSpc>
@@ -9060,130 +9152,12 @@
                 <a:solidFill>
                   <a:srgbClr val="1F4E9C"/>
                 </a:solidFill>
-                <a:latin typeface="微软雅黑" pitchFamily="34" charset="0"/>
-                <a:ea typeface="微软雅黑" pitchFamily="34" charset="-122"/>
-                <a:cs typeface="微软雅黑" pitchFamily="34" charset="-120"/>
+                <a:latin typeface="微软雅黑" panose="020B0503020204020204" pitchFamily="34" charset="-122"/>
+                <a:ea typeface="微软雅黑" panose="020B0503020204020204" pitchFamily="34" charset="-122"/>
+                <a:cs typeface="微软雅黑" panose="020B0503020204020204" pitchFamily="34" charset="-120"/>
               </a:rPr>
               <a:t>•  </a:t>
             </a:r>
-            <a:pPr algn="l" indent="0" marL="0">
-              <a:lnSpc>
-                <a:spcPct val="115000"/>
-              </a:lnSpc>
-              <a:buNone/>
-            </a:pPr>
-            <a:r>
-              <a:rPr lang="en-US" sz="1700" dirty="0">
-                <a:solidFill>
-                  <a:srgbClr val="000000"/>
-                </a:solidFill>
-              </a:rPr>
-              <a:t>③ p 空、栈非空，弹出2、visit(2)，p 转 2 的右孩子5；输出 4 2</a:t>
-            </a:r>
-            <a:endParaRPr lang="en-US" sz="1700" dirty="0"/>
-          </a:p>
-        </p:txBody>
-      </p:sp>
-      <p:sp>
-        <p:nvSpPr>
-          <p:cNvPr id="8" name="Text 6"/>
-          <p:cNvSpPr/>
-          <p:nvPr/>
-        </p:nvSpPr>
-        <p:spPr>
-          <a:xfrm>
-            <a:off x="896112" y="4075176"/>
-            <a:ext cx="10454335" cy="702564"/>
-          </a:xfrm>
-          <a:prstGeom prst="rect">
-            <a:avLst/>
-          </a:prstGeom>
-          <a:noFill/>
-          <a:ln/>
-        </p:spPr>
-        <p:txBody>
-          <a:bodyPr wrap="square" rtlCol="0" anchor="t"/>
-          <a:lstStyle/>
-          <a:p>
-            <a:pPr algn="l" indent="0" marL="0">
-              <a:lnSpc>
-                <a:spcPct val="115000"/>
-              </a:lnSpc>
-              <a:buNone/>
-            </a:pPr>
-            <a:r>
-              <a:rPr lang="en-US" sz="1700" b="1" dirty="0">
-                <a:solidFill>
-                  <a:srgbClr val="1F4E9C"/>
-                </a:solidFill>
-                <a:latin typeface="微软雅黑" pitchFamily="34" charset="0"/>
-                <a:ea typeface="微软雅黑" pitchFamily="34" charset="-122"/>
-                <a:cs typeface="微软雅黑" pitchFamily="34" charset="-120"/>
-              </a:rPr>
-              <a:t>•  </a:t>
-            </a:r>
-            <a:pPr algn="l" indent="0" marL="0">
-              <a:lnSpc>
-                <a:spcPct val="115000"/>
-              </a:lnSpc>
-              <a:buNone/>
-            </a:pPr>
-            <a:r>
-              <a:rPr lang="en-US" sz="1700" dirty="0">
-                <a:solidFill>
-                  <a:srgbClr val="000000"/>
-                </a:solidFill>
-              </a:rPr>
-              <a:t>④ p=5，压5，p 到 5 左孩子 NULL；弹出5、visit(5)，p 转 NULL；输出 4 2 5</a:t>
-            </a:r>
-            <a:endParaRPr lang="en-US" sz="1700" dirty="0"/>
-          </a:p>
-        </p:txBody>
-      </p:sp>
-      <p:sp>
-        <p:nvSpPr>
-          <p:cNvPr id="9" name="Text 7"/>
-          <p:cNvSpPr/>
-          <p:nvPr/>
-        </p:nvSpPr>
-        <p:spPr>
-          <a:xfrm>
-            <a:off x="896112" y="4850892"/>
-            <a:ext cx="10454335" cy="702564"/>
-          </a:xfrm>
-          <a:prstGeom prst="rect">
-            <a:avLst/>
-          </a:prstGeom>
-          <a:noFill/>
-          <a:ln/>
-        </p:spPr>
-        <p:txBody>
-          <a:bodyPr wrap="square" rtlCol="0" anchor="t"/>
-          <a:lstStyle/>
-          <a:p>
-            <a:pPr algn="l" indent="0" marL="0">
-              <a:lnSpc>
-                <a:spcPct val="115000"/>
-              </a:lnSpc>
-              <a:buNone/>
-            </a:pPr>
-            <a:r>
-              <a:rPr lang="en-US" sz="1700" b="1" dirty="0">
-                <a:solidFill>
-                  <a:srgbClr val="1F4E9C"/>
-                </a:solidFill>
-                <a:latin typeface="微软雅黑" pitchFamily="34" charset="0"/>
-                <a:ea typeface="微软雅黑" pitchFamily="34" charset="-122"/>
-                <a:cs typeface="微软雅黑" pitchFamily="34" charset="-120"/>
-              </a:rPr>
-              <a:t>•  </a:t>
-            </a:r>
-            <a:pPr algn="l" indent="0" marL="0">
-              <a:lnSpc>
-                <a:spcPct val="115000"/>
-              </a:lnSpc>
-              <a:buNone/>
-            </a:pPr>
             <a:r>
               <a:rPr lang="en-US" sz="1700" dirty="0">
                 <a:solidFill>
@@ -9211,13 +9185,12 @@
             <a:avLst/>
           </a:prstGeom>
           <a:noFill/>
-          <a:ln/>
         </p:spPr>
         <p:txBody>
           <a:bodyPr wrap="square" rtlCol="0" anchor="t"/>
           <a:lstStyle/>
           <a:p>
-            <a:pPr algn="l" indent="0" marL="0">
+            <a:pPr marL="0" indent="0" algn="l">
               <a:buNone/>
             </a:pPr>
             <a:r>
@@ -9225,9 +9198,9 @@
                 <a:solidFill>
                   <a:srgbClr val="8A9099"/>
                 </a:solidFill>
-                <a:latin typeface="微软雅黑" pitchFamily="34" charset="0"/>
-                <a:ea typeface="微软雅黑" pitchFamily="34" charset="-122"/>
-                <a:cs typeface="微软雅黑" pitchFamily="34" charset="-120"/>
+                <a:latin typeface="微软雅黑" panose="020B0503020204020204" pitchFamily="34" charset="-122"/>
+                <a:ea typeface="微软雅黑" panose="020B0503020204020204" pitchFamily="34" charset="-122"/>
+                <a:cs typeface="微软雅黑" panose="020B0503020204020204" pitchFamily="34" charset="-120"/>
               </a:rPr>
               <a:t>最终中序 4 2 5 1 3，和递归版一致；这张图把递归的隐式栈变成了显式的栈</a:t>
             </a:r>
@@ -9286,7 +9259,7 @@
     </a:clrScheme>
     <a:fontScheme name="Office">
       <a:majorFont>
-        <a:latin typeface="Calibri Light" panose="020F0302020204030204"/>
+        <a:latin typeface="Calibri Light"/>
         <a:ea typeface=""/>
         <a:cs typeface=""/>
         <a:font script="Jpan" typeface="游ゴシック Light"/>
@@ -9319,26 +9292,9 @@
         <a:font script="Viet" typeface="Times New Roman"/>
         <a:font script="Uigh" typeface="Microsoft Uighur"/>
         <a:font script="Geor" typeface="Sylfaen"/>
-        <a:font script="Armn" typeface="Arial"/>
-        <a:font script="Bugi" typeface="Leelawadee UI"/>
-        <a:font script="Bopo" typeface="Microsoft JhengHei"/>
-        <a:font script="Java" typeface="Javanese Text"/>
-        <a:font script="Lisu" typeface="Segoe UI"/>
-        <a:font script="Mymr" typeface="Myanmar Text"/>
-        <a:font script="Nkoo" typeface="Ebrima"/>
-        <a:font script="Olck" typeface="Nirmala UI"/>
-        <a:font script="Osma" typeface="Ebrima"/>
-        <a:font script="Phag" typeface="Phagspa"/>
-        <a:font script="Syrn" typeface="Estrangelo Edessa"/>
-        <a:font script="Syrj" typeface="Estrangelo Edessa"/>
-        <a:font script="Syre" typeface="Estrangelo Edessa"/>
-        <a:font script="Sora" typeface="Nirmala UI"/>
-        <a:font script="Tale" typeface="Microsoft Tai Le"/>
-        <a:font script="Talu" typeface="Microsoft New Tai Lue"/>
-        <a:font script="Tfng" typeface="Ebrima"/>
       </a:majorFont>
       <a:minorFont>
-        <a:latin typeface="Calibri" panose="020F0502020204030204"/>
+        <a:latin typeface="Calibri"/>
         <a:ea typeface=""/>
         <a:cs typeface=""/>
         <a:font script="Jpan" typeface="游ゴシック"/>
@@ -9371,23 +9327,6 @@
         <a:font script="Viet" typeface="Arial"/>
         <a:font script="Uigh" typeface="Microsoft Uighur"/>
         <a:font script="Geor" typeface="Sylfaen"/>
-        <a:font script="Armn" typeface="Arial"/>
-        <a:font script="Bugi" typeface="Leelawadee UI"/>
-        <a:font script="Bopo" typeface="Microsoft JhengHei"/>
-        <a:font script="Java" typeface="Javanese Text"/>
-        <a:font script="Lisu" typeface="Segoe UI"/>
-        <a:font script="Mymr" typeface="Myanmar Text"/>
-        <a:font script="Nkoo" typeface="Ebrima"/>
-        <a:font script="Olck" typeface="Nirmala UI"/>
-        <a:font script="Osma" typeface="Ebrima"/>
-        <a:font script="Phag" typeface="Phagspa"/>
-        <a:font script="Syrn" typeface="Estrangelo Edessa"/>
-        <a:font script="Syrj" typeface="Estrangelo Edessa"/>
-        <a:font script="Syre" typeface="Estrangelo Edessa"/>
-        <a:font script="Sora" typeface="Nirmala UI"/>
-        <a:font script="Tale" typeface="Microsoft Tai Le"/>
-        <a:font script="Talu" typeface="Microsoft New Tai Lue"/>
-        <a:font script="Tfng" typeface="Ebrima"/>
       </a:minorFont>
     </a:fontScheme>
     <a:fmtScheme name="Office">
@@ -9528,8 +9467,265 @@
       </a:bgFillStyleLst>
     </a:fmtScheme>
   </a:themeElements>
-  <a:objectDefaults/>
-  <a:extraClrSchemeLst/>
+  <a:extLst>
+    <a:ext uri="{05A4C25C-085E-4340-85A3-A5531E510DB2}">
+      <thm15:themeFamily xmlns:thm15="http://schemas.microsoft.com/office/thememl/2012/main" name="Office Theme" id="{62F939B6-93AF-4DB8-9C6B-D6C7DFDC589F}" vid="{4A3C46E8-61CC-4603-A589-7422A47A8E4A}"/>
+    </a:ext>
+  </a:extLst>
+</a:theme>
+</file>
+
+<file path=ppt/theme/theme2.xml><?xml version="1.0" encoding="utf-8"?>
+<a:theme xmlns:a="http://schemas.openxmlformats.org/drawingml/2006/main" name="Office Theme">
+  <a:themeElements>
+    <a:clrScheme name="Office">
+      <a:dk1>
+        <a:sysClr val="windowText" lastClr="000000"/>
+      </a:dk1>
+      <a:lt1>
+        <a:sysClr val="window" lastClr="FFFFFF"/>
+      </a:lt1>
+      <a:dk2>
+        <a:srgbClr val="44546A"/>
+      </a:dk2>
+      <a:lt2>
+        <a:srgbClr val="E7E6E6"/>
+      </a:lt2>
+      <a:accent1>
+        <a:srgbClr val="4472C4"/>
+      </a:accent1>
+      <a:accent2>
+        <a:srgbClr val="ED7D31"/>
+      </a:accent2>
+      <a:accent3>
+        <a:srgbClr val="A5A5A5"/>
+      </a:accent3>
+      <a:accent4>
+        <a:srgbClr val="FFC000"/>
+      </a:accent4>
+      <a:accent5>
+        <a:srgbClr val="5B9BD5"/>
+      </a:accent5>
+      <a:accent6>
+        <a:srgbClr val="70AD47"/>
+      </a:accent6>
+      <a:hlink>
+        <a:srgbClr val="0563C1"/>
+      </a:hlink>
+      <a:folHlink>
+        <a:srgbClr val="954F72"/>
+      </a:folHlink>
+    </a:clrScheme>
+    <a:fontScheme name="Office">
+      <a:majorFont>
+        <a:latin typeface="Calibri Light"/>
+        <a:ea typeface=""/>
+        <a:cs typeface=""/>
+        <a:font script="Jpan" typeface="游ゴシック Light"/>
+        <a:font script="Hang" typeface="맑은 고딕"/>
+        <a:font script="Hans" typeface="等线 Light"/>
+        <a:font script="Hant" typeface="新細明體"/>
+        <a:font script="Arab" typeface="Times New Roman"/>
+        <a:font script="Hebr" typeface="Times New Roman"/>
+        <a:font script="Thai" typeface="Angsana New"/>
+        <a:font script="Ethi" typeface="Nyala"/>
+        <a:font script="Beng" typeface="Vrinda"/>
+        <a:font script="Gujr" typeface="Shruti"/>
+        <a:font script="Khmr" typeface="MoolBoran"/>
+        <a:font script="Knda" typeface="Tunga"/>
+        <a:font script="Guru" typeface="Raavi"/>
+        <a:font script="Cans" typeface="Euphemia"/>
+        <a:font script="Cher" typeface="Plantagenet Cherokee"/>
+        <a:font script="Yiii" typeface="Microsoft Yi Baiti"/>
+        <a:font script="Tibt" typeface="Microsoft Himalaya"/>
+        <a:font script="Thaa" typeface="MV Boli"/>
+        <a:font script="Deva" typeface="Mangal"/>
+        <a:font script="Telu" typeface="Gautami"/>
+        <a:font script="Taml" typeface="Latha"/>
+        <a:font script="Syrc" typeface="Estrangelo Edessa"/>
+        <a:font script="Orya" typeface="Kalinga"/>
+        <a:font script="Mlym" typeface="Kartika"/>
+        <a:font script="Laoo" typeface="DokChampa"/>
+        <a:font script="Sinh" typeface="Iskoola Pota"/>
+        <a:font script="Mong" typeface="Mongolian Baiti"/>
+        <a:font script="Viet" typeface="Times New Roman"/>
+        <a:font script="Uigh" typeface="Microsoft Uighur"/>
+        <a:font script="Geor" typeface="Sylfaen"/>
+      </a:majorFont>
+      <a:minorFont>
+        <a:latin typeface="Calibri"/>
+        <a:ea typeface=""/>
+        <a:cs typeface=""/>
+        <a:font script="Jpan" typeface="游ゴシック"/>
+        <a:font script="Hang" typeface="맑은 고딕"/>
+        <a:font script="Hans" typeface="等线"/>
+        <a:font script="Hant" typeface="新細明體"/>
+        <a:font script="Arab" typeface="Arial"/>
+        <a:font script="Hebr" typeface="Arial"/>
+        <a:font script="Thai" typeface="Cordia New"/>
+        <a:font script="Ethi" typeface="Nyala"/>
+        <a:font script="Beng" typeface="Vrinda"/>
+        <a:font script="Gujr" typeface="Shruti"/>
+        <a:font script="Khmr" typeface="DaunPenh"/>
+        <a:font script="Knda" typeface="Tunga"/>
+        <a:font script="Guru" typeface="Raavi"/>
+        <a:font script="Cans" typeface="Euphemia"/>
+        <a:font script="Cher" typeface="Plantagenet Cherokee"/>
+        <a:font script="Yiii" typeface="Microsoft Yi Baiti"/>
+        <a:font script="Tibt" typeface="Microsoft Himalaya"/>
+        <a:font script="Thaa" typeface="MV Boli"/>
+        <a:font script="Deva" typeface="Mangal"/>
+        <a:font script="Telu" typeface="Gautami"/>
+        <a:font script="Taml" typeface="Latha"/>
+        <a:font script="Syrc" typeface="Estrangelo Edessa"/>
+        <a:font script="Orya" typeface="Kalinga"/>
+        <a:font script="Mlym" typeface="Kartika"/>
+        <a:font script="Laoo" typeface="DokChampa"/>
+        <a:font script="Sinh" typeface="Iskoola Pota"/>
+        <a:font script="Mong" typeface="Mongolian Baiti"/>
+        <a:font script="Viet" typeface="Arial"/>
+        <a:font script="Uigh" typeface="Microsoft Uighur"/>
+        <a:font script="Geor" typeface="Sylfaen"/>
+      </a:minorFont>
+    </a:fontScheme>
+    <a:fmtScheme name="Office">
+      <a:fillStyleLst>
+        <a:solidFill>
+          <a:schemeClr val="phClr"/>
+        </a:solidFill>
+        <a:gradFill rotWithShape="1">
+          <a:gsLst>
+            <a:gs pos="0">
+              <a:schemeClr val="phClr">
+                <a:lumMod val="110000"/>
+                <a:satMod val="105000"/>
+                <a:tint val="67000"/>
+              </a:schemeClr>
+            </a:gs>
+            <a:gs pos="50000">
+              <a:schemeClr val="phClr">
+                <a:lumMod val="105000"/>
+                <a:satMod val="103000"/>
+                <a:tint val="73000"/>
+              </a:schemeClr>
+            </a:gs>
+            <a:gs pos="100000">
+              <a:schemeClr val="phClr">
+                <a:lumMod val="105000"/>
+                <a:satMod val="109000"/>
+                <a:tint val="81000"/>
+              </a:schemeClr>
+            </a:gs>
+          </a:gsLst>
+          <a:lin ang="5400000" scaled="0"/>
+        </a:gradFill>
+        <a:gradFill rotWithShape="1">
+          <a:gsLst>
+            <a:gs pos="0">
+              <a:schemeClr val="phClr">
+                <a:satMod val="103000"/>
+                <a:lumMod val="102000"/>
+                <a:tint val="94000"/>
+              </a:schemeClr>
+            </a:gs>
+            <a:gs pos="50000">
+              <a:schemeClr val="phClr">
+                <a:satMod val="110000"/>
+                <a:lumMod val="100000"/>
+                <a:shade val="100000"/>
+              </a:schemeClr>
+            </a:gs>
+            <a:gs pos="100000">
+              <a:schemeClr val="phClr">
+                <a:lumMod val="99000"/>
+                <a:satMod val="120000"/>
+                <a:shade val="78000"/>
+              </a:schemeClr>
+            </a:gs>
+          </a:gsLst>
+          <a:lin ang="5400000" scaled="0"/>
+        </a:gradFill>
+      </a:fillStyleLst>
+      <a:lnStyleLst>
+        <a:ln w="6350" cap="flat" cmpd="sng" algn="ctr">
+          <a:solidFill>
+            <a:schemeClr val="phClr"/>
+          </a:solidFill>
+          <a:prstDash val="solid"/>
+          <a:miter lim="800000"/>
+        </a:ln>
+        <a:ln w="12700" cap="flat" cmpd="sng" algn="ctr">
+          <a:solidFill>
+            <a:schemeClr val="phClr"/>
+          </a:solidFill>
+          <a:prstDash val="solid"/>
+          <a:miter lim="800000"/>
+        </a:ln>
+        <a:ln w="19050" cap="flat" cmpd="sng" algn="ctr">
+          <a:solidFill>
+            <a:schemeClr val="phClr"/>
+          </a:solidFill>
+          <a:prstDash val="solid"/>
+          <a:miter lim="800000"/>
+        </a:ln>
+      </a:lnStyleLst>
+      <a:effectStyleLst>
+        <a:effectStyle>
+          <a:effectLst/>
+        </a:effectStyle>
+        <a:effectStyle>
+          <a:effectLst/>
+        </a:effectStyle>
+        <a:effectStyle>
+          <a:effectLst>
+            <a:outerShdw blurRad="57150" dist="19050" dir="5400000" algn="ctr" rotWithShape="0">
+              <a:srgbClr val="000000">
+                <a:alpha val="63000"/>
+              </a:srgbClr>
+            </a:outerShdw>
+          </a:effectLst>
+        </a:effectStyle>
+      </a:effectStyleLst>
+      <a:bgFillStyleLst>
+        <a:solidFill>
+          <a:schemeClr val="phClr"/>
+        </a:solidFill>
+        <a:solidFill>
+          <a:schemeClr val="phClr">
+            <a:tint val="95000"/>
+            <a:satMod val="170000"/>
+          </a:schemeClr>
+        </a:solidFill>
+        <a:gradFill rotWithShape="1">
+          <a:gsLst>
+            <a:gs pos="0">
+              <a:schemeClr val="phClr">
+                <a:tint val="93000"/>
+                <a:satMod val="150000"/>
+                <a:shade val="98000"/>
+                <a:lumMod val="102000"/>
+              </a:schemeClr>
+            </a:gs>
+            <a:gs pos="50000">
+              <a:schemeClr val="phClr">
+                <a:tint val="98000"/>
+                <a:satMod val="130000"/>
+                <a:shade val="90000"/>
+                <a:lumMod val="103000"/>
+              </a:schemeClr>
+            </a:gs>
+            <a:gs pos="100000">
+              <a:schemeClr val="phClr">
+                <a:shade val="63000"/>
+                <a:satMod val="120000"/>
+              </a:schemeClr>
+            </a:gs>
+          </a:gsLst>
+          <a:lin ang="5400000" scaled="0"/>
+        </a:gradFill>
+      </a:bgFillStyleLst>
+    </a:fmtScheme>
+  </a:themeElements>
   <a:extLst>
     <a:ext uri="{05A4C25C-085E-4340-85A3-A5531E510DB2}">
       <thm15:themeFamily xmlns:thm15="http://schemas.microsoft.com/office/thememl/2012/main" name="Office Theme" id="{62F939B6-93AF-4DB8-9C6B-D6C7DFDC589F}" vid="{4A3C46E8-61CC-4603-A589-7422A47A8E4A}"/>
